--- a/lectures-and-labs/week03/prompting-lecture.pptx
+++ b/lectures-and-labs/week03/prompting-lecture.pptx
@@ -3565,4056 +3565,6 @@
 </p:notesMaster>
 </file>
 
-<file path=ppt/notesSlides/notesSlide1.xml><?xml version="1.0" encoding="utf-8"?>
-<p:notes xmlns:a="http://schemas.openxmlformats.org/drawingml/2006/main" xmlns:r="http://schemas.openxmlformats.org/officeDocument/2006/relationships" xmlns:p="http://schemas.openxmlformats.org/presentationml/2006/main">
-  <p:cSld>
-    <p:spTree>
-      <p:nvGrpSpPr>
-        <p:cNvPr id="1" name=""/>
-        <p:cNvGrpSpPr/>
-        <p:nvPr/>
-      </p:nvGrpSpPr>
-      <p:grpSpPr>
-        <a:xfrm>
-          <a:off x="0" y="0"/>
-          <a:ext cx="0" cy="0"/>
-          <a:chOff x="0" y="0"/>
-          <a:chExt cx="0" cy="0"/>
-        </a:xfrm>
-      </p:grpSpPr>
-      <p:sp>
-        <p:nvSpPr>
-          <p:cNvPr id="2" name="Slide Image Placeholder 1"/>
-          <p:cNvSpPr>
-            <a:spLocks noGrp="1" noRot="1" noChangeAspect="1"/>
-          </p:cNvSpPr>
-          <p:nvPr>
-            <p:ph type="sldImg" idx="2"/>
-          </p:nvPr>
-        </p:nvSpPr>
-        <p:spPr/>
-      </p:sp>
-      <p:sp>
-        <p:nvSpPr>
-          <p:cNvPr id="3" name="Notes Placeholder 2"/>
-          <p:cNvSpPr>
-            <a:spLocks noGrp="1"/>
-          </p:cNvSpPr>
-          <p:nvPr>
-            <p:ph type="body" sz="quarter" idx="3"/>
-          </p:nvPr>
-        </p:nvSpPr>
-        <p:spPr/>
-        <p:txBody>
-          <a:bodyPr/>
-          <a:lstStyle/>
-          <a:p>
-            <a:r>
-              <a:rPr dirty="0"/>
-              <a:t>~0:01. Title while they settle.</a:t>
-            </a:r>
-          </a:p>
-          <a:p>
-            <a:endParaRPr dirty="0"/>
-          </a:p>
-          <a:p>
-            <a:r>
-              <a:rPr dirty="0"/>
-              <a:t>Two halves, and the join is the point of the two lectures: prompting (how you ask) was the whole skill in 2023; context engineering (what the model can see) is the larger half now. Part 1 states the rules; part 2 explains the mechanism behind them. Do not treat context engineering as an advanced extra — it is where most real failures live.</a:t>
-            </a:r>
-          </a:p>
-        </p:txBody>
-      </p:sp>
-      <p:sp>
-        <p:nvSpPr>
-          <p:cNvPr id="4" name="Slide Number Placeholder 3"/>
-          <p:cNvSpPr>
-            <a:spLocks noGrp="1"/>
-          </p:cNvSpPr>
-          <p:nvPr>
-            <p:ph type="sldNum" sz="quarter" idx="5"/>
-          </p:nvPr>
-        </p:nvSpPr>
-        <p:spPr/>
-      </p:sp>
-    </p:spTree>
-  </p:cSld>
-  <p:clrMapOvr>
-    <a:masterClrMapping/>
-  </p:clrMapOvr>
-</p:notes>
-</file>
-
-<file path=ppt/notesSlides/notesSlide10.xml><?xml version="1.0" encoding="utf-8"?>
-<p:notes xmlns:a="http://schemas.openxmlformats.org/drawingml/2006/main" xmlns:r="http://schemas.openxmlformats.org/officeDocument/2006/relationships" xmlns:p="http://schemas.openxmlformats.org/presentationml/2006/main">
-  <p:cSld>
-    <p:spTree>
-      <p:nvGrpSpPr>
-        <p:cNvPr id="1" name=""/>
-        <p:cNvGrpSpPr/>
-        <p:nvPr/>
-      </p:nvGrpSpPr>
-      <p:grpSpPr>
-        <a:xfrm>
-          <a:off x="0" y="0"/>
-          <a:ext cx="0" cy="0"/>
-          <a:chOff x="0" y="0"/>
-          <a:chExt cx="0" cy="0"/>
-        </a:xfrm>
-      </p:grpSpPr>
-      <p:sp>
-        <p:nvSpPr>
-          <p:cNvPr id="2" name="Slide Image Placeholder 1"/>
-          <p:cNvSpPr>
-            <a:spLocks noGrp="1" noRot="1" noChangeAspect="1"/>
-          </p:cNvSpPr>
-          <p:nvPr>
-            <p:ph type="sldImg" idx="2"/>
-          </p:nvPr>
-        </p:nvSpPr>
-        <p:spPr/>
-      </p:sp>
-      <p:sp>
-        <p:nvSpPr>
-          <p:cNvPr id="3" name="Notes Placeholder 2"/>
-          <p:cNvSpPr>
-            <a:spLocks noGrp="1"/>
-          </p:cNvSpPr>
-          <p:nvPr>
-            <p:ph type="body" sz="quarter" idx="3"/>
-          </p:nvPr>
-        </p:nvSpPr>
-        <p:spPr/>
-        <p:txBody>
-          <a:bodyPr/>
-          <a:lstStyle/>
-          <a:p>
-            <a:r>
-              <a:rPr dirty="0"/>
-              <a:t>~0:14. SPEC: the recipe, and the thing they will actually use every day. Four letters, one slide.</a:t>
-            </a:r>
-          </a:p>
-          <a:p>
-            <a:endParaRPr dirty="0"/>
-          </a:p>
-          <a:p>
-            <a:r>
-              <a:rPr dirty="0"/>
-              <a:t>Say that any framework works and the discipline matters more than the acronym — but pick one and stay with it, because switching frameworks is a way of avoiding the work. The E is the letter students skip, and it is the one part 2 shows to be the strongest steering there is: an example is a pattern the model continues, where a description is something it interprets.</a:t>
-            </a:r>
-          </a:p>
-        </p:txBody>
-      </p:sp>
-      <p:sp>
-        <p:nvSpPr>
-          <p:cNvPr id="4" name="Slide Number Placeholder 3"/>
-          <p:cNvSpPr>
-            <a:spLocks noGrp="1"/>
-          </p:cNvSpPr>
-          <p:nvPr>
-            <p:ph type="sldNum" sz="quarter" idx="5"/>
-          </p:nvPr>
-        </p:nvSpPr>
-        <p:spPr/>
-      </p:sp>
-    </p:spTree>
-  </p:cSld>
-  <p:clrMapOvr>
-    <a:masterClrMapping/>
-  </p:clrMapOvr>
-</p:notes>
-</file>
-
-<file path=ppt/notesSlides/notesSlide11.xml><?xml version="1.0" encoding="utf-8"?>
-<p:notes xmlns:a="http://schemas.openxmlformats.org/drawingml/2006/main" xmlns:r="http://schemas.openxmlformats.org/officeDocument/2006/relationships" xmlns:p="http://schemas.openxmlformats.org/presentationml/2006/main">
-  <p:cSld>
-    <p:spTree>
-      <p:nvGrpSpPr>
-        <p:cNvPr id="1" name=""/>
-        <p:cNvGrpSpPr/>
-        <p:nvPr/>
-      </p:nvGrpSpPr>
-      <p:grpSpPr>
-        <a:xfrm>
-          <a:off x="0" y="0"/>
-          <a:ext cx="0" cy="0"/>
-          <a:chOff x="0" y="0"/>
-          <a:chExt cx="0" cy="0"/>
-        </a:xfrm>
-      </p:grpSpPr>
-      <p:sp>
-        <p:nvSpPr>
-          <p:cNvPr id="2" name="Slide Image Placeholder 1"/>
-          <p:cNvSpPr>
-            <a:spLocks noGrp="1" noRot="1" noChangeAspect="1"/>
-          </p:cNvSpPr>
-          <p:nvPr>
-            <p:ph type="sldImg" idx="2"/>
-          </p:nvPr>
-        </p:nvSpPr>
-        <p:spPr/>
-      </p:sp>
-      <p:sp>
-        <p:nvSpPr>
-          <p:cNvPr id="3" name="Notes Placeholder 2"/>
-          <p:cNvSpPr>
-            <a:spLocks noGrp="1"/>
-          </p:cNvSpPr>
-          <p:nvPr>
-            <p:ph type="body" sz="quarter" idx="3"/>
-          </p:nvPr>
-        </p:nvSpPr>
-        <p:spPr/>
-        <p:txBody>
-          <a:bodyPr/>
-          <a:lstStyle/>
-          <a:p>
-            <a:r>
-              <a:t>~0:16. Back to the opening pair, now analysable: take B through SPEC letter by letter and all four are present.</a:t>
-            </a:r>
-          </a:p>
-          <a:p>
-            <a:endParaRPr/>
-          </a:p>
-          <a:p>
-            <a:r>
-              <a:t>Then the payoff line: the difference is not detail, it is DECISIONS. Day first or month first? That is a product decision, and the vague prompt hands it to a text predictor. Part 2 shows what the predictor does with it — fills it from a frequency.</a:t>
-            </a:r>
-          </a:p>
-          <a:p>
-            <a:endParaRPr/>
-          </a:p>
-          <a:p>
-            <a:r>
-              <a:t>What prompt A actually gets, measured in September 2026: given it with nothing else, three current models (GLM-5.3, Gemini 3.6 Flash and Gemini 2.5 Flash, each through its API with no system prompt (Claude and GPT models could not be reached for this run)) each read 12/08/2026 as 8 December, month first, and not one asked which order the user's dates come in. One offered a strict ISO-only parser that rejects the string outright, and both Gemini models reached for the third-party dateutil library, which prompt B forbids. That is the slide's point made by the tools themselves: the decision was made, silently. Treat the details as a snapshot; the lesson is that it was decided without asking.</a:t>
-            </a:r>
-          </a:p>
-        </p:txBody>
-      </p:sp>
-      <p:sp>
-        <p:nvSpPr>
-          <p:cNvPr id="4" name="Slide Number Placeholder 3"/>
-          <p:cNvSpPr>
-            <a:spLocks noGrp="1"/>
-          </p:cNvSpPr>
-          <p:nvPr>
-            <p:ph type="sldNum" sz="quarter" idx="5"/>
-          </p:nvPr>
-        </p:nvSpPr>
-        <p:spPr/>
-      </p:sp>
-    </p:spTree>
-  </p:cSld>
-  <p:clrMapOvr>
-    <a:masterClrMapping/>
-  </p:clrMapOvr>
-</p:notes>
-</file>
-
-<file path=ppt/notesSlides/notesSlide12.xml><?xml version="1.0" encoding="utf-8"?>
-<p:notes xmlns:a="http://schemas.openxmlformats.org/drawingml/2006/main" xmlns:r="http://schemas.openxmlformats.org/officeDocument/2006/relationships" xmlns:p="http://schemas.openxmlformats.org/presentationml/2006/main">
-  <p:cSld>
-    <p:spTree>
-      <p:nvGrpSpPr>
-        <p:cNvPr id="1" name=""/>
-        <p:cNvGrpSpPr/>
-        <p:nvPr/>
-      </p:nvGrpSpPr>
-      <p:grpSpPr>
-        <a:xfrm>
-          <a:off x="0" y="0"/>
-          <a:ext cx="0" cy="0"/>
-          <a:chOff x="0" y="0"/>
-          <a:chExt cx="0" cy="0"/>
-        </a:xfrm>
-      </p:grpSpPr>
-      <p:sp>
-        <p:nvSpPr>
-          <p:cNvPr id="2" name="Slide Image Placeholder 1"/>
-          <p:cNvSpPr>
-            <a:spLocks noGrp="1" noRot="1" noChangeAspect="1"/>
-          </p:cNvSpPr>
-          <p:nvPr>
-            <p:ph type="sldImg" idx="2"/>
-          </p:nvPr>
-        </p:nvSpPr>
-        <p:spPr/>
-      </p:sp>
-      <p:sp>
-        <p:nvSpPr>
-          <p:cNvPr id="3" name="Notes Placeholder 2"/>
-          <p:cNvSpPr>
-            <a:spLocks noGrp="1"/>
-          </p:cNvSpPr>
-          <p:nvPr>
-            <p:ph type="body" sz="quarter" idx="3"/>
-          </p:nvPr>
-        </p:nvSpPr>
-        <p:spPr/>
-        <p:txBody>
-          <a:bodyPr/>
-          <a:lstStyle/>
-          <a:p>
-            <a:r>
-              <a:t>~0:18. Constraints and non-goals. Non-goals are the under-used half and the one that saves them most pain.</a:t>
-            </a:r>
-          </a:p>
-          <a:p>
-            <a:endParaRPr/>
-          </a:p>
-          <a:p>
-            <a:r>
-              <a:t>The misconception: students think an assistant that adds extra things is being helpful, so they tolerate it. In a review, unrequested changes are where real defects hide — they are the changes nobody was looking at.</a:t>
-            </a:r>
-          </a:p>
-        </p:txBody>
-      </p:sp>
-      <p:sp>
-        <p:nvSpPr>
-          <p:cNvPr id="4" name="Slide Number Placeholder 3"/>
-          <p:cNvSpPr>
-            <a:spLocks noGrp="1"/>
-          </p:cNvSpPr>
-          <p:nvPr>
-            <p:ph type="sldNum" sz="quarter" idx="5"/>
-          </p:nvPr>
-        </p:nvSpPr>
-        <p:spPr/>
-      </p:sp>
-    </p:spTree>
-  </p:cSld>
-  <p:clrMapOvr>
-    <a:masterClrMapping/>
-  </p:clrMapOvr>
-</p:notes>
-</file>
-
-<file path=ppt/notesSlides/notesSlide13.xml><?xml version="1.0" encoding="utf-8"?>
-<p:notes xmlns:a="http://schemas.openxmlformats.org/drawingml/2006/main" xmlns:r="http://schemas.openxmlformats.org/officeDocument/2006/relationships" xmlns:p="http://schemas.openxmlformats.org/presentationml/2006/main">
-  <p:cSld>
-    <p:spTree>
-      <p:nvGrpSpPr>
-        <p:cNvPr id="1" name=""/>
-        <p:cNvGrpSpPr/>
-        <p:nvPr/>
-      </p:nvGrpSpPr>
-      <p:grpSpPr>
-        <a:xfrm>
-          <a:off x="0" y="0"/>
-          <a:ext cx="0" cy="0"/>
-          <a:chOff x="0" y="0"/>
-          <a:chExt cx="0" cy="0"/>
-        </a:xfrm>
-      </p:grpSpPr>
-      <p:sp>
-        <p:nvSpPr>
-          <p:cNvPr id="2" name="Slide Image Placeholder 1"/>
-          <p:cNvSpPr>
-            <a:spLocks noGrp="1" noRot="1" noChangeAspect="1"/>
-          </p:cNvSpPr>
-          <p:nvPr>
-            <p:ph type="sldImg" idx="2"/>
-          </p:nvPr>
-        </p:nvSpPr>
-        <p:spPr/>
-      </p:sp>
-      <p:sp>
-        <p:nvSpPr>
-          <p:cNvPr id="3" name="Notes Placeholder 2"/>
-          <p:cNvSpPr>
-            <a:spLocks noGrp="1"/>
-          </p:cNvSpPr>
-          <p:nvPr>
-            <p:ph type="body" sz="quarter" idx="3"/>
-          </p:nvPr>
-        </p:nvSpPr>
-        <p:spPr/>
-        <p:txBody>
-          <a:bodyPr/>
-          <a:lstStyle/>
-          <a:p>
-            <a:r>
-              <a:t>~0:20. PREDICT beat 1: what an assistant does with a whole file and a vague instruction. Vote before revealing.</a:t>
-            </a:r>
-          </a:p>
-          <a:p>
-            <a:endParaRPr/>
-          </a:p>
-          <a:p>
-            <a:r>
-              <a:t>The wrong answers to expect are the confident extremes: "it just fixes the bug", or the older folklore that it rewrites everything, type hints and error handling included. The faulty model behind both is that the size of the request decides the size of the change, so the change can be known in advance. Measured in September 2026 (next slide), the same vague prompt got one changed line from one model, three from another, and eleven then four from a third on two runs: a restyled loop, added comments, a commented-out copy of the old code, the whole file sent back. Nobody added type hints or error handling. The argument for non-goals survives in a better form: not that the diff is always huge, but that without them its size is not yours to decide.</a:t>
-            </a:r>
-          </a:p>
-        </p:txBody>
-      </p:sp>
-      <p:sp>
-        <p:nvSpPr>
-          <p:cNvPr id="4" name="Slide Number Placeholder 3"/>
-          <p:cNvSpPr>
-            <a:spLocks noGrp="1"/>
-          </p:cNvSpPr>
-          <p:nvPr>
-            <p:ph type="sldNum" sz="quarter" idx="5"/>
-          </p:nvPr>
-        </p:nvSpPr>
-        <p:spPr/>
-      </p:sp>
-    </p:spTree>
-  </p:cSld>
-  <p:clrMapOvr>
-    <a:masterClrMapping/>
-  </p:clrMapOvr>
-</p:notes>
-</file>
-
-<file path=ppt/notesSlides/notesSlide14.xml><?xml version="1.0" encoding="utf-8"?>
-<p:notes xmlns:a="http://schemas.openxmlformats.org/drawingml/2006/main" xmlns:r="http://schemas.openxmlformats.org/officeDocument/2006/relationships" xmlns:p="http://schemas.openxmlformats.org/presentationml/2006/main">
-  <p:cSld>
-    <p:spTree>
-      <p:nvGrpSpPr>
-        <p:cNvPr id="1" name=""/>
-        <p:cNvGrpSpPr/>
-        <p:nvPr/>
-      </p:nvGrpSpPr>
-      <p:grpSpPr>
-        <a:xfrm>
-          <a:off x="0" y="0"/>
-          <a:ext cx="0" cy="0"/>
-          <a:chOff x="0" y="0"/>
-          <a:chExt cx="0" cy="0"/>
-        </a:xfrm>
-      </p:grpSpPr>
-      <p:sp>
-        <p:nvSpPr>
-          <p:cNvPr id="2" name="Slide Image Placeholder 1"/>
-          <p:cNvSpPr>
-            <a:spLocks noGrp="1" noRot="1" noChangeAspect="1"/>
-          </p:cNvSpPr>
-          <p:nvPr>
-            <p:ph type="sldImg" idx="2"/>
-          </p:nvPr>
-        </p:nvSpPr>
-        <p:spPr/>
-      </p:sp>
-      <p:sp>
-        <p:nvSpPr>
-          <p:cNvPr id="3" name="Notes Placeholder 2"/>
-          <p:cNvSpPr>
-            <a:spLocks noGrp="1"/>
-          </p:cNvSpPr>
-          <p:nvPr>
-            <p:ph type="body" sz="quarter" idx="3"/>
-          </p:nvPr>
-        </p:nvSpPr>
-        <p:spPr/>
-        <p:txBody>
-          <a:bodyPr/>
-          <a:lstStyle/>
-          <a:p>
-            <a:r>
-              <a:t>~0:22. The reveal, measured rather than remembered. The file on the previous slide has a one-line bug (the loop stops one item early), and the minimal fix changes one line. In September 2026 the vague prompt went to GLM-5.3, Gemini 3.6 Flash and Gemini 2.5 Flash, each through its API with no system prompt (Claude and GPT models could not be reached for this run), twice each, and the narrow prompt of the next slide once each. Every reply fixed the bug. The vague prompt produced 1 and 1 changed lines from GLM-5.3, 3 and 3 from Gemini 3.6 Flash (the loop rewritten as a sum), and 11 then 4 from Gemini 2.5 Flash (a restyled loop, new comments, and in the first run the old loop kept as commented-out code); both Gemini models sent the whole file back. None added type hints, error handling or docstrings, and none touched another function. The narrow prompt got exactly one changed line from all three.</a:t>
-            </a:r>
-          </a:p>
-          <a:p>
-            <a:endParaRPr/>
-          </a:p>
-          <a:p>
-            <a:r>
-              <a:t>The misconception to correct is the folklore itself, in both directions: students either expect a surgical fix or a 40-line rewrite, and the measurement shows neither can be relied on. The same prompt varied by model and by run, which is what an unmade decision looks like. Say the limits out loud: three models from two vendors, through the raw API; an editor or agent product wraps its own instructions around the request and may behave differently in either direction. Teach the direction: unspecified means variable, and one sentence of non-goal made it one line every time.</a:t>
-            </a:r>
-          </a:p>
-        </p:txBody>
-      </p:sp>
-      <p:sp>
-        <p:nvSpPr>
-          <p:cNvPr id="4" name="Slide Number Placeholder 3"/>
-          <p:cNvSpPr>
-            <a:spLocks noGrp="1"/>
-          </p:cNvSpPr>
-          <p:nvPr>
-            <p:ph type="sldNum" sz="quarter" idx="5"/>
-          </p:nvPr>
-        </p:nvSpPr>
-        <p:spPr/>
-      </p:sp>
-    </p:spTree>
-  </p:cSld>
-  <p:clrMapOvr>
-    <a:masterClrMapping/>
-  </p:clrMapOvr>
-</p:notes>
-</file>
-
-<file path=ppt/notesSlides/notesSlide15.xml><?xml version="1.0" encoding="utf-8"?>
-<p:notes xmlns:a="http://schemas.openxmlformats.org/drawingml/2006/main" xmlns:r="http://schemas.openxmlformats.org/officeDocument/2006/relationships" xmlns:p="http://schemas.openxmlformats.org/presentationml/2006/main">
-  <p:cSld>
-    <p:spTree>
-      <p:nvGrpSpPr>
-        <p:cNvPr id="1" name=""/>
-        <p:cNvGrpSpPr/>
-        <p:nvPr/>
-      </p:nvGrpSpPr>
-      <p:grpSpPr>
-        <a:xfrm>
-          <a:off x="0" y="0"/>
-          <a:ext cx="0" cy="0"/>
-          <a:chOff x="0" y="0"/>
-          <a:chExt cx="0" cy="0"/>
-        </a:xfrm>
-      </p:grpSpPr>
-      <p:sp>
-        <p:nvSpPr>
-          <p:cNvPr id="2" name="Slide Image Placeholder 1"/>
-          <p:cNvSpPr>
-            <a:spLocks noGrp="1" noRot="1" noChangeAspect="1"/>
-          </p:cNvSpPr>
-          <p:nvPr>
-            <p:ph type="sldImg" idx="2"/>
-          </p:nvPr>
-        </p:nvSpPr>
-        <p:spPr/>
-      </p:sp>
-      <p:sp>
-        <p:nvSpPr>
-          <p:cNvPr id="3" name="Notes Placeholder 2"/>
-          <p:cNvSpPr>
-            <a:spLocks noGrp="1"/>
-          </p:cNvSpPr>
-          <p:nvPr>
-            <p:ph type="body" sz="quarter" idx="3"/>
-          </p:nvPr>
-        </p:nvSpPr>
-        <p:spPr/>
-        <p:txBody>
-          <a:bodyPr/>
-          <a:lstStyle/>
-          <a:p>
-            <a:r>
-              <a:t>~0:24. The fix, which is one sentence of non-goal. In the September 2026 test this exact prompt got a one-line diff, and nothing else, from all three models.</a:t>
-            </a:r>
-          </a:p>
-          <a:p>
-            <a:endParaRPr/>
-          </a:p>
-          <a:p>
-            <a:r>
-              <a:t>Land the review point: a small diff gets read; a whole file sent back gets skimmed, and the unrequested change inside it is exactly the one nobody reviews. The size of your diff determines whether review actually happened.</a:t>
-            </a:r>
-          </a:p>
-        </p:txBody>
-      </p:sp>
-      <p:sp>
-        <p:nvSpPr>
-          <p:cNvPr id="4" name="Slide Number Placeholder 3"/>
-          <p:cNvSpPr>
-            <a:spLocks noGrp="1"/>
-          </p:cNvSpPr>
-          <p:nvPr>
-            <p:ph type="sldNum" sz="quarter" idx="5"/>
-          </p:nvPr>
-        </p:nvSpPr>
-        <p:spPr/>
-      </p:sp>
-    </p:spTree>
-  </p:cSld>
-  <p:clrMapOvr>
-    <a:masterClrMapping/>
-  </p:clrMapOvr>
-</p:notes>
-</file>
-
-<file path=ppt/notesSlides/notesSlide16.xml><?xml version="1.0" encoding="utf-8"?>
-<p:notes xmlns:a="http://schemas.openxmlformats.org/drawingml/2006/main" xmlns:r="http://schemas.openxmlformats.org/officeDocument/2006/relationships" xmlns:p="http://schemas.openxmlformats.org/presentationml/2006/main">
-  <p:cSld>
-    <p:spTree>
-      <p:nvGrpSpPr>
-        <p:cNvPr id="1" name=""/>
-        <p:cNvGrpSpPr/>
-        <p:nvPr/>
-      </p:nvGrpSpPr>
-      <p:grpSpPr>
-        <a:xfrm>
-          <a:off x="0" y="0"/>
-          <a:ext cx="0" cy="0"/>
-          <a:chOff x="0" y="0"/>
-          <a:chExt cx="0" cy="0"/>
-        </a:xfrm>
-      </p:grpSpPr>
-      <p:sp>
-        <p:nvSpPr>
-          <p:cNvPr id="2" name="Slide Image Placeholder 1"/>
-          <p:cNvSpPr>
-            <a:spLocks noGrp="1" noRot="1" noChangeAspect="1"/>
-          </p:cNvSpPr>
-          <p:nvPr>
-            <p:ph type="sldImg" idx="2"/>
-          </p:nvPr>
-        </p:nvSpPr>
-        <p:spPr/>
-      </p:sp>
-      <p:sp>
-        <p:nvSpPr>
-          <p:cNvPr id="3" name="Notes Placeholder 2"/>
-          <p:cNvSpPr>
-            <a:spLocks noGrp="1"/>
-          </p:cNvSpPr>
-          <p:nvPr>
-            <p:ph type="body" sz="quarter" idx="3"/>
-          </p:nvPr>
-        </p:nvSpPr>
-        <p:spPr/>
-        <p:txBody>
-          <a:bodyPr/>
-          <a:lstStyle/>
-          <a:p>
-            <a:r>
-              <a:t>Section divider (part 1 · section 2 of 3). Three well-known techniques, what the evidence says about each, and when to use which.</a:t>
-            </a:r>
-          </a:p>
-        </p:txBody>
-      </p:sp>
-      <p:sp>
-        <p:nvSpPr>
-          <p:cNvPr id="4" name="Slide Number Placeholder 3"/>
-          <p:cNvSpPr>
-            <a:spLocks noGrp="1"/>
-          </p:cNvSpPr>
-          <p:nvPr>
-            <p:ph type="sldNum" sz="quarter" idx="5"/>
-          </p:nvPr>
-        </p:nvSpPr>
-        <p:spPr/>
-      </p:sp>
-    </p:spTree>
-  </p:cSld>
-  <p:clrMapOvr>
-    <a:masterClrMapping/>
-  </p:clrMapOvr>
-</p:notes>
-</file>
-
-<file path=ppt/notesSlides/notesSlide17.xml><?xml version="1.0" encoding="utf-8"?>
-<p:notes xmlns:a="http://schemas.openxmlformats.org/drawingml/2006/main" xmlns:r="http://schemas.openxmlformats.org/officeDocument/2006/relationships" xmlns:p="http://schemas.openxmlformats.org/presentationml/2006/main">
-  <p:cSld>
-    <p:spTree>
-      <p:nvGrpSpPr>
-        <p:cNvPr id="1" name=""/>
-        <p:cNvGrpSpPr/>
-        <p:nvPr/>
-      </p:nvGrpSpPr>
-      <p:grpSpPr>
-        <a:xfrm>
-          <a:off x="0" y="0"/>
-          <a:ext cx="0" cy="0"/>
-          <a:chOff x="0" y="0"/>
-          <a:chExt cx="0" cy="0"/>
-        </a:xfrm>
-      </p:grpSpPr>
-      <p:sp>
-        <p:nvSpPr>
-          <p:cNvPr id="2" name="Slide Image Placeholder 1"/>
-          <p:cNvSpPr>
-            <a:spLocks noGrp="1" noRot="1" noChangeAspect="1"/>
-          </p:cNvSpPr>
-          <p:nvPr>
-            <p:ph type="sldImg" idx="2"/>
-          </p:nvPr>
-        </p:nvSpPr>
-        <p:spPr/>
-      </p:sp>
-      <p:sp>
-        <p:nvSpPr>
-          <p:cNvPr id="3" name="Notes Placeholder 2"/>
-          <p:cNvSpPr>
-            <a:spLocks noGrp="1"/>
-          </p:cNvSpPr>
-          <p:nvPr>
-            <p:ph type="body" sz="quarter" idx="3"/>
-          </p:nvPr>
-        </p:nvSpPr>
-        <p:spPr/>
-        <p:txBody>
-          <a:bodyPr/>
-          <a:lstStyle/>
-          <a:p>
-            <a:r>
-              <a:t>~0:26. The three advanced techniques, kept together so the lab can drill them one at a time.</a:t>
-            </a:r>
-          </a:p>
-          <a:p>
-            <a:endParaRPr/>
-          </a:p>
-          <a:p>
-            <a:r>
-              <a:t>Say what each is FOR, because students collect techniques without knowing when to reach for them. Persona = tone, audience and focus, not accuracy (the next slide has the evidence). CoT = visible, checkable reasoning, which most assistants now do by default (the slide after). Few-shot = exact output format. The predict after those two slides tests exactly that: given a problem, which one?</a:t>
-            </a:r>
-          </a:p>
-        </p:txBody>
-      </p:sp>
-      <p:sp>
-        <p:nvSpPr>
-          <p:cNvPr id="4" name="Slide Number Placeholder 3"/>
-          <p:cNvSpPr>
-            <a:spLocks noGrp="1"/>
-          </p:cNvSpPr>
-          <p:nvPr>
-            <p:ph type="sldNum" sz="quarter" idx="5"/>
-          </p:nvPr>
-        </p:nvSpPr>
-        <p:spPr/>
-      </p:sp>
-    </p:spTree>
-  </p:cSld>
-  <p:clrMapOvr>
-    <a:masterClrMapping/>
-  </p:clrMapOvr>
-</p:notes>
-</file>
-
-<file path=ppt/notesSlides/notesSlide18.xml><?xml version="1.0" encoding="utf-8"?>
-<p:notes xmlns:a="http://schemas.openxmlformats.org/drawingml/2006/main" xmlns:r="http://schemas.openxmlformats.org/officeDocument/2006/relationships" xmlns:p="http://schemas.openxmlformats.org/presentationml/2006/main">
-  <p:cSld>
-    <p:spTree>
-      <p:nvGrpSpPr>
-        <p:cNvPr id="1" name=""/>
-        <p:cNvGrpSpPr/>
-        <p:nvPr/>
-      </p:nvGrpSpPr>
-      <p:grpSpPr>
-        <a:xfrm>
-          <a:off x="0" y="0"/>
-          <a:ext cx="0" cy="0"/>
-          <a:chOff x="0" y="0"/>
-          <a:chExt cx="0" cy="0"/>
-        </a:xfrm>
-      </p:grpSpPr>
-      <p:sp>
-        <p:nvSpPr>
-          <p:cNvPr id="2" name="Slide Image Placeholder 1"/>
-          <p:cNvSpPr>
-            <a:spLocks noGrp="1" noRot="1" noChangeAspect="1"/>
-          </p:cNvSpPr>
-          <p:nvPr>
-            <p:ph type="sldImg" idx="2"/>
-          </p:nvPr>
-        </p:nvSpPr>
-        <p:spPr/>
-      </p:sp>
-      <p:sp>
-        <p:nvSpPr>
-          <p:cNvPr id="3" name="Notes Placeholder 2"/>
-          <p:cNvSpPr>
-            <a:spLocks noGrp="1"/>
-          </p:cNvSpPr>
-          <p:nvPr>
-            <p:ph type="body" sz="quarter" idx="3"/>
-          </p:nvPr>
-        </p:nvSpPr>
-        <p:spPr/>
-        <p:txBody>
-          <a:bodyPr/>
-          <a:lstStyle/>
-          <a:p>
-            <a:r>
-              <a:t>~0:28. What a persona actually buys, with the evidence, because "you are a world-class expert" is the most copied prompt habit there is.</a:t>
-            </a:r>
-          </a:p>
-          <a:p>
-            <a:endParaRPr/>
-          </a:p>
-          <a:p>
-            <a:r>
-              <a:t>The misconception: students believe that telling the model it is an expert makes its answers more correct. The faulty model is human: an expert knows more than a novice, so asking for the expert should get more knowledge. The model's knowledge is fixed in its weights; a role changes how it frames the answer, not what it knows. The evidence: Zheng et al. (Findings of EMNLP 2024) tried 162 roles on 2,410 factual questions across nine open models from four families and found no improvement over no persona at all, with effects that looked largely random. A 2025 re-test on commercial models (GPT-4o, o3-mini, o4-mini and two Gemini Flash models; Wharton's Prompting Science Report 4) found expert personas made no significant difference, while "layperson" and "toddler" personas made answers worse. What a role plausibly does change is tone, audience and which aspects it attends to: "review this as a security reviewer" is a reasonable way to point a review, though no study has measured that use. Teach it as choosing a lens, never as buying accuracy.</a:t>
-            </a:r>
-          </a:p>
-        </p:txBody>
-      </p:sp>
-      <p:sp>
-        <p:nvSpPr>
-          <p:cNvPr id="4" name="Slide Number Placeholder 3"/>
-          <p:cNvSpPr>
-            <a:spLocks noGrp="1"/>
-          </p:cNvSpPr>
-          <p:nvPr>
-            <p:ph type="sldNum" sz="quarter" idx="5"/>
-          </p:nvPr>
-        </p:nvSpPr>
-        <p:spPr/>
-      </p:sp>
-    </p:spTree>
-  </p:cSld>
-  <p:clrMapOvr>
-    <a:masterClrMapping/>
-  </p:clrMapOvr>
-</p:notes>
-</file>
-
-<file path=ppt/notesSlides/notesSlide19.xml><?xml version="1.0" encoding="utf-8"?>
-<p:notes xmlns:a="http://schemas.openxmlformats.org/drawingml/2006/main" xmlns:r="http://schemas.openxmlformats.org/officeDocument/2006/relationships" xmlns:p="http://schemas.openxmlformats.org/presentationml/2006/main">
-  <p:cSld>
-    <p:spTree>
-      <p:nvGrpSpPr>
-        <p:cNvPr id="1" name=""/>
-        <p:cNvGrpSpPr/>
-        <p:nvPr/>
-      </p:nvGrpSpPr>
-      <p:grpSpPr>
-        <a:xfrm>
-          <a:off x="0" y="0"/>
-          <a:ext cx="0" cy="0"/>
-          <a:chOff x="0" y="0"/>
-          <a:chExt cx="0" cy="0"/>
-        </a:xfrm>
-      </p:grpSpPr>
-      <p:sp>
-        <p:nvSpPr>
-          <p:cNvPr id="2" name="Slide Image Placeholder 1"/>
-          <p:cNvSpPr>
-            <a:spLocks noGrp="1" noRot="1" noChangeAspect="1"/>
-          </p:cNvSpPr>
-          <p:nvPr>
-            <p:ph type="sldImg" idx="2"/>
-          </p:nvPr>
-        </p:nvSpPr>
-        <p:spPr/>
-      </p:sp>
-      <p:sp>
-        <p:nvSpPr>
-          <p:cNvPr id="3" name="Notes Placeholder 2"/>
-          <p:cNvSpPr>
-            <a:spLocks noGrp="1"/>
-          </p:cNvSpPr>
-          <p:nvPr>
-            <p:ph type="body" sz="quarter" idx="3"/>
-          </p:nvPr>
-        </p:nvSpPr>
-        <p:spPr/>
-        <p:txBody>
-          <a:bodyPr/>
-          <a:lstStyle/>
-          <a:p>
-            <a:r>
-              <a:t>~0:31. Chain-of-thought is the one prompting technique with a famous result, and the result has changed. In 2022, asking for worked reasoning was a large win: PaLM 540B went from 17.9% to 56.9% on GSM8K grade-school maths with chain-of-thought examples (Wei et al.), and adding "Let's think step by step" took GPT-3's text-davinci-002 from 10.4% to 40.7% on the same benchmark (Kojima et al.). By 2025 the leading models reason before they answer, and a Wharton test of the same instruction on reasoning models found gains of about three points on graduate-level science questions (o3-mini +2.9, o4-mini +3.1) and a small loss for Gemini 2.5 Flash (-3.3), at the price of slower answers. The bars mix benchmarks on purpose and the labels say so: the point is the size of the gain the instruction buys in each era, not a like-for-like score.</a:t>
-            </a:r>
-          </a:p>
-          <a:p>
-            <a:endParaRPr/>
-          </a:p>
-          <a:p>
-            <a:r>
-              <a:t>The misconception: students have learned "think step by step" as a magic phrase. Vendors now call it unnecessary for reasoning models (OpenAI's guidance adds that it can sometimes hinder), and Anthropic's advice is a high-level instruction to think rather than a hand-written plan of steps. What survives is the reason to ask for reasoning at all: to SEE it. Asking for the plan, or the assumptions, before the code turns silent decisions into ones you can check, which is what the lab's chain-of-thought exercise on a real bug is for.</a:t>
-            </a:r>
-          </a:p>
-        </p:txBody>
-      </p:sp>
-      <p:sp>
-        <p:nvSpPr>
-          <p:cNvPr id="4" name="Slide Number Placeholder 3"/>
-          <p:cNvSpPr>
-            <a:spLocks noGrp="1"/>
-          </p:cNvSpPr>
-          <p:nvPr>
-            <p:ph type="sldNum" sz="quarter" idx="5"/>
-          </p:nvPr>
-        </p:nvSpPr>
-        <p:spPr/>
-      </p:sp>
-    </p:spTree>
-  </p:cSld>
-  <p:clrMapOvr>
-    <a:masterClrMapping/>
-  </p:clrMapOvr>
-</p:notes>
-</file>
-
-<file path=ppt/notesSlides/notesSlide2.xml><?xml version="1.0" encoding="utf-8"?>
-<p:notes xmlns:a="http://schemas.openxmlformats.org/drawingml/2006/main" xmlns:r="http://schemas.openxmlformats.org/officeDocument/2006/relationships" xmlns:p="http://schemas.openxmlformats.org/presentationml/2006/main">
-  <p:cSld>
-    <p:spTree>
-      <p:nvGrpSpPr>
-        <p:cNvPr id="1" name=""/>
-        <p:cNvGrpSpPr/>
-        <p:nvPr/>
-      </p:nvGrpSpPr>
-      <p:grpSpPr>
-        <a:xfrm>
-          <a:off x="0" y="0"/>
-          <a:ext cx="0" cy="0"/>
-          <a:chOff x="0" y="0"/>
-          <a:chExt cx="0" cy="0"/>
-        </a:xfrm>
-      </p:grpSpPr>
-      <p:sp>
-        <p:nvSpPr>
-          <p:cNvPr id="2" name="Slide Image Placeholder 1"/>
-          <p:cNvSpPr>
-            <a:spLocks noGrp="1" noRot="1" noChangeAspect="1"/>
-          </p:cNvSpPr>
-          <p:nvPr>
-            <p:ph type="sldImg" idx="2"/>
-          </p:nvPr>
-        </p:nvSpPr>
-        <p:spPr/>
-      </p:sp>
-      <p:sp>
-        <p:nvSpPr>
-          <p:cNvPr id="3" name="Notes Placeholder 2"/>
-          <p:cNvSpPr>
-            <a:spLocks noGrp="1"/>
-          </p:cNvSpPr>
-          <p:nvPr>
-            <p:ph type="body" sz="quarter" idx="3"/>
-          </p:nvPr>
-        </p:nvSpPr>
-        <p:spPr/>
-        <p:txBody>
-          <a:bodyPr/>
-          <a:lstStyle/>
-          <a:p>
-            <a:r>
-              <a:t>~0:02. The hook: two prompts for the same task, and the question is not which is better but WHY. Nearly everyone picks B, and they are right for the wrong reason — they say "because it is more detailed". The actual reason is that B makes DECISIONS the model would otherwise have to guess: day-first or month-first, what happens on bad input, whether a library is allowed. That distinction is the first idea of the two lectures; it is stated on the next slide and paid off at "The opening pair, decoded". Have the room commit before revealing.</a:t>
-            </a:r>
-          </a:p>
-        </p:txBody>
-      </p:sp>
-      <p:sp>
-        <p:nvSpPr>
-          <p:cNvPr id="4" name="Slide Number Placeholder 3"/>
-          <p:cNvSpPr>
-            <a:spLocks noGrp="1"/>
-          </p:cNvSpPr>
-          <p:nvPr>
-            <p:ph type="sldNum" sz="quarter" idx="5"/>
-          </p:nvPr>
-        </p:nvSpPr>
-        <p:spPr/>
-      </p:sp>
-    </p:spTree>
-  </p:cSld>
-  <p:clrMapOvr>
-    <a:masterClrMapping/>
-  </p:clrMapOvr>
-</p:notes>
-</file>
-
-<file path=ppt/notesSlides/notesSlide20.xml><?xml version="1.0" encoding="utf-8"?>
-<p:notes xmlns:a="http://schemas.openxmlformats.org/drawingml/2006/main" xmlns:r="http://schemas.openxmlformats.org/officeDocument/2006/relationships" xmlns:p="http://schemas.openxmlformats.org/presentationml/2006/main">
-  <p:cSld>
-    <p:spTree>
-      <p:nvGrpSpPr>
-        <p:cNvPr id="1" name=""/>
-        <p:cNvGrpSpPr/>
-        <p:nvPr/>
-      </p:nvGrpSpPr>
-      <p:grpSpPr>
-        <a:xfrm>
-          <a:off x="0" y="0"/>
-          <a:ext cx="0" cy="0"/>
-          <a:chOff x="0" y="0"/>
-          <a:chExt cx="0" cy="0"/>
-        </a:xfrm>
-      </p:grpSpPr>
-      <p:sp>
-        <p:nvSpPr>
-          <p:cNvPr id="2" name="Slide Image Placeholder 1"/>
-          <p:cNvSpPr>
-            <a:spLocks noGrp="1" noRot="1" noChangeAspect="1"/>
-          </p:cNvSpPr>
-          <p:nvPr>
-            <p:ph type="sldImg" idx="2"/>
-          </p:nvPr>
-        </p:nvSpPr>
-        <p:spPr/>
-      </p:sp>
-      <p:sp>
-        <p:nvSpPr>
-          <p:cNvPr id="3" name="Notes Placeholder 2"/>
-          <p:cNvSpPr>
-            <a:spLocks noGrp="1"/>
-          </p:cNvSpPr>
-          <p:nvPr>
-            <p:ph type="body" sz="quarter" idx="3"/>
-          </p:nvPr>
-        </p:nvSpPr>
-        <p:spPr/>
-        <p:txBody>
-          <a:bodyPr/>
-          <a:lstStyle/>
-          <a:p>
-            <a:r>
-              <a:t>~0:34. PREDICT beat 2: each technique solves one kind of failure, and a format failure is a few-shot problem. Commit before the reveal.</a:t>
-            </a:r>
-          </a:p>
-          <a:p>
-            <a:endParaRPr/>
-          </a:p>
-          <a:p>
-            <a:r>
-              <a:t>The wrong answer to expect is persona ("tell it it is a data engineer") or, more often, a longer and firmer description of the format ("no commentary, I mean it"). The faulty model is that the techniques are general-purpose "make it better" knobs, so any of them helps with any problem — and that emphasis is a kind of specification. It is not: persona changes what the model attends to, not the shape of its output; chain-of-thought asks for reasoning, which is more text rather than a tighter format; and a description is interpretable where an example is exact.</a:t>
-            </a:r>
-          </a:p>
-        </p:txBody>
-      </p:sp>
-      <p:sp>
-        <p:nvSpPr>
-          <p:cNvPr id="4" name="Slide Number Placeholder 3"/>
-          <p:cNvSpPr>
-            <a:spLocks noGrp="1"/>
-          </p:cNvSpPr>
-          <p:nvPr>
-            <p:ph type="sldNum" sz="quarter" idx="5"/>
-          </p:nvPr>
-        </p:nvSpPr>
-        <p:spPr/>
-      </p:sp>
-    </p:spTree>
-  </p:cSld>
-  <p:clrMapOvr>
-    <a:masterClrMapping/>
-  </p:clrMapOvr>
-</p:notes>
-</file>
-
-<file path=ppt/notesSlides/notesSlide21.xml><?xml version="1.0" encoding="utf-8"?>
-<p:notes xmlns:a="http://schemas.openxmlformats.org/drawingml/2006/main" xmlns:r="http://schemas.openxmlformats.org/officeDocument/2006/relationships" xmlns:p="http://schemas.openxmlformats.org/presentationml/2006/main">
-  <p:cSld>
-    <p:spTree>
-      <p:nvGrpSpPr>
-        <p:cNvPr id="1" name=""/>
-        <p:cNvGrpSpPr/>
-        <p:nvPr/>
-      </p:nvGrpSpPr>
-      <p:grpSpPr>
-        <a:xfrm>
-          <a:off x="0" y="0"/>
-          <a:ext cx="0" cy="0"/>
-          <a:chOff x="0" y="0"/>
-          <a:chExt cx="0" cy="0"/>
-        </a:xfrm>
-      </p:grpSpPr>
-      <p:sp>
-        <p:nvSpPr>
-          <p:cNvPr id="2" name="Slide Image Placeholder 1"/>
-          <p:cNvSpPr>
-            <a:spLocks noGrp="1" noRot="1" noChangeAspect="1"/>
-          </p:cNvSpPr>
-          <p:nvPr>
-            <p:ph type="sldImg" idx="2"/>
-          </p:nvPr>
-        </p:nvSpPr>
-        <p:spPr/>
-      </p:sp>
-      <p:sp>
-        <p:nvSpPr>
-          <p:cNvPr id="3" name="Notes Placeholder 2"/>
-          <p:cNvSpPr>
-            <a:spLocks noGrp="1"/>
-          </p:cNvSpPr>
-          <p:nvPr>
-            <p:ph type="body" sz="quarter" idx="3"/>
-          </p:nvPr>
-        </p:nvSpPr>
-        <p:spPr/>
-        <p:txBody>
-          <a:bodyPr/>
-          <a:lstStyle/>
-          <a:p>
-            <a:r>
-              <a:t>~0:36. The reveal: few-shot, because showing is exact and describing is interpretable. The mechanism, which part 2 returns to: the model continues patterns in its window, and two examples ARE the pattern — there is nothing left to interpret.</a:t>
-            </a:r>
-          </a:p>
-          <a:p>
-            <a:endParaRPr/>
-          </a:p>
-          <a:p>
-            <a:r>
-              <a:t>The detail that matters is that the two examples vary along the edge that counts — here, a comma inside a value, which the second example shows being quoted. Two near-identical examples teach nothing about edge cases. Persona would have changed what it noticed; chain-of-thought would have changed what it explained. Neither pins a format.</a:t>
-            </a:r>
-          </a:p>
-          <a:p>
-            <a:endParaRPr/>
-          </a:p>
-          <a:p>
-            <a:r>
-              <a:t>One 2026 addition, on the kicker: when the output is read by a program rather than a person, the current APIs from OpenAI, Anthropic and Google can enforce a JSON schema on the reply (structured outputs), which guarantees the shape in a way no prompt can. Examples remain the way to steer style and edge cases in text a person reads, and the way to pin a format in a chat window, where there is no schema to give.</a:t>
-            </a:r>
-          </a:p>
-        </p:txBody>
-      </p:sp>
-      <p:sp>
-        <p:nvSpPr>
-          <p:cNvPr id="4" name="Slide Number Placeholder 3"/>
-          <p:cNvSpPr>
-            <a:spLocks noGrp="1"/>
-          </p:cNvSpPr>
-          <p:nvPr>
-            <p:ph type="sldNum" sz="quarter" idx="5"/>
-          </p:nvPr>
-        </p:nvSpPr>
-        <p:spPr/>
-      </p:sp>
-    </p:spTree>
-  </p:cSld>
-  <p:clrMapOvr>
-    <a:masterClrMapping/>
-  </p:clrMapOvr>
-</p:notes>
-</file>
-
-<file path=ppt/notesSlides/notesSlide22.xml><?xml version="1.0" encoding="utf-8"?>
-<p:notes xmlns:a="http://schemas.openxmlformats.org/drawingml/2006/main" xmlns:r="http://schemas.openxmlformats.org/officeDocument/2006/relationships" xmlns:p="http://schemas.openxmlformats.org/presentationml/2006/main">
-  <p:cSld>
-    <p:spTree>
-      <p:nvGrpSpPr>
-        <p:cNvPr id="1" name=""/>
-        <p:cNvGrpSpPr/>
-        <p:nvPr/>
-      </p:nvGrpSpPr>
-      <p:grpSpPr>
-        <a:xfrm>
-          <a:off x="0" y="0"/>
-          <a:ext cx="0" cy="0"/>
-          <a:chOff x="0" y="0"/>
-          <a:chExt cx="0" cy="0"/>
-        </a:xfrm>
-      </p:grpSpPr>
-      <p:sp>
-        <p:nvSpPr>
-          <p:cNvPr id="2" name="Slide Image Placeholder 1"/>
-          <p:cNvSpPr>
-            <a:spLocks noGrp="1" noRot="1" noChangeAspect="1"/>
-          </p:cNvSpPr>
-          <p:nvPr>
-            <p:ph type="sldImg" idx="2"/>
-          </p:nvPr>
-        </p:nvSpPr>
-        <p:spPr/>
-      </p:sp>
-      <p:sp>
-        <p:nvSpPr>
-          <p:cNvPr id="3" name="Notes Placeholder 2"/>
-          <p:cNvSpPr>
-            <a:spLocks noGrp="1"/>
-          </p:cNvSpPr>
-          <p:nvPr>
-            <p:ph type="body" sz="quarter" idx="3"/>
-          </p:nvPr>
-        </p:nvSpPr>
-        <p:spPr/>
-        <p:txBody>
-          <a:bodyPr/>
-          <a:lstStyle/>
-          <a:p>
-            <a:r>
-              <a:t>Section divider (part 1 · section 3 of 3). When rewording stops helping, the model is usually missing information.</a:t>
-            </a:r>
-          </a:p>
-        </p:txBody>
-      </p:sp>
-      <p:sp>
-        <p:nvSpPr>
-          <p:cNvPr id="4" name="Slide Number Placeholder 3"/>
-          <p:cNvSpPr>
-            <a:spLocks noGrp="1"/>
-          </p:cNvSpPr>
-          <p:nvPr>
-            <p:ph type="sldNum" sz="quarter" idx="5"/>
-          </p:nvPr>
-        </p:nvSpPr>
-        <p:spPr/>
-      </p:sp>
-    </p:spTree>
-  </p:cSld>
-  <p:clrMapOvr>
-    <a:masterClrMapping/>
-  </p:clrMapOvr>
-</p:notes>
-</file>
-
-<file path=ppt/notesSlides/notesSlide23.xml><?xml version="1.0" encoding="utf-8"?>
-<p:notes xmlns:a="http://schemas.openxmlformats.org/drawingml/2006/main" xmlns:r="http://schemas.openxmlformats.org/officeDocument/2006/relationships" xmlns:p="http://schemas.openxmlformats.org/presentationml/2006/main">
-  <p:cSld>
-    <p:spTree>
-      <p:nvGrpSpPr>
-        <p:cNvPr id="1" name=""/>
-        <p:cNvGrpSpPr/>
-        <p:nvPr/>
-      </p:nvGrpSpPr>
-      <p:grpSpPr>
-        <a:xfrm>
-          <a:off x="0" y="0"/>
-          <a:ext cx="0" cy="0"/>
-          <a:chOff x="0" y="0"/>
-          <a:chExt cx="0" cy="0"/>
-        </a:xfrm>
-      </p:grpSpPr>
-      <p:sp>
-        <p:nvSpPr>
-          <p:cNvPr id="2" name="Slide Image Placeholder 1"/>
-          <p:cNvSpPr>
-            <a:spLocks noGrp="1" noRot="1" noChangeAspect="1"/>
-          </p:cNvSpPr>
-          <p:nvPr>
-            <p:ph type="sldImg" idx="2"/>
-          </p:nvPr>
-        </p:nvSpPr>
-        <p:spPr/>
-      </p:sp>
-      <p:sp>
-        <p:nvSpPr>
-          <p:cNvPr id="3" name="Notes Placeholder 2"/>
-          <p:cNvSpPr>
-            <a:spLocks noGrp="1"/>
-          </p:cNvSpPr>
-          <p:nvPr>
-            <p:ph type="body" sz="quarter" idx="3"/>
-          </p:nvPr>
-        </p:nvSpPr>
-        <p:spPr/>
-        <p:txBody>
-          <a:bodyPr/>
-          <a:lstStyle/>
-          <a:p>
-            <a:r>
-              <a:t>~0:39. The turn. Everything so far has been about WORDING. This is where the lecture pivots, and it is the newest material.</a:t>
-            </a:r>
-          </a:p>
-          <a:p>
-            <a:endParaRPr/>
-          </a:p>
-          <a:p>
-            <a:r>
-              <a:t>Set it up with the honest history: models got much better at inferring intent from sloppy requests, so the marginal value of rewording fell. What they still cannot do is invent information they were never given.</a:t>
-            </a:r>
-          </a:p>
-          <a:p>
-            <a:endParaRPr/>
-          </a:p>
-          <a:p>
-            <a:r>
-              <a:t>The evidence for the turn: in 2023, Sclar et al. (ICLR 2024) showed that formatting changes that keep the meaning (a colon instead of a double colon, a space instead of a newline, capital letters) swung few-shot accuracy by up to 76 points on an open model, LLaMA-2-13B. Later studies find today's larger models far less sensitive, and much of the remaining swing comes from how answers are graded. So the folklore of magic phrasings described older models. What never changed is the callout: no wording supplies a missing fact.</a:t>
-            </a:r>
-          </a:p>
-        </p:txBody>
-      </p:sp>
-      <p:sp>
-        <p:nvSpPr>
-          <p:cNvPr id="4" name="Slide Number Placeholder 3"/>
-          <p:cNvSpPr>
-            <a:spLocks noGrp="1"/>
-          </p:cNvSpPr>
-          <p:nvPr>
-            <p:ph type="sldNum" sz="quarter" idx="5"/>
-          </p:nvPr>
-        </p:nvSpPr>
-        <p:spPr/>
-      </p:sp>
-    </p:spTree>
-  </p:cSld>
-  <p:clrMapOvr>
-    <a:masterClrMapping/>
-  </p:clrMapOvr>
-</p:notes>
-</file>
-
-<file path=ppt/notesSlides/notesSlide24.xml><?xml version="1.0" encoding="utf-8"?>
-<p:notes xmlns:a="http://schemas.openxmlformats.org/drawingml/2006/main" xmlns:r="http://schemas.openxmlformats.org/officeDocument/2006/relationships" xmlns:p="http://schemas.openxmlformats.org/presentationml/2006/main">
-  <p:cSld>
-    <p:spTree>
-      <p:nvGrpSpPr>
-        <p:cNvPr id="1" name=""/>
-        <p:cNvGrpSpPr/>
-        <p:nvPr/>
-      </p:nvGrpSpPr>
-      <p:grpSpPr>
-        <a:xfrm>
-          <a:off x="0" y="0"/>
-          <a:ext cx="0" cy="0"/>
-          <a:chOff x="0" y="0"/>
-          <a:chExt cx="0" cy="0"/>
-        </a:xfrm>
-      </p:grpSpPr>
-      <p:sp>
-        <p:nvSpPr>
-          <p:cNvPr id="2" name="Slide Image Placeholder 1"/>
-          <p:cNvSpPr>
-            <a:spLocks noGrp="1" noRot="1" noChangeAspect="1"/>
-          </p:cNvSpPr>
-          <p:nvPr>
-            <p:ph type="sldImg" idx="2"/>
-          </p:nvPr>
-        </p:nvSpPr>
-        <p:spPr/>
-      </p:sp>
-      <p:sp>
-        <p:nvSpPr>
-          <p:cNvPr id="3" name="Notes Placeholder 2"/>
-          <p:cNvSpPr>
-            <a:spLocks noGrp="1"/>
-          </p:cNvSpPr>
-          <p:nvPr>
-            <p:ph type="body" sz="quarter" idx="3"/>
-          </p:nvPr>
-        </p:nvSpPr>
-        <p:spPr/>
-        <p:txBody>
-          <a:bodyPr/>
-          <a:lstStyle/>
-          <a:p>
-            <a:r>
-              <a:t>~0:41. The definition, and the comparison table that makes it concrete.</a:t>
-            </a:r>
-          </a:p>
-          <a:p>
-            <a:endParaRPr/>
-          </a:p>
-          <a:p>
-            <a:r>
-              <a:t>Emphasise the last row, and correct a common reading of the term: context engineering is not only for agents. Anthropic defines it for any call to a model, as curating "the smallest possible set of high-signal tokens" in the window; it matters most when an agent runs in a loop, because the window then fills with its own tool results, turn after turn. The term took off in June 2025 (Tobi Lütke's post, then Andrej Karpathy's "filling the context window with just the right information for the next step"), and the practice is older than the name: every pasted stack trace is context engineering. Part 2 opens the "what does it need to see" question up: what is literally on the list the model is handed.</a:t>
-            </a:r>
-          </a:p>
-        </p:txBody>
-      </p:sp>
-      <p:sp>
-        <p:nvSpPr>
-          <p:cNvPr id="4" name="Slide Number Placeholder 3"/>
-          <p:cNvSpPr>
-            <a:spLocks noGrp="1"/>
-          </p:cNvSpPr>
-          <p:nvPr>
-            <p:ph type="sldNum" sz="quarter" idx="5"/>
-          </p:nvPr>
-        </p:nvSpPr>
-        <p:spPr/>
-      </p:sp>
-    </p:spTree>
-  </p:cSld>
-  <p:clrMapOvr>
-    <a:masterClrMapping/>
-  </p:clrMapOvr>
-</p:notes>
-</file>
-
-<file path=ppt/notesSlides/notesSlide25.xml><?xml version="1.0" encoding="utf-8"?>
-<p:notes xmlns:a="http://schemas.openxmlformats.org/drawingml/2006/main" xmlns:r="http://schemas.openxmlformats.org/officeDocument/2006/relationships" xmlns:p="http://schemas.openxmlformats.org/presentationml/2006/main">
-  <p:cSld>
-    <p:spTree>
-      <p:nvGrpSpPr>
-        <p:cNvPr id="1" name=""/>
-        <p:cNvGrpSpPr/>
-        <p:nvPr/>
-      </p:nvGrpSpPr>
-      <p:grpSpPr>
-        <a:xfrm>
-          <a:off x="0" y="0"/>
-          <a:ext cx="0" cy="0"/>
-          <a:chOff x="0" y="0"/>
-          <a:chExt cx="0" cy="0"/>
-        </a:xfrm>
-      </p:grpSpPr>
-      <p:sp>
-        <p:nvSpPr>
-          <p:cNvPr id="2" name="Slide Image Placeholder 1"/>
-          <p:cNvSpPr>
-            <a:spLocks noGrp="1" noRot="1" noChangeAspect="1"/>
-          </p:cNvSpPr>
-          <p:nvPr>
-            <p:ph type="sldImg" idx="2"/>
-          </p:nvPr>
-        </p:nvSpPr>
-        <p:spPr/>
-      </p:sp>
-      <p:sp>
-        <p:nvSpPr>
-          <p:cNvPr id="3" name="Notes Placeholder 2"/>
-          <p:cNvSpPr>
-            <a:spLocks noGrp="1"/>
-          </p:cNvSpPr>
-          <p:nvPr>
-            <p:ph type="body" sz="quarter" idx="3"/>
-          </p:nvPr>
-        </p:nvSpPr>
-        <p:spPr/>
-        <p:txBody>
-          <a:bodyPr/>
-          <a:lstStyle/>
-          <a:p>
-            <a:r>
-              <a:t>~0:43. PREDICT beat 3 — the diagnostic, and the most practically useful thirty seconds of the two lectures.</a:t>
-            </a:r>
-          </a:p>
-          <a:p>
-            <a:endParaRPr/>
-          </a:p>
-          <a:p>
-            <a:r>
-              <a:t>The wrong answer to expect is "reword it again" — it is what everyone does, and it is why people spend twenty minutes going nowhere. The faulty model is that every failure is a phrasing failure, so the fix is always on the keyboard. Consistent failure across rewordings is EVIDENCE, not proof: the likeliest explanation is missing information, because no amount of rewording adds any. Name the other explanations when a student raises them — the request is genuinely ambiguous, or the task is beyond the model — and the diagnostic on the next slide separates them: if you can name the fact it lacks, supply it; if you cannot, the problem is not context. The "bigger model" option shares the mistake — it treats a missing input as a capacity problem.</a:t>
-            </a:r>
-          </a:p>
-        </p:txBody>
-      </p:sp>
-      <p:sp>
-        <p:nvSpPr>
-          <p:cNvPr id="4" name="Slide Number Placeholder 3"/>
-          <p:cNvSpPr>
-            <a:spLocks noGrp="1"/>
-          </p:cNvSpPr>
-          <p:nvPr>
-            <p:ph type="sldNum" sz="quarter" idx="5"/>
-          </p:nvPr>
-        </p:nvSpPr>
-        <p:spPr/>
-      </p:sp>
-    </p:spTree>
-  </p:cSld>
-  <p:clrMapOvr>
-    <a:masterClrMapping/>
-  </p:clrMapOvr>
-</p:notes>
-</file>
-
-<file path=ppt/notesSlides/notesSlide26.xml><?xml version="1.0" encoding="utf-8"?>
-<p:notes xmlns:a="http://schemas.openxmlformats.org/drawingml/2006/main" xmlns:r="http://schemas.openxmlformats.org/officeDocument/2006/relationships" xmlns:p="http://schemas.openxmlformats.org/presentationml/2006/main">
-  <p:cSld>
-    <p:spTree>
-      <p:nvGrpSpPr>
-        <p:cNvPr id="1" name=""/>
-        <p:cNvGrpSpPr/>
-        <p:nvPr/>
-      </p:nvGrpSpPr>
-      <p:grpSpPr>
-        <a:xfrm>
-          <a:off x="0" y="0"/>
-          <a:ext cx="0" cy="0"/>
-          <a:chOff x="0" y="0"/>
-          <a:chExt cx="0" cy="0"/>
-        </a:xfrm>
-      </p:grpSpPr>
-      <p:sp>
-        <p:nvSpPr>
-          <p:cNvPr id="2" name="Slide Image Placeholder 1"/>
-          <p:cNvSpPr>
-            <a:spLocks noGrp="1" noRot="1" noChangeAspect="1"/>
-          </p:cNvSpPr>
-          <p:nvPr>
-            <p:ph type="sldImg" idx="2"/>
-          </p:nvPr>
-        </p:nvSpPr>
-        <p:spPr/>
-      </p:sp>
-      <p:sp>
-        <p:nvSpPr>
-          <p:cNvPr id="3" name="Notes Placeholder 2"/>
-          <p:cNvSpPr>
-            <a:spLocks noGrp="1"/>
-          </p:cNvSpPr>
-          <p:nvPr>
-            <p:ph type="body" sz="quarter" idx="3"/>
-          </p:nvPr>
-        </p:nvSpPr>
-        <p:spPr/>
-        <p:txBody>
-          <a:bodyPr/>
-          <a:lstStyle/>
-          <a:p>
-            <a:r>
-              <a:t>~0:45. The answer and the rule. This is the sentence to leave on the board.</a:t>
-            </a:r>
-          </a:p>
-          <a:p>
-            <a:endParaRPr/>
-          </a:p>
-          <a:p>
-            <a:r>
-              <a:t>The two fixes differ in kind: a wording problem is fixed on the keyboard, a knowledge problem is fixed by pasting something, the schema, the error, the failing test. If you can name the fact it lacks, supply it; if you cannot, the problem is probably not context. Part 2 adds a third answer that nobody expects: sometimes the fix is to take things out.</a:t>
-            </a:r>
-          </a:p>
-        </p:txBody>
-      </p:sp>
-      <p:sp>
-        <p:nvSpPr>
-          <p:cNvPr id="4" name="Slide Number Placeholder 3"/>
-          <p:cNvSpPr>
-            <a:spLocks noGrp="1"/>
-          </p:cNvSpPr>
-          <p:nvPr>
-            <p:ph type="sldNum" sz="quarter" idx="5"/>
-          </p:nvPr>
-        </p:nvSpPr>
-        <p:spPr/>
-      </p:sp>
-    </p:spTree>
-  </p:cSld>
-  <p:clrMapOvr>
-    <a:masterClrMapping/>
-  </p:clrMapOvr>
-</p:notes>
-</file>
-
-<file path=ppt/notesSlides/notesSlide27.xml><?xml version="1.0" encoding="utf-8"?>
-<p:notes xmlns:a="http://schemas.openxmlformats.org/drawingml/2006/main" xmlns:r="http://schemas.openxmlformats.org/officeDocument/2006/relationships" xmlns:p="http://schemas.openxmlformats.org/presentationml/2006/main">
-  <p:cSld>
-    <p:spTree>
-      <p:nvGrpSpPr>
-        <p:cNvPr id="1" name=""/>
-        <p:cNvGrpSpPr/>
-        <p:nvPr/>
-      </p:nvGrpSpPr>
-      <p:grpSpPr>
-        <a:xfrm>
-          <a:off x="0" y="0"/>
-          <a:ext cx="0" cy="0"/>
-          <a:chOff x="0" y="0"/>
-          <a:chExt cx="0" cy="0"/>
-        </a:xfrm>
-      </p:grpSpPr>
-      <p:sp>
-        <p:nvSpPr>
-          <p:cNvPr id="2" name="Slide Image Placeholder 1"/>
-          <p:cNvSpPr>
-            <a:spLocks noGrp="1" noRot="1" noChangeAspect="1"/>
-          </p:cNvSpPr>
-          <p:nvPr>
-            <p:ph type="sldImg" idx="2"/>
-          </p:nvPr>
-        </p:nvSpPr>
-        <p:spPr/>
-      </p:sp>
-      <p:sp>
-        <p:nvSpPr>
-          <p:cNvPr id="3" name="Notes Placeholder 2"/>
-          <p:cNvSpPr>
-            <a:spLocks noGrp="1"/>
-          </p:cNvSpPr>
-          <p:nvPr>
-            <p:ph type="body" sz="quarter" idx="3"/>
-          </p:nvPr>
-        </p:nvSpPr>
-        <p:spPr/>
-        <p:txBody>
-          <a:bodyPr/>
-          <a:lstStyle/>
-          <a:p>
-            <a:r>
-              <a:t>~0:48. The habit that turns silent decisions into questions before any code exists. The prompt asks the model to list what it would otherwise have to guess, and to stop there. Each question it asks is a gap in your specification, found for free, and your answers become the next prompt's SPEC.</a:t>
-            </a:r>
-          </a:p>
-          <a:p>
-            <a:endParaRPr/>
-          </a:p>
-          <a:p>
-            <a:r>
-              <a:t>The misconception: students expect a clarifying question to be a sign the tool is weak or unsure, and read an immediate answer as confidence. An immediate answer to an under-specified request is the tool filling every gap from what is most common, silently; the questions are the same gaps made visible. The lab's "ask for questions first" exercise drills it.</a:t>
-            </a:r>
-          </a:p>
-        </p:txBody>
-      </p:sp>
-      <p:sp>
-        <p:nvSpPr>
-          <p:cNvPr id="4" name="Slide Number Placeholder 3"/>
-          <p:cNvSpPr>
-            <a:spLocks noGrp="1"/>
-          </p:cNvSpPr>
-          <p:nvPr>
-            <p:ph type="sldNum" sz="quarter" idx="5"/>
-          </p:nvPr>
-        </p:nvSpPr>
-        <p:spPr/>
-      </p:sp>
-    </p:spTree>
-  </p:cSld>
-  <p:clrMapOvr>
-    <a:masterClrMapping/>
-  </p:clrMapOvr>
-</p:notes>
-</file>
-
-<file path=ppt/notesSlides/notesSlide28.xml><?xml version="1.0" encoding="utf-8"?>
-<p:notes xmlns:a="http://schemas.openxmlformats.org/drawingml/2006/main" xmlns:r="http://schemas.openxmlformats.org/officeDocument/2006/relationships" xmlns:p="http://schemas.openxmlformats.org/presentationml/2006/main">
-  <p:cSld>
-    <p:spTree>
-      <p:nvGrpSpPr>
-        <p:cNvPr id="1" name=""/>
-        <p:cNvGrpSpPr/>
-        <p:nvPr/>
-      </p:nvGrpSpPr>
-      <p:grpSpPr>
-        <a:xfrm>
-          <a:off x="0" y="0"/>
-          <a:ext cx="0" cy="0"/>
-          <a:chOff x="0" y="0"/>
-          <a:chExt cx="0" cy="0"/>
-        </a:xfrm>
-      </p:grpSpPr>
-      <p:sp>
-        <p:nvSpPr>
-          <p:cNvPr id="2" name="Slide Image Placeholder 1"/>
-          <p:cNvSpPr>
-            <a:spLocks noGrp="1" noRot="1" noChangeAspect="1"/>
-          </p:cNvSpPr>
-          <p:nvPr>
-            <p:ph type="sldImg" idx="2"/>
-          </p:nvPr>
-        </p:nvSpPr>
-        <p:spPr/>
-      </p:sp>
-      <p:sp>
-        <p:nvSpPr>
-          <p:cNvPr id="3" name="Notes Placeholder 2"/>
-          <p:cNvSpPr>
-            <a:spLocks noGrp="1"/>
-          </p:cNvSpPr>
-          <p:nvPr>
-            <p:ph type="body" sz="quarter" idx="3"/>
-          </p:nvPr>
-        </p:nvSpPr>
-        <p:spPr/>
-        <p:txBody>
-          <a:bodyPr/>
-          <a:lstStyle/>
-          <a:p>
-            <a:r>
-              <a:t>~0:51. Limits, and the honest close to part 1. Be blunt: no amount of prompting fixes these, and pretending otherwise wastes their time.</a:t>
-            </a:r>
-          </a:p>
-          <a:p>
-            <a:endParaRPr/>
-          </a:p>
-          <a:p>
-            <a:r>
-              <a:t>The last bullet is the honest one — a well-prompted answer to the wrong question is still wrong, and the assistant will never tell you that you asked the wrong question. The first bullet is the bridge to part 2's question: if wording cannot fix a missing input, what exactly does the model have in front of it?</a:t>
-            </a:r>
-          </a:p>
-          <a:p>
-            <a:endParaRPr/>
-          </a:p>
-          <a:p>
-            <a:r>
-              <a:t>The third bullet is worded carefully. A model predicting digits token by token is unreliable at exact counting and arithmetic (the tokens slide showed a year arriving as "202" and "6"), but an assistant that runs code for the calculation gets it right; the fix is to ask it to compute, not to trust it to count.</a:t>
-            </a:r>
-          </a:p>
-        </p:txBody>
-      </p:sp>
-      <p:sp>
-        <p:nvSpPr>
-          <p:cNvPr id="4" name="Slide Number Placeholder 3"/>
-          <p:cNvSpPr>
-            <a:spLocks noGrp="1"/>
-          </p:cNvSpPr>
-          <p:nvPr>
-            <p:ph type="sldNum" sz="quarter" idx="5"/>
-          </p:nvPr>
-        </p:nvSpPr>
-        <p:spPr/>
-      </p:sp>
-    </p:spTree>
-  </p:cSld>
-  <p:clrMapOvr>
-    <a:masterClrMapping/>
-  </p:clrMapOvr>
-</p:notes>
-</file>
-
-<file path=ppt/notesSlides/notesSlide29.xml><?xml version="1.0" encoding="utf-8"?>
-<p:notes xmlns:a="http://schemas.openxmlformats.org/drawingml/2006/main" xmlns:r="http://schemas.openxmlformats.org/officeDocument/2006/relationships" xmlns:p="http://schemas.openxmlformats.org/presentationml/2006/main">
-  <p:cSld>
-    <p:spTree>
-      <p:nvGrpSpPr>
-        <p:cNvPr id="1" name=""/>
-        <p:cNvGrpSpPr/>
-        <p:nvPr/>
-      </p:nvGrpSpPr>
-      <p:grpSpPr>
-        <a:xfrm>
-          <a:off x="0" y="0"/>
-          <a:ext cx="0" cy="0"/>
-          <a:chOff x="0" y="0"/>
-          <a:chExt cx="0" cy="0"/>
-        </a:xfrm>
-      </p:grpSpPr>
-      <p:sp>
-        <p:nvSpPr>
-          <p:cNvPr id="2" name="Slide Image Placeholder 1"/>
-          <p:cNvSpPr>
-            <a:spLocks noGrp="1" noRot="1" noChangeAspect="1"/>
-          </p:cNvSpPr>
-          <p:nvPr>
-            <p:ph type="sldImg" idx="2"/>
-          </p:nvPr>
-        </p:nvSpPr>
-        <p:spPr/>
-      </p:sp>
-      <p:sp>
-        <p:nvSpPr>
-          <p:cNvPr id="3" name="Notes Placeholder 2"/>
-          <p:cNvSpPr>
-            <a:spLocks noGrp="1"/>
-          </p:cNvSpPr>
-          <p:nvPr>
-            <p:ph type="body" sz="quarter" idx="3"/>
-          </p:nvPr>
-        </p:nvSpPr>
-        <p:spPr/>
-        <p:txBody>
-          <a:bodyPr/>
-          <a:lstStyle/>
-          <a:p>
-            <a:r>
-              <a:t>End of part 1. Recap the three rules: specify or it decides, keep the diff small, and ask whether a failure is wording or knowledge. Part 2 explains why those rules work: how a gap gets filled, what is in front of the model when it answers, and why adding more makes it worse. Start part 2 from this slide as a reminder.</a:t>
-            </a:r>
-          </a:p>
-        </p:txBody>
-      </p:sp>
-      <p:sp>
-        <p:nvSpPr>
-          <p:cNvPr id="4" name="Slide Number Placeholder 3"/>
-          <p:cNvSpPr>
-            <a:spLocks noGrp="1"/>
-          </p:cNvSpPr>
-          <p:nvPr>
-            <p:ph type="sldNum" sz="quarter" idx="5"/>
-          </p:nvPr>
-        </p:nvSpPr>
-        <p:spPr/>
-      </p:sp>
-    </p:spTree>
-  </p:cSld>
-  <p:clrMapOvr>
-    <a:masterClrMapping/>
-  </p:clrMapOvr>
-</p:notes>
-</file>
-
-<file path=ppt/notesSlides/notesSlide3.xml><?xml version="1.0" encoding="utf-8"?>
-<p:notes xmlns:a="http://schemas.openxmlformats.org/drawingml/2006/main" xmlns:r="http://schemas.openxmlformats.org/officeDocument/2006/relationships" xmlns:p="http://schemas.openxmlformats.org/presentationml/2006/main">
-  <p:cSld>
-    <p:spTree>
-      <p:nvGrpSpPr>
-        <p:cNvPr id="1" name=""/>
-        <p:cNvGrpSpPr/>
-        <p:nvPr/>
-      </p:nvGrpSpPr>
-      <p:grpSpPr>
-        <a:xfrm>
-          <a:off x="0" y="0"/>
-          <a:ext cx="0" cy="0"/>
-          <a:chOff x="0" y="0"/>
-          <a:chExt cx="0" cy="0"/>
-        </a:xfrm>
-      </p:grpSpPr>
-      <p:sp>
-        <p:nvSpPr>
-          <p:cNvPr id="2" name="Slide Image Placeholder 1"/>
-          <p:cNvSpPr>
-            <a:spLocks noGrp="1" noRot="1" noChangeAspect="1"/>
-          </p:cNvSpPr>
-          <p:nvPr>
-            <p:ph type="sldImg" idx="2"/>
-          </p:nvPr>
-        </p:nvSpPr>
-        <p:spPr/>
-      </p:sp>
-      <p:sp>
-        <p:nvSpPr>
-          <p:cNvPr id="3" name="Notes Placeholder 2"/>
-          <p:cNvSpPr>
-            <a:spLocks noGrp="1"/>
-          </p:cNvSpPr>
-          <p:nvPr>
-            <p:ph type="body" sz="quarter" idx="3"/>
-          </p:nvPr>
-        </p:nvSpPr>
-        <p:spPr/>
-        <p:txBody>
-          <a:bodyPr/>
-          <a:lstStyle/>
-          <a:p>
-            <a:r>
-              <a:t>~0:04. The idea, said once and plainly: a prompt is a specification, and every gap in it is filled by the model from whatever was commonest in its training data. Part 2 explains how that filling actually happens.</a:t>
-            </a:r>
-          </a:p>
-          <a:p>
-            <a:endParaRPr/>
-          </a:p>
-          <a:p>
-            <a:r>
-              <a:t>The misconception to kill immediately: students think a good prompt is a LONG prompt, and start padding. Length is not the variable. Decisions made, and information supplied, are the variables.</a:t>
-            </a:r>
-          </a:p>
-        </p:txBody>
-      </p:sp>
-      <p:sp>
-        <p:nvSpPr>
-          <p:cNvPr id="4" name="Slide Number Placeholder 3"/>
-          <p:cNvSpPr>
-            <a:spLocks noGrp="1"/>
-          </p:cNvSpPr>
-          <p:nvPr>
-            <p:ph type="sldNum" sz="quarter" idx="5"/>
-          </p:nvPr>
-        </p:nvSpPr>
-        <p:spPr/>
-      </p:sp>
-    </p:spTree>
-  </p:cSld>
-  <p:clrMapOvr>
-    <a:masterClrMapping/>
-  </p:clrMapOvr>
-</p:notes>
-</file>
-
-<file path=ppt/notesSlides/notesSlide30.xml><?xml version="1.0" encoding="utf-8"?>
-<p:notes xmlns:a="http://schemas.openxmlformats.org/drawingml/2006/main" xmlns:r="http://schemas.openxmlformats.org/officeDocument/2006/relationships" xmlns:p="http://schemas.openxmlformats.org/presentationml/2006/main">
-  <p:cSld>
-    <p:spTree>
-      <p:nvGrpSpPr>
-        <p:cNvPr id="1" name=""/>
-        <p:cNvGrpSpPr/>
-        <p:nvPr/>
-      </p:nvGrpSpPr>
-      <p:grpSpPr>
-        <a:xfrm>
-          <a:off x="0" y="0"/>
-          <a:ext cx="0" cy="0"/>
-          <a:chOff x="0" y="0"/>
-          <a:chExt cx="0" cy="0"/>
-        </a:xfrm>
-      </p:grpSpPr>
-      <p:sp>
-        <p:nvSpPr>
-          <p:cNvPr id="2" name="Slide Image Placeholder 1"/>
-          <p:cNvSpPr>
-            <a:spLocks noGrp="1" noRot="1" noChangeAspect="1"/>
-          </p:cNvSpPr>
-          <p:nvPr>
-            <p:ph type="sldImg" idx="2"/>
-          </p:nvPr>
-        </p:nvSpPr>
-        <p:spPr/>
-      </p:sp>
-      <p:sp>
-        <p:nvSpPr>
-          <p:cNvPr id="3" name="Notes Placeholder 2"/>
-          <p:cNvSpPr>
-            <a:spLocks noGrp="1"/>
-          </p:cNvSpPr>
-          <p:nvPr>
-            <p:ph type="body" sz="quarter" idx="3"/>
-          </p:nvPr>
-        </p:nvSpPr>
-        <p:spPr/>
-        <p:txBody>
-          <a:bodyPr/>
-          <a:lstStyle/>
-          <a:p>
-            <a:r>
-              <a:t>Section divider (part 2 · section 1 of 4). Where its guesses come from, and what is actually in the window when it answers.</a:t>
-            </a:r>
-          </a:p>
-        </p:txBody>
-      </p:sp>
-      <p:sp>
-        <p:nvSpPr>
-          <p:cNvPr id="4" name="Slide Number Placeholder 3"/>
-          <p:cNvSpPr>
-            <a:spLocks noGrp="1"/>
-          </p:cNvSpPr>
-          <p:nvPr>
-            <p:ph type="sldNum" sz="quarter" idx="5"/>
-          </p:nvPr>
-        </p:nvSpPr>
-        <p:spPr/>
-      </p:sp>
-    </p:spTree>
-  </p:cSld>
-  <p:clrMapOvr>
-    <a:masterClrMapping/>
-  </p:clrMapOvr>
-</p:notes>
-</file>
-
-<file path=ppt/notesSlides/notesSlide31.xml><?xml version="1.0" encoding="utf-8"?>
-<p:notes xmlns:a="http://schemas.openxmlformats.org/drawingml/2006/main" xmlns:r="http://schemas.openxmlformats.org/officeDocument/2006/relationships" xmlns:p="http://schemas.openxmlformats.org/presentationml/2006/main">
-  <p:cSld>
-    <p:spTree>
-      <p:nvGrpSpPr>
-        <p:cNvPr id="1" name=""/>
-        <p:cNvGrpSpPr/>
-        <p:nvPr/>
-      </p:nvGrpSpPr>
-      <p:grpSpPr>
-        <a:xfrm>
-          <a:off x="0" y="0"/>
-          <a:ext cx="0" cy="0"/>
-          <a:chOff x="0" y="0"/>
-          <a:chExt cx="0" cy="0"/>
-        </a:xfrm>
-      </p:grpSpPr>
-      <p:sp>
-        <p:nvSpPr>
-          <p:cNvPr id="2" name="Slide Image Placeholder 1"/>
-          <p:cNvSpPr>
-            <a:spLocks noGrp="1" noRot="1" noChangeAspect="1"/>
-          </p:cNvSpPr>
-          <p:nvPr>
-            <p:ph type="sldImg" idx="2"/>
-          </p:nvPr>
-        </p:nvSpPr>
-        <p:spPr/>
-      </p:sp>
-      <p:sp>
-        <p:nvSpPr>
-          <p:cNvPr id="3" name="Notes Placeholder 2"/>
-          <p:cNvSpPr>
-            <a:spLocks noGrp="1"/>
-          </p:cNvSpPr>
-          <p:nvPr>
-            <p:ph type="body" sz="quarter" idx="3"/>
-          </p:nvPr>
-        </p:nvSpPr>
-        <p:spPr/>
-        <p:txBody>
-          <a:bodyPr/>
-          <a:lstStyle/>
-          <a:p>
-            <a:r>
-              <a:t>~1:05. Part 2 opens with the mechanism behind part 1's first rule. A model produces text by predicting the next token given everything in its window; where your specification is silent, the most likely continuation wins, and "most likely" means "most common in the training data for prompts like yours" — not "right for your users". So an unspecified choice is not a decision at all: it is a frequency wearing the clothes of a decision.</a:t>
-            </a:r>
-          </a:p>
-          <a:p>
-            <a:endParaRPr/>
-          </a:p>
-          <a:p>
-            <a:r>
-              <a:t>This is why a vague prompt's choices are always PLAUSIBLE — plausibility is precisely what the model optimises for — and why plausible is not the same as correct. The misconception underneath: students read a confident, specific answer as a considered one.</a:t>
-            </a:r>
-          </a:p>
-        </p:txBody>
-      </p:sp>
-      <p:sp>
-        <p:nvSpPr>
-          <p:cNvPr id="4" name="Slide Number Placeholder 3"/>
-          <p:cNvSpPr>
-            <a:spLocks noGrp="1"/>
-          </p:cNvSpPr>
-          <p:nvPr>
-            <p:ph type="sldNum" sz="quarter" idx="5"/>
-          </p:nvPr>
-        </p:nvSpPr>
-        <p:spPr/>
-      </p:sp>
-    </p:spTree>
-  </p:cSld>
-  <p:clrMapOvr>
-    <a:masterClrMapping/>
-  </p:clrMapOvr>
-</p:notes>
-</file>
-
-<file path=ppt/notesSlides/notesSlide32.xml><?xml version="1.0" encoding="utf-8"?>
-<p:notes xmlns:a="http://schemas.openxmlformats.org/drawingml/2006/main" xmlns:r="http://schemas.openxmlformats.org/officeDocument/2006/relationships" xmlns:p="http://schemas.openxmlformats.org/presentationml/2006/main">
-  <p:cSld>
-    <p:spTree>
-      <p:nvGrpSpPr>
-        <p:cNvPr id="1" name=""/>
-        <p:cNvGrpSpPr/>
-        <p:nvPr/>
-      </p:nvGrpSpPr>
-      <p:grpSpPr>
-        <a:xfrm>
-          <a:off x="0" y="0"/>
-          <a:ext cx="0" cy="0"/>
-          <a:chOff x="0" y="0"/>
-          <a:chExt cx="0" cy="0"/>
-        </a:xfrm>
-      </p:grpSpPr>
-      <p:sp>
-        <p:nvSpPr>
-          <p:cNvPr id="2" name="Slide Image Placeholder 1"/>
-          <p:cNvSpPr>
-            <a:spLocks noGrp="1" noRot="1" noChangeAspect="1"/>
-          </p:cNvSpPr>
-          <p:nvPr>
-            <p:ph type="sldImg" idx="2"/>
-          </p:nvPr>
-        </p:nvSpPr>
-        <p:spPr/>
-      </p:sp>
-      <p:sp>
-        <p:nvSpPr>
-          <p:cNvPr id="3" name="Notes Placeholder 2"/>
-          <p:cNvSpPr>
-            <a:spLocks noGrp="1"/>
-          </p:cNvSpPr>
-          <p:nvPr>
-            <p:ph type="body" sz="quarter" idx="3"/>
-          </p:nvPr>
-        </p:nvSpPr>
-        <p:spPr/>
-        <p:txBody>
-          <a:bodyPr/>
-          <a:lstStyle/>
-          <a:p>
-            <a:r>
-              <a:t>~1:07. Standing instructions: context you write once. Most coding assistants read a standing-instructions file into the window on every request: AGENTS.md (an open, plain-Markdown format released by OpenAI in August 2025, stewarded since December 2025 by the Linux Foundation's Agentic AI Foundation, and read by Codex, Copilot, Cursor, Jules and many others), CLAUDE.md for Claude Code, and .github/copilot-instructions.md for Copilot. The example shows what belongs there: the decisions you would otherwise re-type every time or leave to a frequency, such as the date convention from the opening pair.</a:t>
-            </a:r>
-          </a:p>
-          <a:p>
-            <a:endParaRPr/>
-          </a:p>
-          <a:p>
-            <a:r>
-              <a:t>The misconception: students believe the assistant learns their preferences by working with them, so a correction made once will stick. It does not: the weights are fixed and every conversation starts empty, so a preference persists only if something re-inserts it into the window each time, and this file is that something. Two consequences to land: the file is in the window on every request, so keep it short; and a stale rule in it steers as confidently as a true one, so it needs maintaining like code.</a:t>
-            </a:r>
-          </a:p>
-        </p:txBody>
-      </p:sp>
-      <p:sp>
-        <p:nvSpPr>
-          <p:cNvPr id="4" name="Slide Number Placeholder 3"/>
-          <p:cNvSpPr>
-            <a:spLocks noGrp="1"/>
-          </p:cNvSpPr>
-          <p:nvPr>
-            <p:ph type="sldNum" sz="quarter" idx="5"/>
-          </p:nvPr>
-        </p:nvSpPr>
-        <p:spPr/>
-      </p:sp>
-    </p:spTree>
-  </p:cSld>
-  <p:clrMapOvr>
-    <a:masterClrMapping/>
-  </p:clrMapOvr>
-</p:notes>
-</file>
-
-<file path=ppt/notesSlides/notesSlide33.xml><?xml version="1.0" encoding="utf-8"?>
-<p:notes xmlns:a="http://schemas.openxmlformats.org/drawingml/2006/main" xmlns:r="http://schemas.openxmlformats.org/officeDocument/2006/relationships" xmlns:p="http://schemas.openxmlformats.org/presentationml/2006/main">
-  <p:cSld>
-    <p:spTree>
-      <p:nvGrpSpPr>
-        <p:cNvPr id="1" name=""/>
-        <p:cNvGrpSpPr/>
-        <p:nvPr/>
-      </p:nvGrpSpPr>
-      <p:grpSpPr>
-        <a:xfrm>
-          <a:off x="0" y="0"/>
-          <a:ext cx="0" cy="0"/>
-          <a:chOff x="0" y="0"/>
-          <a:chExt cx="0" cy="0"/>
-        </a:xfrm>
-      </p:grpSpPr>
-      <p:sp>
-        <p:nvSpPr>
-          <p:cNvPr id="2" name="Slide Image Placeholder 1"/>
-          <p:cNvSpPr>
-            <a:spLocks noGrp="1" noRot="1" noChangeAspect="1"/>
-          </p:cNvSpPr>
-          <p:nvPr>
-            <p:ph type="sldImg" idx="2"/>
-          </p:nvPr>
-        </p:nvSpPr>
-        <p:spPr/>
-      </p:sp>
-      <p:sp>
-        <p:nvSpPr>
-          <p:cNvPr id="3" name="Notes Placeholder 2"/>
-          <p:cNvSpPr>
-            <a:spLocks noGrp="1"/>
-          </p:cNvSpPr>
-          <p:nvPr>
-            <p:ph type="body" sz="quarter" idx="3"/>
-          </p:nvPr>
-        </p:nvSpPr>
-        <p:spPr/>
-        <p:txBody>
-          <a:bodyPr/>
-          <a:lstStyle/>
-          <a:p>
-            <a:r>
-              <a:t>~1:09. PREDICT beat 4: what the model can see when you ask an editor assistant about a file you have not opened. Commit before the reveal.</a:t>
-            </a:r>
-          </a:p>
-          <a:p>
-            <a:endParaRPr/>
-          </a:p>
-          <a:p>
-            <a:r>
-              <a:t>The wrong answer to expect is "the whole project — it is open in the editor". The faulty model is that the assistant IS the editor, so anything on disk is visible to it; in fact the assistant is a program that picks a handful of things to put in the window, and the model sees only those — an open project is a folder on disk, not context. "Everything you have opened since starting" is the same mistake with memory added. "Nothing but your question" is closer but misses that editor assistants typically include the file you are in and may search or read others first. The teachable answer is "whatever it put in the window — and I should find out what that was".</a:t>
-            </a:r>
-          </a:p>
-        </p:txBody>
-      </p:sp>
-      <p:sp>
-        <p:nvSpPr>
-          <p:cNvPr id="4" name="Slide Number Placeholder 3"/>
-          <p:cNvSpPr>
-            <a:spLocks noGrp="1"/>
-          </p:cNvSpPr>
-          <p:nvPr>
-            <p:ph type="sldNum" sz="quarter" idx="5"/>
-          </p:nvPr>
-        </p:nvSpPr>
-        <p:spPr/>
-      </p:sp>
-    </p:spTree>
-  </p:cSld>
-  <p:clrMapOvr>
-    <a:masterClrMapping/>
-  </p:clrMapOvr>
-</p:notes>
-</file>
-
-<file path=ppt/notesSlides/notesSlide34.xml><?xml version="1.0" encoding="utf-8"?>
-<p:notes xmlns:a="http://schemas.openxmlformats.org/drawingml/2006/main" xmlns:r="http://schemas.openxmlformats.org/officeDocument/2006/relationships" xmlns:p="http://schemas.openxmlformats.org/presentationml/2006/main">
-  <p:cSld>
-    <p:spTree>
-      <p:nvGrpSpPr>
-        <p:cNvPr id="1" name=""/>
-        <p:cNvGrpSpPr/>
-        <p:nvPr/>
-      </p:nvGrpSpPr>
-      <p:grpSpPr>
-        <a:xfrm>
-          <a:off x="0" y="0"/>
-          <a:ext cx="0" cy="0"/>
-          <a:chOff x="0" y="0"/>
-          <a:chExt cx="0" cy="0"/>
-        </a:xfrm>
-      </p:grpSpPr>
-      <p:sp>
-        <p:nvSpPr>
-          <p:cNvPr id="2" name="Slide Image Placeholder 1"/>
-          <p:cNvSpPr>
-            <a:spLocks noGrp="1" noRot="1" noChangeAspect="1"/>
-          </p:cNvSpPr>
-          <p:nvPr>
-            <p:ph type="sldImg" idx="2"/>
-          </p:nvPr>
-        </p:nvSpPr>
-        <p:spPr/>
-      </p:sp>
-      <p:sp>
-        <p:nvSpPr>
-          <p:cNvPr id="3" name="Notes Placeholder 2"/>
-          <p:cNvSpPr>
-            <a:spLocks noGrp="1"/>
-          </p:cNvSpPr>
-          <p:nvPr>
-            <p:ph type="body" sz="quarter" idx="3"/>
-          </p:nvPr>
-        </p:nvSpPr>
-        <p:spPr/>
-        <p:txBody>
-          <a:bodyPr/>
-          <a:lstStyle/>
-          <a:p>
-            <a:r>
-              <a:t>~1:11. The reveal, and the practical habit that comes out of it: there is no project, only the window, so when an answer is wrong the first question is what went in. Some assistants search or read files before answering; that is context engineering done FOR you, and it is still worth checking what they chose, because a plausible answer about the wrong file looks identical to a right one.</a:t>
-            </a:r>
-          </a:p>
-          <a:p>
-            <a:endParaRPr/>
-          </a:p>
-          <a:p>
-            <a:r>
-              <a:t>Connects back to the diagnostic question: "does not know" now has a concrete meaning — it was not on the list.</a:t>
-            </a:r>
-          </a:p>
-        </p:txBody>
-      </p:sp>
-      <p:sp>
-        <p:nvSpPr>
-          <p:cNvPr id="4" name="Slide Number Placeholder 3"/>
-          <p:cNvSpPr>
-            <a:spLocks noGrp="1"/>
-          </p:cNvSpPr>
-          <p:nvPr>
-            <p:ph type="sldNum" sz="quarter" idx="5"/>
-          </p:nvPr>
-        </p:nvSpPr>
-        <p:spPr/>
-      </p:sp>
-    </p:spTree>
-  </p:cSld>
-  <p:clrMapOvr>
-    <a:masterClrMapping/>
-  </p:clrMapOvr>
-</p:notes>
-</file>
-
-<file path=ppt/notesSlides/notesSlide35.xml><?xml version="1.0" encoding="utf-8"?>
-<p:notes xmlns:a="http://schemas.openxmlformats.org/drawingml/2006/main" xmlns:r="http://schemas.openxmlformats.org/officeDocument/2006/relationships" xmlns:p="http://schemas.openxmlformats.org/presentationml/2006/main">
-  <p:cSld>
-    <p:spTree>
-      <p:nvGrpSpPr>
-        <p:cNvPr id="1" name=""/>
-        <p:cNvGrpSpPr/>
-        <p:nvPr/>
-      </p:nvGrpSpPr>
-      <p:grpSpPr>
-        <a:xfrm>
-          <a:off x="0" y="0"/>
-          <a:ext cx="0" cy="0"/>
-          <a:chOff x="0" y="0"/>
-          <a:chExt cx="0" cy="0"/>
-        </a:xfrm>
-      </p:grpSpPr>
-      <p:sp>
-        <p:nvSpPr>
-          <p:cNvPr id="2" name="Slide Image Placeholder 1"/>
-          <p:cNvSpPr>
-            <a:spLocks noGrp="1" noRot="1" noChangeAspect="1"/>
-          </p:cNvSpPr>
-          <p:nvPr>
-            <p:ph type="sldImg" idx="2"/>
-          </p:nvPr>
-        </p:nvSpPr>
-        <p:spPr/>
-      </p:sp>
-      <p:sp>
-        <p:nvSpPr>
-          <p:cNvPr id="3" name="Notes Placeholder 2"/>
-          <p:cNvSpPr>
-            <a:spLocks noGrp="1"/>
-          </p:cNvSpPr>
-          <p:nvPr>
-            <p:ph type="body" sz="quarter" idx="3"/>
-          </p:nvPr>
-        </p:nvSpPr>
-        <p:spPr/>
-        <p:txBody>
-          <a:bodyPr/>
-          <a:lstStyle/>
-          <a:p>
-            <a:r>
-              <a:t>Section divider (part 2 · section 2 of 4). The same error twice: first on its own, then with the code it came from.</a:t>
-            </a:r>
-          </a:p>
-        </p:txBody>
-      </p:sp>
-      <p:sp>
-        <p:nvSpPr>
-          <p:cNvPr id="4" name="Slide Number Placeholder 3"/>
-          <p:cNvSpPr>
-            <a:spLocks noGrp="1"/>
-          </p:cNvSpPr>
-          <p:nvPr>
-            <p:ph type="sldNum" sz="quarter" idx="5"/>
-          </p:nvPr>
-        </p:nvSpPr>
-        <p:spPr/>
-      </p:sp>
-    </p:spTree>
-  </p:cSld>
-  <p:clrMapOvr>
-    <a:masterClrMapping/>
-  </p:clrMapOvr>
-</p:notes>
-</file>
-
-<file path=ppt/notesSlides/notesSlide36.xml><?xml version="1.0" encoding="utf-8"?>
-<p:notes xmlns:a="http://schemas.openxmlformats.org/drawingml/2006/main" xmlns:r="http://schemas.openxmlformats.org/officeDocument/2006/relationships" xmlns:p="http://schemas.openxmlformats.org/presentationml/2006/main">
-  <p:cSld>
-    <p:spTree>
-      <p:nvGrpSpPr>
-        <p:cNvPr id="1" name=""/>
-        <p:cNvGrpSpPr/>
-        <p:nvPr/>
-      </p:nvGrpSpPr>
-      <p:grpSpPr>
-        <a:xfrm>
-          <a:off x="0" y="0"/>
-          <a:ext cx="0" cy="0"/>
-          <a:chOff x="0" y="0"/>
-          <a:chExt cx="0" cy="0"/>
-        </a:xfrm>
-      </p:grpSpPr>
-      <p:sp>
-        <p:nvSpPr>
-          <p:cNvPr id="2" name="Slide Image Placeholder 1"/>
-          <p:cNvSpPr>
-            <a:spLocks noGrp="1" noRot="1" noChangeAspect="1"/>
-          </p:cNvSpPr>
-          <p:nvPr>
-            <p:ph type="sldImg" idx="2"/>
-          </p:nvPr>
-        </p:nvSpPr>
-        <p:spPr/>
-      </p:sp>
-      <p:sp>
-        <p:nvSpPr>
-          <p:cNvPr id="3" name="Notes Placeholder 2"/>
-          <p:cNvSpPr>
-            <a:spLocks noGrp="1"/>
-          </p:cNvSpPr>
-          <p:nvPr>
-            <p:ph type="body" sz="quarter" idx="3"/>
-          </p:nvPr>
-        </p:nvSpPr>
-        <p:spPr/>
-        <p:txBody>
-          <a:bodyPr/>
-          <a:lstStyle/>
-          <a:p>
-            <a:r>
-              <a:t>~1:13. The second worked case, different in kind from the opening pair: that was GENERATION (write me a function), this is DIAGNOSIS (why is this broken?). The set-up is the commonest real-world prompt there is — an error message and the word "fix". Nothing about it is badly worded, which is the point: the diagnostic question from part 1 should already tell the room this is a knowledge problem, because the model has been shown a symptom and none of the code.</a:t>
-            </a:r>
-          </a:p>
-        </p:txBody>
-      </p:sp>
-      <p:sp>
-        <p:nvSpPr>
-          <p:cNvPr id="4" name="Slide Number Placeholder 3"/>
-          <p:cNvSpPr>
-            <a:spLocks noGrp="1"/>
-          </p:cNvSpPr>
-          <p:nvPr>
-            <p:ph type="sldNum" sz="quarter" idx="5"/>
-          </p:nvPr>
-        </p:nvSpPr>
-        <p:spPr/>
-      </p:sp>
-    </p:spTree>
-  </p:cSld>
-  <p:clrMapOvr>
-    <a:masterClrMapping/>
-  </p:clrMapOvr>
-</p:notes>
-</file>
-
-<file path=ppt/notesSlides/notesSlide37.xml><?xml version="1.0" encoding="utf-8"?>
-<p:notes xmlns:a="http://schemas.openxmlformats.org/drawingml/2006/main" xmlns:r="http://schemas.openxmlformats.org/officeDocument/2006/relationships" xmlns:p="http://schemas.openxmlformats.org/presentationml/2006/main">
-  <p:cSld>
-    <p:spTree>
-      <p:nvGrpSpPr>
-        <p:cNvPr id="1" name=""/>
-        <p:cNvGrpSpPr/>
-        <p:nvPr/>
-      </p:nvGrpSpPr>
-      <p:grpSpPr>
-        <a:xfrm>
-          <a:off x="0" y="0"/>
-          <a:ext cx="0" cy="0"/>
-          <a:chOff x="0" y="0"/>
-          <a:chExt cx="0" cy="0"/>
-        </a:xfrm>
-      </p:grpSpPr>
-      <p:sp>
-        <p:nvSpPr>
-          <p:cNvPr id="2" name="Slide Image Placeholder 1"/>
-          <p:cNvSpPr>
-            <a:spLocks noGrp="1" noRot="1" noChangeAspect="1"/>
-          </p:cNvSpPr>
-          <p:nvPr>
-            <p:ph type="sldImg" idx="2"/>
-          </p:nvPr>
-        </p:nvSpPr>
-        <p:spPr/>
-      </p:sp>
-      <p:sp>
-        <p:nvSpPr>
-          <p:cNvPr id="3" name="Notes Placeholder 2"/>
-          <p:cNvSpPr>
-            <a:spLocks noGrp="1"/>
-          </p:cNvSpPr>
-          <p:nvPr>
-            <p:ph type="body" sz="quarter" idx="3"/>
-          </p:nvPr>
-        </p:nvSpPr>
-        <p:spPr/>
-        <p:txBody>
-          <a:bodyPr/>
-          <a:lstStyle/>
-          <a:p>
-            <a:r>
-              <a:t>~1:15. PREDICT beat 5: what comes back when the model has the symptom and none of the code. Commit before the reveal.</a:t>
-            </a:r>
-          </a:p>
-          <a:p>
-            <a:endParaRPr/>
-          </a:p>
-          <a:p>
-            <a:r>
-              <a:t>The wrong answer to expect is "it asks to see the function", as if that were all it does. The faulty model is that the model knows what it does not know, so a missing input registers as a gap and stops it. It does not stop it: the plausible continuation of "fix this KeyError" is a fix, and a current assistant wraps its caveats around the guess rather than replacing it with a question. Measured in September 2026 (next slide), most replies did ask for the code, and every reply also handed over the fix anyway. And the fix it reaches for, a default value, is the commonest answer to a KeyError in general, which is the first slide of part 2 again: a frequency, not a diagnosis.</a:t>
-            </a:r>
-          </a:p>
-        </p:txBody>
-      </p:sp>
-      <p:sp>
-        <p:nvSpPr>
-          <p:cNvPr id="4" name="Slide Number Placeholder 3"/>
-          <p:cNvSpPr>
-            <a:spLocks noGrp="1"/>
-          </p:cNvSpPr>
-          <p:nvPr>
-            <p:ph type="sldNum" sz="quarter" idx="5"/>
-          </p:nvPr>
-        </p:nvSpPr>
-        <p:spPr/>
-      </p:sp>
-    </p:spTree>
-  </p:cSld>
-  <p:clrMapOvr>
-    <a:masterClrMapping/>
-  </p:clrMapOvr>
-</p:notes>
-</file>
-
-<file path=ppt/notesSlides/notesSlide38.xml><?xml version="1.0" encoding="utf-8"?>
-<p:notes xmlns:a="http://schemas.openxmlformats.org/drawingml/2006/main" xmlns:r="http://schemas.openxmlformats.org/officeDocument/2006/relationships" xmlns:p="http://schemas.openxmlformats.org/presentationml/2006/main">
-  <p:cSld>
-    <p:spTree>
-      <p:nvGrpSpPr>
-        <p:cNvPr id="1" name=""/>
-        <p:cNvGrpSpPr/>
-        <p:nvPr/>
-      </p:nvGrpSpPr>
-      <p:grpSpPr>
-        <a:xfrm>
-          <a:off x="0" y="0"/>
-          <a:ext cx="0" cy="0"/>
-          <a:chOff x="0" y="0"/>
-          <a:chExt cx="0" cy="0"/>
-        </a:xfrm>
-      </p:grpSpPr>
-      <p:sp>
-        <p:nvSpPr>
-          <p:cNvPr id="2" name="Slide Image Placeholder 1"/>
-          <p:cNvSpPr>
-            <a:spLocks noGrp="1" noRot="1" noChangeAspect="1"/>
-          </p:cNvSpPr>
-          <p:nvPr>
-            <p:ph type="sldImg" idx="2"/>
-          </p:nvPr>
-        </p:nvSpPr>
-        <p:spPr/>
-      </p:sp>
-      <p:sp>
-        <p:nvSpPr>
-          <p:cNvPr id="3" name="Notes Placeholder 2"/>
-          <p:cNvSpPr>
-            <a:spLocks noGrp="1"/>
-          </p:cNvSpPr>
-          <p:nvPr>
-            <p:ph type="body" sz="quarter" idx="3"/>
-          </p:nvPr>
-        </p:nvSpPr>
-        <p:spPr/>
-        <p:txBody>
-          <a:bodyPr/>
-          <a:lstStyle/>
-          <a:p>
-            <a:r>
-              <a:t>~1:17. The reveal, measured. In September 2026 the error-only prompt went to GLM-5.3, Gemini 3.6 Flash and Gemini 2.5 Flash, each through its API with no system prompt (Claude and GPT models could not be reached for this run). Three of the four replies asked to see the code, and all four still offered item.get("unit_price", 0) or 0.0 as a fix; one model made that its "Recommended" first fix without asking for anything, and the reply box quotes it. So the modern shape of the failure is politer, not different: the question and the guess arrive together, and the guess is what gets pasted.</a:t>
-            </a:r>
-          </a:p>
-          <a:p>
-            <a:endParaRPr/>
-          </a:p>
-          <a:p>
-            <a:r>
-              <a:t>Then the consequence: a default of 0 stops the KeyError, and the test now fails on the arithmetic, because every item quietly contributes nothing. Students often read "different error" as progress. It is the opposite: the original symptom was honest, and the fix has hidden it. This is the knowledge problem made visible; nothing in the reply is unreasonable given what the model could see.</a:t>
-            </a:r>
-          </a:p>
-        </p:txBody>
-      </p:sp>
-      <p:sp>
-        <p:nvSpPr>
-          <p:cNvPr id="4" name="Slide Number Placeholder 3"/>
-          <p:cNvSpPr>
-            <a:spLocks noGrp="1"/>
-          </p:cNvSpPr>
-          <p:nvPr>
-            <p:ph type="sldNum" sz="quarter" idx="5"/>
-          </p:nvPr>
-        </p:nvSpPr>
-        <p:spPr/>
-      </p:sp>
-    </p:spTree>
-  </p:cSld>
-  <p:clrMapOvr>
-    <a:masterClrMapping/>
-  </p:clrMapOvr>
-</p:notes>
-</file>
-
-<file path=ppt/notesSlides/notesSlide39.xml><?xml version="1.0" encoding="utf-8"?>
-<p:notes xmlns:a="http://schemas.openxmlformats.org/drawingml/2006/main" xmlns:r="http://schemas.openxmlformats.org/officeDocument/2006/relationships" xmlns:p="http://schemas.openxmlformats.org/presentationml/2006/main">
-  <p:cSld>
-    <p:spTree>
-      <p:nvGrpSpPr>
-        <p:cNvPr id="1" name=""/>
-        <p:cNvGrpSpPr/>
-        <p:nvPr/>
-      </p:nvGrpSpPr>
-      <p:grpSpPr>
-        <a:xfrm>
-          <a:off x="0" y="0"/>
-          <a:ext cx="0" cy="0"/>
-          <a:chOff x="0" y="0"/>
-          <a:chExt cx="0" cy="0"/>
-        </a:xfrm>
-      </p:grpSpPr>
-      <p:sp>
-        <p:nvSpPr>
-          <p:cNvPr id="2" name="Slide Image Placeholder 1"/>
-          <p:cNvSpPr>
-            <a:spLocks noGrp="1" noRot="1" noChangeAspect="1"/>
-          </p:cNvSpPr>
-          <p:nvPr>
-            <p:ph type="sldImg" idx="2"/>
-          </p:nvPr>
-        </p:nvSpPr>
-        <p:spPr/>
-      </p:sp>
-      <p:sp>
-        <p:nvSpPr>
-          <p:cNvPr id="3" name="Notes Placeholder 2"/>
-          <p:cNvSpPr>
-            <a:spLocks noGrp="1"/>
-          </p:cNvSpPr>
-          <p:nvPr>
-            <p:ph type="body" sz="quarter" idx="3"/>
-          </p:nvPr>
-        </p:nvSpPr>
-        <p:spPr/>
-        <p:txBody>
-          <a:bodyPr/>
-          <a:lstStyle/>
-          <a:p>
-            <a:r>
-              <a:t>~1:19. With the function, the test and the fixture all in the window, the bug is visible at a glance: the fixture says `price` and the function says `unit_price`, and neither is wrong on its own. Two things to land. First, no rewording of "fix it" could have got here — the information was not in the window, which is the whole of context engineering in one example. Second, the real fix is a DECISION: which name is canonical? That is a product question, and it is yours, not the model's — so the case ends where part 1 began, at specification. The two halves are one discipline seen from two sides.</a:t>
-            </a:r>
-          </a:p>
-        </p:txBody>
-      </p:sp>
-      <p:sp>
-        <p:nvSpPr>
-          <p:cNvPr id="4" name="Slide Number Placeholder 3"/>
-          <p:cNvSpPr>
-            <a:spLocks noGrp="1"/>
-          </p:cNvSpPr>
-          <p:nvPr>
-            <p:ph type="sldNum" sz="quarter" idx="5"/>
-          </p:nvPr>
-        </p:nvSpPr>
-        <p:spPr/>
-      </p:sp>
-    </p:spTree>
-  </p:cSld>
-  <p:clrMapOvr>
-    <a:masterClrMapping/>
-  </p:clrMapOvr>
-</p:notes>
-</file>
-
-<file path=ppt/notesSlides/notesSlide4.xml><?xml version="1.0" encoding="utf-8"?>
-<p:notes xmlns:a="http://schemas.openxmlformats.org/drawingml/2006/main" xmlns:r="http://schemas.openxmlformats.org/officeDocument/2006/relationships" xmlns:p="http://schemas.openxmlformats.org/presentationml/2006/main">
-  <p:cSld>
-    <p:spTree>
-      <p:nvGrpSpPr>
-        <p:cNvPr id="1" name=""/>
-        <p:cNvGrpSpPr/>
-        <p:nvPr/>
-      </p:nvGrpSpPr>
-      <p:grpSpPr>
-        <a:xfrm>
-          <a:off x="0" y="0"/>
-          <a:ext cx="0" cy="0"/>
-          <a:chOff x="0" y="0"/>
-          <a:chExt cx="0" cy="0"/>
-        </a:xfrm>
-      </p:grpSpPr>
-      <p:sp>
-        <p:nvSpPr>
-          <p:cNvPr id="2" name="Slide Image Placeholder 1"/>
-          <p:cNvSpPr>
-            <a:spLocks noGrp="1" noRot="1" noChangeAspect="1"/>
-          </p:cNvSpPr>
-          <p:nvPr>
-            <p:ph type="sldImg" idx="2"/>
-          </p:nvPr>
-        </p:nvSpPr>
-        <p:spPr/>
-      </p:sp>
-      <p:sp>
-        <p:nvSpPr>
-          <p:cNvPr id="3" name="Notes Placeholder 2"/>
-          <p:cNvSpPr>
-            <a:spLocks noGrp="1"/>
-          </p:cNvSpPr>
-          <p:nvPr>
-            <p:ph type="body" sz="quarter" idx="3"/>
-          </p:nvPr>
-        </p:nvSpPr>
-        <p:spPr/>
-        <p:txBody>
-          <a:bodyPr/>
-          <a:lstStyle/>
-          <a:p>
-            <a:r>
-              <a:t>~0:05. Agenda, and the shape of the two lectures. Part 1 states the rules: what a prompt is mechanically (tokens and the window), SPEC and non-goals, the three techniques and what the evidence now says about each, and the turn from wording to context. Part 2 explains the mechanism behind those rules: how a gap actually gets filled, what is literally in the window when the model answers, why more context makes answers worse, and why long threads go stale. Reference slide, brisk.</a:t>
-            </a:r>
-          </a:p>
-        </p:txBody>
-      </p:sp>
-      <p:sp>
-        <p:nvSpPr>
-          <p:cNvPr id="4" name="Slide Number Placeholder 3"/>
-          <p:cNvSpPr>
-            <a:spLocks noGrp="1"/>
-          </p:cNvSpPr>
-          <p:nvPr>
-            <p:ph type="sldNum" sz="quarter" idx="5"/>
-          </p:nvPr>
-        </p:nvSpPr>
-        <p:spPr/>
-      </p:sp>
-    </p:spTree>
-  </p:cSld>
-  <p:clrMapOvr>
-    <a:masterClrMapping/>
-  </p:clrMapOvr>
-</p:notes>
-</file>
-
-<file path=ppt/notesSlides/notesSlide40.xml><?xml version="1.0" encoding="utf-8"?>
-<p:notes xmlns:a="http://schemas.openxmlformats.org/drawingml/2006/main" xmlns:r="http://schemas.openxmlformats.org/officeDocument/2006/relationships" xmlns:p="http://schemas.openxmlformats.org/presentationml/2006/main">
-  <p:cSld>
-    <p:spTree>
-      <p:nvGrpSpPr>
-        <p:cNvPr id="1" name=""/>
-        <p:cNvGrpSpPr/>
-        <p:nvPr/>
-      </p:nvGrpSpPr>
-      <p:grpSpPr>
-        <a:xfrm>
-          <a:off x="0" y="0"/>
-          <a:ext cx="0" cy="0"/>
-          <a:chOff x="0" y="0"/>
-          <a:chExt cx="0" cy="0"/>
-        </a:xfrm>
-      </p:grpSpPr>
-      <p:sp>
-        <p:nvSpPr>
-          <p:cNvPr id="2" name="Slide Image Placeholder 1"/>
-          <p:cNvSpPr>
-            <a:spLocks noGrp="1" noRot="1" noChangeAspect="1"/>
-          </p:cNvSpPr>
-          <p:nvPr>
-            <p:ph type="sldImg" idx="2"/>
-          </p:nvPr>
-        </p:nvSpPr>
-        <p:spPr/>
-      </p:sp>
-      <p:sp>
-        <p:nvSpPr>
-          <p:cNvPr id="3" name="Notes Placeholder 2"/>
-          <p:cNvSpPr>
-            <a:spLocks noGrp="1"/>
-          </p:cNvSpPr>
-          <p:nvPr>
-            <p:ph type="body" sz="quarter" idx="3"/>
-          </p:nvPr>
-        </p:nvSpPr>
-        <p:spPr/>
-        <p:txBody>
-          <a:bodyPr/>
-          <a:lstStyle/>
-          <a:p>
-            <a:r>
-              <a:t>~1:21. The fourth habit from part 1, made concrete: what goes in the window for a diagnosis, and what stays out. The verbatim rule matters mechanically — the model matches patterns, and a paraphrase drops exactly the tokens that carried the information: the key name, the line number, the type.</a:t>
-            </a:r>
-          </a:p>
-          <a:p>
-            <a:endParaRPr/>
-          </a:p>
-          <a:p>
-            <a:r>
-              <a:t>The "leave out" column is the half students skip. The rest of the file and unrelated files are noise, which the next slide explains; and a stated theory tends to get agreed with, so give evidence and let it form its own.</a:t>
-            </a:r>
-          </a:p>
-        </p:txBody>
-      </p:sp>
-      <p:sp>
-        <p:nvSpPr>
-          <p:cNvPr id="4" name="Slide Number Placeholder 3"/>
-          <p:cNvSpPr>
-            <a:spLocks noGrp="1"/>
-          </p:cNvSpPr>
-          <p:nvPr>
-            <p:ph type="sldNum" sz="quarter" idx="5"/>
-          </p:nvPr>
-        </p:nvSpPr>
-        <p:spPr/>
-      </p:sp>
-    </p:spTree>
-  </p:cSld>
-  <p:clrMapOvr>
-    <a:masterClrMapping/>
-  </p:clrMapOvr>
-</p:notes>
-</file>
-
-<file path=ppt/notesSlides/notesSlide41.xml><?xml version="1.0" encoding="utf-8"?>
-<p:notes xmlns:a="http://schemas.openxmlformats.org/drawingml/2006/main" xmlns:r="http://schemas.openxmlformats.org/officeDocument/2006/relationships" xmlns:p="http://schemas.openxmlformats.org/presentationml/2006/main">
-  <p:cSld>
-    <p:spTree>
-      <p:nvGrpSpPr>
-        <p:cNvPr id="1" name=""/>
-        <p:cNvGrpSpPr/>
-        <p:nvPr/>
-      </p:nvGrpSpPr>
-      <p:grpSpPr>
-        <a:xfrm>
-          <a:off x="0" y="0"/>
-          <a:ext cx="0" cy="0"/>
-          <a:chOff x="0" y="0"/>
-          <a:chExt cx="0" cy="0"/>
-        </a:xfrm>
-      </p:grpSpPr>
-      <p:sp>
-        <p:nvSpPr>
-          <p:cNvPr id="2" name="Slide Image Placeholder 1"/>
-          <p:cNvSpPr>
-            <a:spLocks noGrp="1" noRot="1" noChangeAspect="1"/>
-          </p:cNvSpPr>
-          <p:nvPr>
-            <p:ph type="sldImg" idx="2"/>
-          </p:nvPr>
-        </p:nvSpPr>
-        <p:spPr/>
-      </p:sp>
-      <p:sp>
-        <p:nvSpPr>
-          <p:cNvPr id="3" name="Notes Placeholder 2"/>
-          <p:cNvSpPr>
-            <a:spLocks noGrp="1"/>
-          </p:cNvSpPr>
-          <p:nvPr>
-            <p:ph type="body" sz="quarter" idx="3"/>
-          </p:nvPr>
-        </p:nvSpPr>
-        <p:spPr/>
-        <p:txBody>
-          <a:bodyPr/>
-          <a:lstStyle/>
-          <a:p>
-            <a:r>
-              <a:t>Section divider (part 2 · section 3 of 4). Leaving things out on purpose, and starting fresh when a conversation goes in circles.</a:t>
-            </a:r>
-          </a:p>
-        </p:txBody>
-      </p:sp>
-      <p:sp>
-        <p:nvSpPr>
-          <p:cNvPr id="4" name="Slide Number Placeholder 3"/>
-          <p:cNvSpPr>
-            <a:spLocks noGrp="1"/>
-          </p:cNvSpPr>
-          <p:nvPr>
-            <p:ph type="sldNum" sz="quarter" idx="5"/>
-          </p:nvPr>
-        </p:nvSpPr>
-        <p:spPr/>
-      </p:sp>
-    </p:spTree>
-  </p:cSld>
-  <p:clrMapOvr>
-    <a:masterClrMapping/>
-  </p:clrMapOvr>
-</p:notes>
-</file>
-
-<file path=ppt/notesSlides/notesSlide42.xml><?xml version="1.0" encoding="utf-8"?>
-<p:notes xmlns:a="http://schemas.openxmlformats.org/drawingml/2006/main" xmlns:r="http://schemas.openxmlformats.org/officeDocument/2006/relationships" xmlns:p="http://schemas.openxmlformats.org/presentationml/2006/main">
-  <p:cSld>
-    <p:spTree>
-      <p:nvGrpSpPr>
-        <p:cNvPr id="1" name=""/>
-        <p:cNvGrpSpPr/>
-        <p:nvPr/>
-      </p:nvGrpSpPr>
-      <p:grpSpPr>
-        <a:xfrm>
-          <a:off x="0" y="0"/>
-          <a:ext cx="0" cy="0"/>
-          <a:chOff x="0" y="0"/>
-          <a:chExt cx="0" cy="0"/>
-        </a:xfrm>
-      </p:grpSpPr>
-      <p:sp>
-        <p:nvSpPr>
-          <p:cNvPr id="2" name="Slide Image Placeholder 1"/>
-          <p:cNvSpPr>
-            <a:spLocks noGrp="1" noRot="1" noChangeAspect="1"/>
-          </p:cNvSpPr>
-          <p:nvPr>
-            <p:ph type="sldImg" idx="2"/>
-          </p:nvPr>
-        </p:nvSpPr>
-        <p:spPr/>
-      </p:sp>
-      <p:sp>
-        <p:nvSpPr>
-          <p:cNvPr id="3" name="Notes Placeholder 2"/>
-          <p:cNvSpPr>
-            <a:spLocks noGrp="1"/>
-          </p:cNvSpPr>
-          <p:nvPr>
-            <p:ph type="body" sz="quarter" idx="3"/>
-          </p:nvPr>
-        </p:nvSpPr>
-        <p:spPr/>
-        <p:txBody>
-          <a:bodyPr/>
-          <a:lstStyle/>
-          <a:p>
-            <a:r>
-              <a:t>~1:23. The third answer to part 1's diagnostic question: sometimes the fix is to take things out. Everything in the window competes for the model's attention: the four lines that decide the answer have to be found among whatever else you pasted, and the longer the input, the less reliably it is found (the next slide has the measurements) — so a "just in case" paste can bury the one thing that mattered. Two consequences: context engineering is as much exclusion as inclusion, and the cheapest improvement to a bad answer is often to take things OUT.</a:t>
-            </a:r>
-          </a:p>
-          <a:p>
-            <a:endParaRPr/>
-          </a:p>
-          <a:p>
-            <a:r>
-              <a:t>The misconception: students experience a big paste as diligence. It is the opposite — it hands the model a search problem it did not need to have. And everything in the window is priced, every turn.</a:t>
-            </a:r>
-          </a:p>
-        </p:txBody>
-      </p:sp>
-      <p:sp>
-        <p:nvSpPr>
-          <p:cNvPr id="4" name="Slide Number Placeholder 3"/>
-          <p:cNvSpPr>
-            <a:spLocks noGrp="1"/>
-          </p:cNvSpPr>
-          <p:nvPr>
-            <p:ph type="sldNum" sz="quarter" idx="5"/>
-          </p:nvPr>
-        </p:nvSpPr>
-        <p:spPr/>
-      </p:sp>
-    </p:spTree>
-  </p:cSld>
-  <p:clrMapOvr>
-    <a:masterClrMapping/>
-  </p:clrMapOvr>
-</p:notes>
-</file>
-
-<file path=ppt/notesSlides/notesSlide43.xml><?xml version="1.0" encoding="utf-8"?>
-<p:notes xmlns:a="http://schemas.openxmlformats.org/drawingml/2006/main" xmlns:r="http://schemas.openxmlformats.org/officeDocument/2006/relationships" xmlns:p="http://schemas.openxmlformats.org/presentationml/2006/main">
-  <p:cSld>
-    <p:spTree>
-      <p:nvGrpSpPr>
-        <p:cNvPr id="1" name=""/>
-        <p:cNvGrpSpPr/>
-        <p:nvPr/>
-      </p:nvGrpSpPr>
-      <p:grpSpPr>
-        <a:xfrm>
-          <a:off x="0" y="0"/>
-          <a:ext cx="0" cy="0"/>
-          <a:chOff x="0" y="0"/>
-          <a:chExt cx="0" cy="0"/>
-        </a:xfrm>
-      </p:grpSpPr>
-      <p:sp>
-        <p:nvSpPr>
-          <p:cNvPr id="2" name="Slide Image Placeholder 1"/>
-          <p:cNvSpPr>
-            <a:spLocks noGrp="1" noRot="1" noChangeAspect="1"/>
-          </p:cNvSpPr>
-          <p:nvPr>
-            <p:ph type="sldImg" idx="2"/>
-          </p:nvPr>
-        </p:nvSpPr>
-        <p:spPr/>
-      </p:sp>
-      <p:sp>
-        <p:nvSpPr>
-          <p:cNvPr id="3" name="Notes Placeholder 2"/>
-          <p:cNvSpPr>
-            <a:spLocks noGrp="1"/>
-          </p:cNvSpPr>
-          <p:nvPr>
-            <p:ph type="body" sz="quarter" idx="3"/>
-          </p:nvPr>
-        </p:nvSpPr>
-        <p:spPr/>
-        <p:txBody>
-          <a:bodyPr/>
-          <a:lstStyle/>
-          <a:p>
-            <a:r>
-              <a:t>~1:25. The measurements behind "more is not better". The lines are from NoLiMa (Adobe Research, ICML 2025): a fact hidden in irrelevant text, where finding it needs an association rather than a literal word match. GPT-4o answers 98% correctly with 1K tokens of input and 56% with 128K; GPT-4.1 falls from 96% to 65%. Chroma's "Context Rot" report (July 2025) tested 18 models from four vendors and found the same shape even on simple tasks, and in one test every model did better when given a focused prompt of about 300 tokens than when given the full history of about 113K tokens that contained the same answer.</a:t>
-            </a:r>
-          </a:p>
-          <a:p>
-            <a:endParaRPr/>
-          </a:p>
-          <a:p>
-            <a:r>
-              <a:t>The misconception: students read a million-token window as permission to paste everything, reasoning that the model will find what matters. It will find it less reliably the more there is. A historical note, because students meet it quoted everywhere: "Lost in the Middle" (Liu et al., 2023) found GPT-3.5 answered worse with the key document in the middle of 20 (53.8%) than with no documents at all (56.1%). Current models show that middle dip only under some conditions; the length effect is what still holds, so teach length, and date the middle.</a:t>
-            </a:r>
-          </a:p>
-        </p:txBody>
-      </p:sp>
-      <p:sp>
-        <p:nvSpPr>
-          <p:cNvPr id="4" name="Slide Number Placeholder 3"/>
-          <p:cNvSpPr>
-            <a:spLocks noGrp="1"/>
-          </p:cNvSpPr>
-          <p:nvPr>
-            <p:ph type="sldNum" sz="quarter" idx="5"/>
-          </p:nvPr>
-        </p:nvSpPr>
-        <p:spPr/>
-      </p:sp>
-    </p:spTree>
-  </p:cSld>
-  <p:clrMapOvr>
-    <a:masterClrMapping/>
-  </p:clrMapOvr>
-</p:notes>
-</file>
-
-<file path=ppt/notesSlides/notesSlide44.xml><?xml version="1.0" encoding="utf-8"?>
-<p:notes xmlns:a="http://schemas.openxmlformats.org/drawingml/2006/main" xmlns:r="http://schemas.openxmlformats.org/officeDocument/2006/relationships" xmlns:p="http://schemas.openxmlformats.org/presentationml/2006/main">
-  <p:cSld>
-    <p:spTree>
-      <p:nvGrpSpPr>
-        <p:cNvPr id="1" name=""/>
-        <p:cNvGrpSpPr/>
-        <p:nvPr/>
-      </p:nvGrpSpPr>
-      <p:grpSpPr>
-        <a:xfrm>
-          <a:off x="0" y="0"/>
-          <a:ext cx="0" cy="0"/>
-          <a:chOff x="0" y="0"/>
-          <a:chExt cx="0" cy="0"/>
-        </a:xfrm>
-      </p:grpSpPr>
-      <p:sp>
-        <p:nvSpPr>
-          <p:cNvPr id="2" name="Slide Image Placeholder 1"/>
-          <p:cNvSpPr>
-            <a:spLocks noGrp="1" noRot="1" noChangeAspect="1"/>
-          </p:cNvSpPr>
-          <p:nvPr>
-            <p:ph type="sldImg" idx="2"/>
-          </p:nvPr>
-        </p:nvSpPr>
-        <p:spPr/>
-      </p:sp>
-      <p:sp>
-        <p:nvSpPr>
-          <p:cNvPr id="3" name="Notes Placeholder 2"/>
-          <p:cNvSpPr>
-            <a:spLocks noGrp="1"/>
-          </p:cNvSpPr>
-          <p:nvPr>
-            <p:ph type="body" sz="quarter" idx="3"/>
-          </p:nvPr>
-        </p:nvSpPr>
-        <p:spPr/>
-        <p:txBody>
-          <a:bodyPr/>
-          <a:lstStyle/>
-          <a:p>
-            <a:r>
-              <a:t>~1:27. The conversation is a layer of the window, and it only grows. Every turn stays: your questions, its answers, and every attempt you rejected. The model cannot tell which parts you have mentally discarded — a dead end stays in view as if it were still live, and a correction sits right beside the wrong version it corrects. That is the mechanism behind a thread "going in circles": the window has filled with things you no longer want it to read. When the window is full, something has to go, and what goes is rarely your choice. Sets up the predict that follows.</a:t>
-            </a:r>
-          </a:p>
-          <a:p>
-            <a:endParaRPr/>
-          </a:p>
-          <a:p>
-            <a:r>
-              <a:t>One 2026 detail makes the last bullet concrete: Claude Code, Copilot in VS Code, Cursor and Codex all compact a long conversation automatically, replacing it with a summary when the window fills; Cursor's own documentation calls the summary "a lossy compression". Some let you steer it (/compact with a focus), but an instruction given only in chat can be summarised away, so a decision that must survive belongs in the standing-instructions file.</a:t>
-            </a:r>
-          </a:p>
-        </p:txBody>
-      </p:sp>
-      <p:sp>
-        <p:nvSpPr>
-          <p:cNvPr id="4" name="Slide Number Placeholder 3"/>
-          <p:cNvSpPr>
-            <a:spLocks noGrp="1"/>
-          </p:cNvSpPr>
-          <p:nvPr>
-            <p:ph type="sldNum" sz="quarter" idx="5"/>
-          </p:nvPr>
-        </p:nvSpPr>
-        <p:spPr/>
-      </p:sp>
-    </p:spTree>
-  </p:cSld>
-  <p:clrMapOvr>
-    <a:masterClrMapping/>
-  </p:clrMapOvr>
-</p:notes>
-</file>
-
-<file path=ppt/notesSlides/notesSlide45.xml><?xml version="1.0" encoding="utf-8"?>
-<p:notes xmlns:a="http://schemas.openxmlformats.org/drawingml/2006/main" xmlns:r="http://schemas.openxmlformats.org/officeDocument/2006/relationships" xmlns:p="http://schemas.openxmlformats.org/presentationml/2006/main">
-  <p:cSld>
-    <p:spTree>
-      <p:nvGrpSpPr>
-        <p:cNvPr id="1" name=""/>
-        <p:cNvGrpSpPr/>
-        <p:nvPr/>
-      </p:nvGrpSpPr>
-      <p:grpSpPr>
-        <a:xfrm>
-          <a:off x="0" y="0"/>
-          <a:ext cx="0" cy="0"/>
-          <a:chOff x="0" y="0"/>
-          <a:chExt cx="0" cy="0"/>
-        </a:xfrm>
-      </p:grpSpPr>
-      <p:sp>
-        <p:nvSpPr>
-          <p:cNvPr id="2" name="Slide Image Placeholder 1"/>
-          <p:cNvSpPr>
-            <a:spLocks noGrp="1" noRot="1" noChangeAspect="1"/>
-          </p:cNvSpPr>
-          <p:nvPr>
-            <p:ph type="sldImg" idx="2"/>
-          </p:nvPr>
-        </p:nvSpPr>
-        <p:spPr/>
-      </p:sp>
-      <p:sp>
-        <p:nvSpPr>
-          <p:cNvPr id="3" name="Notes Placeholder 2"/>
-          <p:cNvSpPr>
-            <a:spLocks noGrp="1"/>
-          </p:cNvSpPr>
-          <p:nvPr>
-            <p:ph type="body" sz="quarter" idx="3"/>
-          </p:nvPr>
-        </p:nvSpPr>
-        <p:spPr/>
-        <p:txBody>
-          <a:bodyPr/>
-          <a:lstStyle/>
-          <a:p>
-            <a:r>
-              <a:t>~1:29. PREDICT beat 6: what to do when a long thread has stopped converging. Commit before the reveal.</a:t>
-            </a:r>
-          </a:p>
-          <a:p>
-            <a:endParaRPr/>
-          </a:p>
-          <a:p>
-            <a:r>
-              <a:t>The wrong answer to expect is "push on — it is nearly there", with "switch to a bigger model" close behind. The faulty model is that the thread is a workspace accumulating understanding, so leaving it throws work away. It is the reverse: the thread is the window, and what it has accumulated is mostly dead ends, all still steering every answer. The understanding worth keeping — the files, the failing test, what was ruled out — is small and cheap to restate. "Bigger model" repeats part 1's error of treating polluted or missing information as a capacity problem; "raise the temperature" adds randomness to a problem that is about information.</a:t>
-            </a:r>
-          </a:p>
-        </p:txBody>
-      </p:sp>
-      <p:sp>
-        <p:nvSpPr>
-          <p:cNvPr id="4" name="Slide Number Placeholder 3"/>
-          <p:cNvSpPr>
-            <a:spLocks noGrp="1"/>
-          </p:cNvSpPr>
-          <p:nvPr>
-            <p:ph type="sldNum" sz="quarter" idx="5"/>
-          </p:nvPr>
-        </p:nvSpPr>
-        <p:spPr/>
-      </p:sp>
-    </p:spTree>
-  </p:cSld>
-  <p:clrMapOvr>
-    <a:masterClrMapping/>
-  </p:clrMapOvr>
-</p:notes>
-</file>
-
-<file path=ppt/notesSlides/notesSlide46.xml><?xml version="1.0" encoding="utf-8"?>
-<p:notes xmlns:a="http://schemas.openxmlformats.org/drawingml/2006/main" xmlns:r="http://schemas.openxmlformats.org/officeDocument/2006/relationships" xmlns:p="http://schemas.openxmlformats.org/presentationml/2006/main">
-  <p:cSld>
-    <p:spTree>
-      <p:nvGrpSpPr>
-        <p:cNvPr id="1" name=""/>
-        <p:cNvGrpSpPr/>
-        <p:nvPr/>
-      </p:nvGrpSpPr>
-      <p:grpSpPr>
-        <a:xfrm>
-          <a:off x="0" y="0"/>
-          <a:ext cx="0" cy="0"/>
-          <a:chOff x="0" y="0"/>
-          <a:chExt cx="0" cy="0"/>
-        </a:xfrm>
-      </p:grpSpPr>
-      <p:sp>
-        <p:nvSpPr>
-          <p:cNvPr id="2" name="Slide Image Placeholder 1"/>
-          <p:cNvSpPr>
-            <a:spLocks noGrp="1" noRot="1" noChangeAspect="1"/>
-          </p:cNvSpPr>
-          <p:nvPr>
-            <p:ph type="sldImg" idx="2"/>
-          </p:nvPr>
-        </p:nvSpPr>
-        <p:spPr/>
-      </p:sp>
-      <p:sp>
-        <p:nvSpPr>
-          <p:cNvPr id="3" name="Notes Placeholder 2"/>
-          <p:cNvSpPr>
-            <a:spLocks noGrp="1"/>
-          </p:cNvSpPr>
-          <p:nvPr>
-            <p:ph type="body" sz="quarter" idx="3"/>
-          </p:nvPr>
-        </p:nvSpPr>
-        <p:spPr/>
-        <p:txBody>
-          <a:bodyPr/>
-          <a:lstStyle/>
-          <a:p>
-            <a:r>
-              <a:t>~1:31. The reveal, and the prompt that does it. A fresh window with three lines of carried context beats forty minutes of accumulated thread, because the three lines are the whole of what the thread actually established.</a:t>
-            </a:r>
-          </a:p>
-          <a:p>
-            <a:endParaRPr/>
-          </a:p>
-          <a:p>
-            <a:r>
-              <a:t>Note what the good prompt carries: the code, the test, and what was RULED OUT — telling it the default was tried and why it failed is context too, and it stops the fresh conversation walking straight back into the same plausible guess. The last line asks it to name its assumption, which turns a silent decision into a visible one.</a:t>
-            </a:r>
-          </a:p>
-        </p:txBody>
-      </p:sp>
-      <p:sp>
-        <p:nvSpPr>
-          <p:cNvPr id="4" name="Slide Number Placeholder 3"/>
-          <p:cNvSpPr>
-            <a:spLocks noGrp="1"/>
-          </p:cNvSpPr>
-          <p:nvPr>
-            <p:ph type="sldNum" sz="quarter" idx="5"/>
-          </p:nvPr>
-        </p:nvSpPr>
-        <p:spPr/>
-      </p:sp>
-    </p:spTree>
-  </p:cSld>
-  <p:clrMapOvr>
-    <a:masterClrMapping/>
-  </p:clrMapOvr>
-</p:notes>
-</file>
-
-<file path=ppt/notesSlides/notesSlide47.xml><?xml version="1.0" encoding="utf-8"?>
-<p:notes xmlns:a="http://schemas.openxmlformats.org/drawingml/2006/main" xmlns:r="http://schemas.openxmlformats.org/officeDocument/2006/relationships" xmlns:p="http://schemas.openxmlformats.org/presentationml/2006/main">
-  <p:cSld>
-    <p:spTree>
-      <p:nvGrpSpPr>
-        <p:cNvPr id="1" name=""/>
-        <p:cNvGrpSpPr/>
-        <p:nvPr/>
-      </p:nvGrpSpPr>
-      <p:grpSpPr>
-        <a:xfrm>
-          <a:off x="0" y="0"/>
-          <a:ext cx="0" cy="0"/>
-          <a:chOff x="0" y="0"/>
-          <a:chExt cx="0" cy="0"/>
-        </a:xfrm>
-      </p:grpSpPr>
-      <p:sp>
-        <p:nvSpPr>
-          <p:cNvPr id="2" name="Slide Image Placeholder 1"/>
-          <p:cNvSpPr>
-            <a:spLocks noGrp="1" noRot="1" noChangeAspect="1"/>
-          </p:cNvSpPr>
-          <p:nvPr>
-            <p:ph type="sldImg" idx="2"/>
-          </p:nvPr>
-        </p:nvSpPr>
-        <p:spPr/>
-      </p:sp>
-      <p:sp>
-        <p:nvSpPr>
-          <p:cNvPr id="3" name="Notes Placeholder 2"/>
-          <p:cNvSpPr>
-            <a:spLocks noGrp="1"/>
-          </p:cNvSpPr>
-          <p:nvPr>
-            <p:ph type="body" sz="quarter" idx="3"/>
-          </p:nvPr>
-        </p:nvSpPr>
-        <p:spPr/>
-        <p:txBody>
-          <a:bodyPr/>
-          <a:lstStyle/>
-          <a:p>
-            <a:r>
-              <a:t>~1:33. Tests as context — where the two halves meet. A test is three of part 1's letters at once: an example (E), a constraint (C), and, because it is real code from your project, information the model did not have. And it cannot be read two ways, which prose always can. Written first, it turns "looks right" into "passes", which is the same move that lets anyone stop reading generated code line by line.</a:t>
-            </a:r>
-          </a:p>
-          <a:p>
-            <a:endParaRPr/>
-          </a:p>
-          <a:p>
-            <a:r>
-              <a:t>The misconception to name: students write the test AFTER the code, so the test encodes whatever the code already does, bugs included. The lab's tests-first exercise exists because of this slide.</a:t>
-            </a:r>
-          </a:p>
-        </p:txBody>
-      </p:sp>
-      <p:sp>
-        <p:nvSpPr>
-          <p:cNvPr id="4" name="Slide Number Placeholder 3"/>
-          <p:cNvSpPr>
-            <a:spLocks noGrp="1"/>
-          </p:cNvSpPr>
-          <p:nvPr>
-            <p:ph type="sldNum" sz="quarter" idx="5"/>
-          </p:nvPr>
-        </p:nvSpPr>
-        <p:spPr/>
-      </p:sp>
-    </p:spTree>
-  </p:cSld>
-  <p:clrMapOvr>
-    <a:masterClrMapping/>
-  </p:clrMapOvr>
-</p:notes>
-</file>
-
-<file path=ppt/notesSlides/notesSlide48.xml><?xml version="1.0" encoding="utf-8"?>
-<p:notes xmlns:a="http://schemas.openxmlformats.org/drawingml/2006/main" xmlns:r="http://schemas.openxmlformats.org/officeDocument/2006/relationships" xmlns:p="http://schemas.openxmlformats.org/presentationml/2006/main">
-  <p:cSld>
-    <p:spTree>
-      <p:nvGrpSpPr>
-        <p:cNvPr id="1" name=""/>
-        <p:cNvGrpSpPr/>
-        <p:nvPr/>
-      </p:nvGrpSpPr>
-      <p:grpSpPr>
-        <a:xfrm>
-          <a:off x="0" y="0"/>
-          <a:ext cx="0" cy="0"/>
-          <a:chOff x="0" y="0"/>
-          <a:chExt cx="0" cy="0"/>
-        </a:xfrm>
-      </p:grpSpPr>
-      <p:sp>
-        <p:nvSpPr>
-          <p:cNvPr id="2" name="Slide Image Placeholder 1"/>
-          <p:cNvSpPr>
-            <a:spLocks noGrp="1" noRot="1" noChangeAspect="1"/>
-          </p:cNvSpPr>
-          <p:nvPr>
-            <p:ph type="sldImg" idx="2"/>
-          </p:nvPr>
-        </p:nvSpPr>
-        <p:spPr/>
-      </p:sp>
-      <p:sp>
-        <p:nvSpPr>
-          <p:cNvPr id="3" name="Notes Placeholder 2"/>
-          <p:cNvSpPr>
-            <a:spLocks noGrp="1"/>
-          </p:cNvSpPr>
-          <p:nvPr>
-            <p:ph type="body" sz="quarter" idx="3"/>
-          </p:nvPr>
-        </p:nvSpPr>
-        <p:spPr/>
-        <p:txBody>
-          <a:bodyPr/>
-          <a:lstStyle/>
-          <a:p>
-            <a:r>
-              <a:t>~1:42. Debrief, and the synthesis of both halves: three kinds of gap, three different fixes, and the diagnostic question separates the first two. Under-specified is the date-order problem from the opening pair — the fix is a line of SPEC. Under-informed is the failing test — the fix is putting the file in the window, and no rewording reaches it. Over-loaded is the one nobody suspects, because it feels like diligence — the fix is taking things out.</a:t>
-            </a:r>
-          </a:p>
-          <a:p>
-            <a:endParaRPr/>
-          </a:p>
-          <a:p>
-            <a:r>
-              <a:t>An assistant helping a student with a bad answer should ask which of the three it is before suggesting anything.</a:t>
-            </a:r>
-          </a:p>
-        </p:txBody>
-      </p:sp>
-      <p:sp>
-        <p:nvSpPr>
-          <p:cNvPr id="4" name="Slide Number Placeholder 3"/>
-          <p:cNvSpPr>
-            <a:spLocks noGrp="1"/>
-          </p:cNvSpPr>
-          <p:nvPr>
-            <p:ph type="sldNum" sz="quarter" idx="5"/>
-          </p:nvPr>
-        </p:nvSpPr>
-        <p:spPr/>
-      </p:sp>
-    </p:spTree>
-  </p:cSld>
-  <p:clrMapOvr>
-    <a:masterClrMapping/>
-  </p:clrMapOvr>
-</p:notes>
-</file>
-
-<file path=ppt/notesSlides/notesSlide49.xml><?xml version="1.0" encoding="utf-8"?>
-<p:notes xmlns:a="http://schemas.openxmlformats.org/drawingml/2006/main" xmlns:r="http://schemas.openxmlformats.org/officeDocument/2006/relationships" xmlns:p="http://schemas.openxmlformats.org/presentationml/2006/main">
-  <p:cSld>
-    <p:spTree>
-      <p:nvGrpSpPr>
-        <p:cNvPr id="1" name=""/>
-        <p:cNvGrpSpPr/>
-        <p:nvPr/>
-      </p:nvGrpSpPr>
-      <p:grpSpPr>
-        <a:xfrm>
-          <a:off x="0" y="0"/>
-          <a:ext cx="0" cy="0"/>
-          <a:chOff x="0" y="0"/>
-          <a:chExt cx="0" cy="0"/>
-        </a:xfrm>
-      </p:grpSpPr>
-      <p:sp>
-        <p:nvSpPr>
-          <p:cNvPr id="2" name="Slide Image Placeholder 1"/>
-          <p:cNvSpPr>
-            <a:spLocks noGrp="1" noRot="1" noChangeAspect="1"/>
-          </p:cNvSpPr>
-          <p:nvPr>
-            <p:ph type="sldImg" idx="2"/>
-          </p:nvPr>
-        </p:nvSpPr>
-        <p:spPr/>
-      </p:sp>
-      <p:sp>
-        <p:nvSpPr>
-          <p:cNvPr id="3" name="Notes Placeholder 2"/>
-          <p:cNvSpPr>
-            <a:spLocks noGrp="1"/>
-          </p:cNvSpPr>
-          <p:nvPr>
-            <p:ph type="body" sz="quarter" idx="3"/>
-          </p:nvPr>
-        </p:nvSpPr>
-        <p:spPr/>
-        <p:txBody>
-          <a:bodyPr/>
-          <a:lstStyle/>
-          <a:p>
-            <a:r>
-              <a:t>~1:44. Common mistakes on both sides of the conversation.</a:t>
-            </a:r>
-          </a:p>
-          <a:p>
-            <a:endParaRPr/>
-          </a:p>
-          <a:p>
-            <a:r>
-              <a:t>When you ask, in the order students meet them. The first is the commonest and the easiest to fix: padding a prompt with adjectives instead of decisions — "write a really good, robust, professional function" specifies nothing. The second is the technique-collecting habit the part 1 predict tested: a technique without a problem it solves is noise in the prompt. The fourth is new with the evidence slides: a persona is not a way to buy accuracy.</a:t>
-            </a:r>
-          </a:p>
-          <a:p>
-            <a:endParaRPr/>
-          </a:p>
-          <a:p>
-            <a:r>
-              <a:t>When you give it context. The first two are part 1's; the last three are part 2's, and each is a mechanism misread: paraphrasing drops the tokens that carried the information, "it can see my project" mistakes a folder for a window, and staying in a stale thread mistakes accumulated dead ends for accumulated understanding.</a:t>
-            </a:r>
-          </a:p>
-        </p:txBody>
-      </p:sp>
-      <p:sp>
-        <p:nvSpPr>
-          <p:cNvPr id="4" name="Slide Number Placeholder 3"/>
-          <p:cNvSpPr>
-            <a:spLocks noGrp="1"/>
-          </p:cNvSpPr>
-          <p:nvPr>
-            <p:ph type="sldNum" sz="quarter" idx="5"/>
-          </p:nvPr>
-        </p:nvSpPr>
-        <p:spPr/>
-      </p:sp>
-    </p:spTree>
-  </p:cSld>
-  <p:clrMapOvr>
-    <a:masterClrMapping/>
-  </p:clrMapOvr>
-</p:notes>
-</file>
-
-<file path=ppt/notesSlides/notesSlide5.xml><?xml version="1.0" encoding="utf-8"?>
-<p:notes xmlns:a="http://schemas.openxmlformats.org/drawingml/2006/main" xmlns:r="http://schemas.openxmlformats.org/officeDocument/2006/relationships" xmlns:p="http://schemas.openxmlformats.org/presentationml/2006/main">
-  <p:cSld>
-    <p:spTree>
-      <p:nvGrpSpPr>
-        <p:cNvPr id="1" name=""/>
-        <p:cNvGrpSpPr/>
-        <p:nvPr/>
-      </p:nvGrpSpPr>
-      <p:grpSpPr>
-        <a:xfrm>
-          <a:off x="0" y="0"/>
-          <a:ext cx="0" cy="0"/>
-          <a:chOff x="0" y="0"/>
-          <a:chExt cx="0" cy="0"/>
-        </a:xfrm>
-      </p:grpSpPr>
-      <p:sp>
-        <p:nvSpPr>
-          <p:cNvPr id="2" name="Slide Image Placeholder 1"/>
-          <p:cNvSpPr>
-            <a:spLocks noGrp="1" noRot="1" noChangeAspect="1"/>
-          </p:cNvSpPr>
-          <p:nvPr>
-            <p:ph type="sldImg" idx="2"/>
-          </p:nvPr>
-        </p:nvSpPr>
-        <p:spPr/>
-      </p:sp>
-      <p:sp>
-        <p:nvSpPr>
-          <p:cNvPr id="3" name="Notes Placeholder 2"/>
-          <p:cNvSpPr>
-            <a:spLocks noGrp="1"/>
-          </p:cNvSpPr>
-          <p:nvPr>
-            <p:ph type="body" sz="quarter" idx="3"/>
-          </p:nvPr>
-        </p:nvSpPr>
-        <p:spPr/>
-        <p:txBody>
-          <a:bodyPr/>
-          <a:lstStyle/>
-          <a:p>
-            <a:r>
-              <a:t>Section divider (part 1 · section 1 of 3). What the model actually reads, and a checklist for prompts that leave nothing to guess.</a:t>
-            </a:r>
-          </a:p>
-        </p:txBody>
-      </p:sp>
-      <p:sp>
-        <p:nvSpPr>
-          <p:cNvPr id="4" name="Slide Number Placeholder 3"/>
-          <p:cNvSpPr>
-            <a:spLocks noGrp="1"/>
-          </p:cNvSpPr>
-          <p:nvPr>
-            <p:ph type="sldNum" sz="quarter" idx="5"/>
-          </p:nvPr>
-        </p:nvSpPr>
-        <p:spPr/>
-      </p:sp>
-    </p:spTree>
-  </p:cSld>
-  <p:clrMapOvr>
-    <a:masterClrMapping/>
-  </p:clrMapOvr>
-</p:notes>
-</file>
-
-<file path=ppt/notesSlides/notesSlide50.xml><?xml version="1.0" encoding="utf-8"?>
-<p:notes xmlns:a="http://schemas.openxmlformats.org/drawingml/2006/main" xmlns:r="http://schemas.openxmlformats.org/officeDocument/2006/relationships" xmlns:p="http://schemas.openxmlformats.org/presentationml/2006/main">
-  <p:cSld>
-    <p:spTree>
-      <p:nvGrpSpPr>
-        <p:cNvPr id="1" name=""/>
-        <p:cNvGrpSpPr/>
-        <p:nvPr/>
-      </p:nvGrpSpPr>
-      <p:grpSpPr>
-        <a:xfrm>
-          <a:off x="0" y="0"/>
-          <a:ext cx="0" cy="0"/>
-          <a:chOff x="0" y="0"/>
-          <a:chExt cx="0" cy="0"/>
-        </a:xfrm>
-      </p:grpSpPr>
-      <p:sp>
-        <p:nvSpPr>
-          <p:cNvPr id="2" name="Slide Image Placeholder 1"/>
-          <p:cNvSpPr>
-            <a:spLocks noGrp="1" noRot="1" noChangeAspect="1"/>
-          </p:cNvSpPr>
-          <p:nvPr>
-            <p:ph type="sldImg" idx="2"/>
-          </p:nvPr>
-        </p:nvSpPr>
-        <p:spPr/>
-      </p:sp>
-      <p:sp>
-        <p:nvSpPr>
-          <p:cNvPr id="3" name="Notes Placeholder 2"/>
-          <p:cNvSpPr>
-            <a:spLocks noGrp="1"/>
-          </p:cNvSpPr>
-          <p:nvPr>
-            <p:ph type="body" sz="quarter" idx="3"/>
-          </p:nvPr>
-        </p:nvSpPr>
-        <p:spPr/>
-        <p:txBody>
-          <a:bodyPr/>
-          <a:lstStyle/>
-          <a:p>
-            <a:r>
-              <a:t>Section divider (part 2 · section 4 of 4). How prompting changed since 2022, and why it still matters when agents work for hours.</a:t>
-            </a:r>
-          </a:p>
-        </p:txBody>
-      </p:sp>
-      <p:sp>
-        <p:nvSpPr>
-          <p:cNvPr id="4" name="Slide Number Placeholder 3"/>
-          <p:cNvSpPr>
-            <a:spLocks noGrp="1"/>
-          </p:cNvSpPr>
-          <p:nvPr>
-            <p:ph type="sldNum" sz="quarter" idx="5"/>
-          </p:nvPr>
-        </p:nvSpPr>
-        <p:spPr/>
-      </p:sp>
-    </p:spTree>
-  </p:cSld>
-  <p:clrMapOvr>
-    <a:masterClrMapping/>
-  </p:clrMapOvr>
-</p:notes>
-</file>
-
-<file path=ppt/notesSlides/notesSlide51.xml><?xml version="1.0" encoding="utf-8"?>
-<p:notes xmlns:a="http://schemas.openxmlformats.org/drawingml/2006/main" xmlns:r="http://schemas.openxmlformats.org/officeDocument/2006/relationships" xmlns:p="http://schemas.openxmlformats.org/presentationml/2006/main">
-  <p:cSld>
-    <p:spTree>
-      <p:nvGrpSpPr>
-        <p:cNvPr id="1" name=""/>
-        <p:cNvGrpSpPr/>
-        <p:nvPr/>
-      </p:nvGrpSpPr>
-      <p:grpSpPr>
-        <a:xfrm>
-          <a:off x="0" y="0"/>
-          <a:ext cx="0" cy="0"/>
-          <a:chOff x="0" y="0"/>
-          <a:chExt cx="0" cy="0"/>
-        </a:xfrm>
-      </p:grpSpPr>
-      <p:sp>
-        <p:nvSpPr>
-          <p:cNvPr id="2" name="Slide Image Placeholder 1"/>
-          <p:cNvSpPr>
-            <a:spLocks noGrp="1" noRot="1" noChangeAspect="1"/>
-          </p:cNvSpPr>
-          <p:nvPr>
-            <p:ph type="sldImg" idx="2"/>
-          </p:nvPr>
-        </p:nvSpPr>
-        <p:spPr/>
-      </p:sp>
-      <p:sp>
-        <p:nvSpPr>
-          <p:cNvPr id="3" name="Notes Placeholder 2"/>
-          <p:cNvSpPr>
-            <a:spLocks noGrp="1"/>
-          </p:cNvSpPr>
-          <p:nvPr>
-            <p:ph type="body" sz="quarter" idx="3"/>
-          </p:nvPr>
-        </p:nvSpPr>
-        <p:spPr/>
-        <p:txBody>
-          <a:bodyPr/>
-          <a:lstStyle/>
-          <a:p>
-            <a:r>
-              <a:t>How prompting changed since ChatGPT launched on GPT-3.5 in November 2022. Then: one message in, one answer out, and the skill was rewording. Now: agents read the project, run tests and work through a written plan for hours. METR measures the length of task (in human working time) an agent completes half the time; it has doubled roughly every 7 months since 2019 and faster since 2024, from under a minute for GPT-3.5 to about 12 hours for the best models in February 2026. Treat the numbers as a trend, not a precise figure: the confidence intervals are wide.</a:t>
-            </a:r>
-          </a:p>
-        </p:txBody>
-      </p:sp>
-      <p:sp>
-        <p:nvSpPr>
-          <p:cNvPr id="4" name="Slide Number Placeholder 3"/>
-          <p:cNvSpPr>
-            <a:spLocks noGrp="1"/>
-          </p:cNvSpPr>
-          <p:nvPr>
-            <p:ph type="sldNum" sz="quarter" idx="5"/>
-          </p:nvPr>
-        </p:nvSpPr>
-        <p:spPr/>
-      </p:sp>
-    </p:spTree>
-  </p:cSld>
-  <p:clrMapOvr>
-    <a:masterClrMapping/>
-  </p:clrMapOvr>
-</p:notes>
-</file>
-
-<file path=ppt/notesSlides/notesSlide52.xml><?xml version="1.0" encoding="utf-8"?>
-<p:notes xmlns:a="http://schemas.openxmlformats.org/drawingml/2006/main" xmlns:r="http://schemas.openxmlformats.org/officeDocument/2006/relationships" xmlns:p="http://schemas.openxmlformats.org/presentationml/2006/main">
-  <p:cSld>
-    <p:spTree>
-      <p:nvGrpSpPr>
-        <p:cNvPr id="1" name=""/>
-        <p:cNvGrpSpPr/>
-        <p:nvPr/>
-      </p:nvGrpSpPr>
-      <p:grpSpPr>
-        <a:xfrm>
-          <a:off x="0" y="0"/>
-          <a:ext cx="0" cy="0"/>
-          <a:chOff x="0" y="0"/>
-          <a:chExt cx="0" cy="0"/>
-        </a:xfrm>
-      </p:grpSpPr>
-      <p:sp>
-        <p:nvSpPr>
-          <p:cNvPr id="2" name="Slide Image Placeholder 1"/>
-          <p:cNvSpPr>
-            <a:spLocks noGrp="1" noRot="1" noChangeAspect="1"/>
-          </p:cNvSpPr>
-          <p:nvPr>
-            <p:ph type="sldImg" idx="2"/>
-          </p:nvPr>
-        </p:nvSpPr>
-        <p:spPr/>
-      </p:sp>
-      <p:sp>
-        <p:nvSpPr>
-          <p:cNvPr id="3" name="Notes Placeholder 2"/>
-          <p:cNvSpPr>
-            <a:spLocks noGrp="1"/>
-          </p:cNvSpPr>
-          <p:nvPr>
-            <p:ph type="body" sz="quarter" idx="3"/>
-          </p:nvPr>
-        </p:nvSpPr>
-        <p:spPr/>
-        <p:txBody>
-          <a:bodyPr/>
-          <a:lstStyle/>
-          <a:p>
-            <a:r>
-              <a:t>Answer the obvious question: if agents work for hours from a plan, is prompting over? No. The plan is the prompt, and a gap in it costs more because the agent builds on the guess for hours before anyone looks. Everything in this lecture is how to write that input well, which is why it still matters.</a:t>
-            </a:r>
-          </a:p>
-        </p:txBody>
-      </p:sp>
-      <p:sp>
-        <p:nvSpPr>
-          <p:cNvPr id="4" name="Slide Number Placeholder 3"/>
-          <p:cNvSpPr>
-            <a:spLocks noGrp="1"/>
-          </p:cNvSpPr>
-          <p:nvPr>
-            <p:ph type="sldNum" sz="quarter" idx="5"/>
-          </p:nvPr>
-        </p:nvSpPr>
-        <p:spPr/>
-      </p:sp>
-    </p:spTree>
-  </p:cSld>
-  <p:clrMapOvr>
-    <a:masterClrMapping/>
-  </p:clrMapOvr>
-</p:notes>
-</file>
-
-<file path=ppt/notesSlides/notesSlide53.xml><?xml version="1.0" encoding="utf-8"?>
-<p:notes xmlns:a="http://schemas.openxmlformats.org/drawingml/2006/main" xmlns:r="http://schemas.openxmlformats.org/officeDocument/2006/relationships" xmlns:p="http://schemas.openxmlformats.org/presentationml/2006/main">
-  <p:cSld>
-    <p:spTree>
-      <p:nvGrpSpPr>
-        <p:cNvPr id="1" name=""/>
-        <p:cNvGrpSpPr/>
-        <p:nvPr/>
-      </p:nvGrpSpPr>
-      <p:grpSpPr>
-        <a:xfrm>
-          <a:off x="0" y="0"/>
-          <a:ext cx="0" cy="0"/>
-          <a:chOff x="0" y="0"/>
-          <a:chExt cx="0" cy="0"/>
-        </a:xfrm>
-      </p:grpSpPr>
-      <p:sp>
-        <p:nvSpPr>
-          <p:cNvPr id="2" name="Slide Image Placeholder 1"/>
-          <p:cNvSpPr>
-            <a:spLocks noGrp="1" noRot="1" noChangeAspect="1"/>
-          </p:cNvSpPr>
-          <p:nvPr>
-            <p:ph type="sldImg" idx="2"/>
-          </p:nvPr>
-        </p:nvSpPr>
-        <p:spPr/>
-      </p:sp>
-      <p:sp>
-        <p:nvSpPr>
-          <p:cNvPr id="3" name="Notes Placeholder 2"/>
-          <p:cNvSpPr>
-            <a:spLocks noGrp="1"/>
-          </p:cNvSpPr>
-          <p:nvPr>
-            <p:ph type="body" sz="quarter" idx="3"/>
-          </p:nvPr>
-        </p:nvSpPr>
-        <p:spPr/>
-        <p:txBody>
-          <a:bodyPr/>
-          <a:lstStyle/>
-          <a:p>
-            <a:r>
-              <a:t>~1:46. Summary and close. Return to the opening pair and ask the room to explain the difference now — they should say "decisions", not "detail", and after part 2 they should be able to say where an unmade decision goes: it is filled from a frequency. Then the sentence to leave on the board: is it wrong because I asked badly, or because it does not know something? Both lectures are answers to that one question. Leave the closing line up through questions.</a:t>
-            </a:r>
-          </a:p>
-        </p:txBody>
-      </p:sp>
-      <p:sp>
-        <p:nvSpPr>
-          <p:cNvPr id="4" name="Slide Number Placeholder 3"/>
-          <p:cNvSpPr>
-            <a:spLocks noGrp="1"/>
-          </p:cNvSpPr>
-          <p:nvPr>
-            <p:ph type="sldNum" sz="quarter" idx="5"/>
-          </p:nvPr>
-        </p:nvSpPr>
-        <p:spPr/>
-      </p:sp>
-    </p:spTree>
-  </p:cSld>
-  <p:clrMapOvr>
-    <a:masterClrMapping/>
-  </p:clrMapOvr>
-</p:notes>
-</file>
-
-<file path=ppt/notesSlides/notesSlide6.xml><?xml version="1.0" encoding="utf-8"?>
-<p:notes xmlns:a="http://schemas.openxmlformats.org/drawingml/2006/main" xmlns:r="http://schemas.openxmlformats.org/officeDocument/2006/relationships" xmlns:p="http://schemas.openxmlformats.org/presentationml/2006/main">
-  <p:cSld>
-    <p:spTree>
-      <p:nvGrpSpPr>
-        <p:cNvPr id="1" name=""/>
-        <p:cNvGrpSpPr/>
-        <p:nvPr/>
-      </p:nvGrpSpPr>
-      <p:grpSpPr>
-        <a:xfrm>
-          <a:off x="0" y="0"/>
-          <a:ext cx="0" cy="0"/>
-          <a:chOff x="0" y="0"/>
-          <a:chExt cx="0" cy="0"/>
-        </a:xfrm>
-      </p:grpSpPr>
-      <p:sp>
-        <p:nvSpPr>
-          <p:cNvPr id="2" name="Slide Image Placeholder 1"/>
-          <p:cNvSpPr>
-            <a:spLocks noGrp="1" noRot="1" noChangeAspect="1"/>
-          </p:cNvSpPr>
-          <p:nvPr>
-            <p:ph type="sldImg" idx="2"/>
-          </p:nvPr>
-        </p:nvSpPr>
-        <p:spPr/>
-      </p:sp>
-      <p:sp>
-        <p:nvSpPr>
-          <p:cNvPr id="3" name="Notes Placeholder 2"/>
-          <p:cNvSpPr>
-            <a:spLocks noGrp="1"/>
-          </p:cNvSpPr>
-          <p:nvPr>
-            <p:ph type="body" sz="quarter" idx="3"/>
-          </p:nvPr>
-        </p:nvSpPr>
-        <p:spPr/>
-        <p:txBody>
-          <a:bodyPr/>
-          <a:lstStyle/>
-          <a:p>
-            <a:r>
-              <a:t>Definition first. A prompt is the whole input: the request and anything pasted with it. The model has nothing else to go on, so every question the prompt leaves open, the model answers by guessing.</a:t>
-            </a:r>
-          </a:p>
-        </p:txBody>
-      </p:sp>
-      <p:sp>
-        <p:nvSpPr>
-          <p:cNvPr id="4" name="Slide Number Placeholder 3"/>
-          <p:cNvSpPr>
-            <a:spLocks noGrp="1"/>
-          </p:cNvSpPr>
-          <p:nvPr>
-            <p:ph type="sldNum" sz="quarter" idx="5"/>
-          </p:nvPr>
-        </p:nvSpPr>
-        <p:spPr/>
-      </p:sp>
-    </p:spTree>
-  </p:cSld>
-  <p:clrMapOvr>
-    <a:masterClrMapping/>
-  </p:clrMapOvr>
-</p:notes>
-</file>
-
-<file path=ppt/notesSlides/notesSlide7.xml><?xml version="1.0" encoding="utf-8"?>
-<p:notes xmlns:a="http://schemas.openxmlformats.org/drawingml/2006/main" xmlns:r="http://schemas.openxmlformats.org/officeDocument/2006/relationships" xmlns:p="http://schemas.openxmlformats.org/presentationml/2006/main">
-  <p:cSld>
-    <p:spTree>
-      <p:nvGrpSpPr>
-        <p:cNvPr id="1" name=""/>
-        <p:cNvGrpSpPr/>
-        <p:nvPr/>
-      </p:nvGrpSpPr>
-      <p:grpSpPr>
-        <a:xfrm>
-          <a:off x="0" y="0"/>
-          <a:ext cx="0" cy="0"/>
-          <a:chOff x="0" y="0"/>
-          <a:chExt cx="0" cy="0"/>
-        </a:xfrm>
-      </p:grpSpPr>
-      <p:sp>
-        <p:nvSpPr>
-          <p:cNvPr id="2" name="Slide Image Placeholder 1"/>
-          <p:cNvSpPr>
-            <a:spLocks noGrp="1" noRot="1" noChangeAspect="1"/>
-          </p:cNvSpPr>
-          <p:nvPr>
-            <p:ph type="sldImg" idx="2"/>
-          </p:nvPr>
-        </p:nvSpPr>
-        <p:spPr/>
-      </p:sp>
-      <p:sp>
-        <p:nvSpPr>
-          <p:cNvPr id="3" name="Notes Placeholder 2"/>
-          <p:cNvSpPr>
-            <a:spLocks noGrp="1"/>
-          </p:cNvSpPr>
-          <p:nvPr>
-            <p:ph type="body" sz="quarter" idx="3"/>
-          </p:nvPr>
-        </p:nvSpPr>
-        <p:spPr/>
-        <p:txBody>
-          <a:bodyPr/>
-          <a:lstStyle/>
-          <a:p>
-            <a:r>
-              <a:t>~0:07. Tokens: the unit the model actually reads, priced, limited and remembered. Keep this SHORT and make it earn its place — this is not a machine-learning lecture. They need tokens only so that context windows and cost make sense later.</a:t>
-            </a:r>
-          </a:p>
-          <a:p>
-            <a:endParaRPr/>
-          </a:p>
-          <a:p>
-            <a:r>
-              <a:t>The misconception: students think the model reads words, so a "short" paste of code feels cheap. Code fragments heavily (identifiers, numbers and punctuation split), so a file costs more than its word count suggests. The splits on the slide are real, from OpenAI's o200k_base tokenizer (the GPT-4o and GPT-5 family): calculate_median arrives as "_m" and "edian", so the model never sees the word median as a unit, and the year arrives as "202" and "6", which is one reason exact arithmetic and counting are awkward for a model without a calculator. Common English words are usually a single token ("Programming" is one), so do not claim that everyday words shatter; identifiers and numbers do. A tokeniser playground demo earns its minute if the clock allows.</a:t>
-            </a:r>
-          </a:p>
-        </p:txBody>
-      </p:sp>
-      <p:sp>
-        <p:nvSpPr>
-          <p:cNvPr id="4" name="Slide Number Placeholder 3"/>
-          <p:cNvSpPr>
-            <a:spLocks noGrp="1"/>
-          </p:cNvSpPr>
-          <p:nvPr>
-            <p:ph type="sldNum" sz="quarter" idx="5"/>
-          </p:nvPr>
-        </p:nvSpPr>
-        <p:spPr/>
-      </p:sp>
-    </p:spTree>
-  </p:cSld>
-  <p:clrMapOvr>
-    <a:masterClrMapping/>
-  </p:clrMapOvr>
-</p:notes>
-</file>
-
-<file path=ppt/notesSlides/notesSlide8.xml><?xml version="1.0" encoding="utf-8"?>
-<p:notes xmlns:a="http://schemas.openxmlformats.org/drawingml/2006/main" xmlns:r="http://schemas.openxmlformats.org/officeDocument/2006/relationships" xmlns:p="http://schemas.openxmlformats.org/presentationml/2006/main">
-  <p:cSld>
-    <p:spTree>
-      <p:nvGrpSpPr>
-        <p:cNvPr id="1" name=""/>
-        <p:cNvGrpSpPr/>
-        <p:nvPr/>
-      </p:nvGrpSpPr>
-      <p:grpSpPr>
-        <a:xfrm>
-          <a:off x="0" y="0"/>
-          <a:ext cx="0" cy="0"/>
-          <a:chOff x="0" y="0"/>
-          <a:chExt cx="0" cy="0"/>
-        </a:xfrm>
-      </p:grpSpPr>
-      <p:sp>
-        <p:nvSpPr>
-          <p:cNvPr id="2" name="Slide Image Placeholder 1"/>
-          <p:cNvSpPr>
-            <a:spLocks noGrp="1" noRot="1" noChangeAspect="1"/>
-          </p:cNvSpPr>
-          <p:nvPr>
-            <p:ph type="sldImg" idx="2"/>
-          </p:nvPr>
-        </p:nvSpPr>
-        <p:spPr/>
-      </p:sp>
-      <p:sp>
-        <p:nvSpPr>
-          <p:cNvPr id="3" name="Notes Placeholder 2"/>
-          <p:cNvSpPr>
-            <a:spLocks noGrp="1"/>
-          </p:cNvSpPr>
-          <p:nvPr>
-            <p:ph type="body" sz="quarter" idx="3"/>
-          </p:nvPr>
-        </p:nvSpPr>
-        <p:spPr/>
-        <p:txBody>
-          <a:bodyPr/>
-          <a:lstStyle/>
-          <a:p>
-            <a:r>
-              <a:t>~0:09. The cost of a paste, measured rather than asserted. The bars are tokens per 100 words for four kinds of text, counted with OpenAI's o200k_base tokenizer on real samples: about 125 for English prose, 158 for JSON, 191 for Python source and 268 for a Python traceback.</a:t>
-            </a:r>
-          </a:p>
-          <a:p>
-            <a:endParaRPr/>
-          </a:p>
-          <a:p>
-            <a:r>
-              <a:t>The misconception: students estimate a paste by how long it looks, in words or lines, so a traceback or a JSON blob feels small. Per character the kinds of text cost about the same (prose about 4.5 characters per token, Python about 4.1); per word, code costs half as much again and a traceback about twice as much, because identifiers, paths and punctuation split into several tokens. OpenAI's rule of thumb (a token is about four characters, about three quarters of an English word) holds for prose and undercounts code, and other languages can cost several times more tokens than English for the same text. It matters because the window has a hard edge and, wherever usage is billed, everything in the window is paid for on every turn. The next slide is the window.</a:t>
-            </a:r>
-          </a:p>
-        </p:txBody>
-      </p:sp>
-      <p:sp>
-        <p:nvSpPr>
-          <p:cNvPr id="4" name="Slide Number Placeholder 3"/>
-          <p:cNvSpPr>
-            <a:spLocks noGrp="1"/>
-          </p:cNvSpPr>
-          <p:nvPr>
-            <p:ph type="sldNum" sz="quarter" idx="5"/>
-          </p:nvPr>
-        </p:nvSpPr>
-        <p:spPr/>
-      </p:sp>
-    </p:spTree>
-  </p:cSld>
-  <p:clrMapOvr>
-    <a:masterClrMapping/>
-  </p:clrMapOvr>
-</p:notes>
-</file>
-
-<file path=ppt/notesSlides/notesSlide9.xml><?xml version="1.0" encoding="utf-8"?>
-<p:notes xmlns:a="http://schemas.openxmlformats.org/drawingml/2006/main" xmlns:r="http://schemas.openxmlformats.org/officeDocument/2006/relationships" xmlns:p="http://schemas.openxmlformats.org/presentationml/2006/main">
-  <p:cSld>
-    <p:spTree>
-      <p:nvGrpSpPr>
-        <p:cNvPr id="1" name=""/>
-        <p:cNvGrpSpPr/>
-        <p:nvPr/>
-      </p:nvGrpSpPr>
-      <p:grpSpPr>
-        <a:xfrm>
-          <a:off x="0" y="0"/>
-          <a:ext cx="0" cy="0"/>
-          <a:chOff x="0" y="0"/>
-          <a:chExt cx="0" cy="0"/>
-        </a:xfrm>
-      </p:grpSpPr>
-      <p:sp>
-        <p:nvSpPr>
-          <p:cNvPr id="2" name="Slide Image Placeholder 1"/>
-          <p:cNvSpPr>
-            <a:spLocks noGrp="1" noRot="1" noChangeAspect="1"/>
-          </p:cNvSpPr>
-          <p:nvPr>
-            <p:ph type="sldImg" idx="2"/>
-          </p:nvPr>
-        </p:nvSpPr>
-        <p:spPr/>
-      </p:sp>
-      <p:sp>
-        <p:nvSpPr>
-          <p:cNvPr id="3" name="Notes Placeholder 2"/>
-          <p:cNvSpPr>
-            <a:spLocks noGrp="1"/>
-          </p:cNvSpPr>
-          <p:nvPr>
-            <p:ph type="body" sz="quarter" idx="3"/>
-          </p:nvPr>
-        </p:nvSpPr>
-        <p:spPr/>
-        <p:txBody>
-          <a:bodyPr/>
-          <a:lstStyle/>
-          <a:p>
-            <a:r>
-              <a:t>~0:11. The context window: everything the model can see when it answers, and nothing else. THIS is the slide that makes context engineering make sense, so spend the time. An assistant, whether chat, editor plug-in or agent, is a PROGRAM that assembles a list of text and calls the model with it; the list is the window. Some layers are written by whoever built the assistant (the system prompt), some by you once (standing instructions, where the assistant reads a file), some accumulate (the conversation, every turn of it), and some are chosen per request (what you pasted, what it went and read). Your repository, your ticket and your intent are not on the list unless one of those layers carried them in.</a:t>
-            </a:r>
-          </a:p>
-          <a:p>
-            <a:endParaRPr/>
-          </a:p>
-          <a:p>
-            <a:r>
-              <a:t>The misconception: students picture the model "looking at" their project, or remembering what they told it earlier. There is no looking; there is a list, with a hard edge. The leading models' windows are large (about a million tokens in September 2026), but large is not unlimited, and part 2 shows why filling the window is not the same as informing the model. There is no partial credit for "I told you earlier" if earlier fell out.</a:t>
-            </a:r>
-          </a:p>
-        </p:txBody>
-      </p:sp>
-      <p:sp>
-        <p:nvSpPr>
-          <p:cNvPr id="4" name="Slide Number Placeholder 3"/>
-          <p:cNvSpPr>
-            <a:spLocks noGrp="1"/>
-          </p:cNvSpPr>
-          <p:nvPr>
-            <p:ph type="sldNum" sz="quarter" idx="5"/>
-          </p:nvPr>
-        </p:nvSpPr>
-        <p:spPr/>
-      </p:sp>
-    </p:spTree>
-  </p:cSld>
-  <p:clrMapOvr>
-    <a:masterClrMapping/>
-  </p:clrMapOvr>
-</p:notes>
-</file>
-
 <file path=ppt/slideLayouts/slideLayout1.xml><?xml version="1.0" encoding="utf-8"?>
 <p:sldLayout xmlns:a="http://schemas.openxmlformats.org/drawingml/2006/main" xmlns:r="http://schemas.openxmlformats.org/officeDocument/2006/relationships" xmlns:p="http://schemas.openxmlformats.org/presentationml/2006/main" showMasterSp="0" type="title" preserve="1">
   <p:cSld name="Title Slide">

--- a/lectures-and-labs/week03/prompting-lecture.pptx
+++ b/lectures-and-labs/week03/prompting-lecture.pptx
@@ -38,8 +38,8 @@
     <p:sldId id="425" r:id="rId29"/>
     <p:sldId id="379" r:id="rId30"/>
     <p:sldId id="426" r:id="rId31"/>
-    <p:sldId id="427" r:id="rId32"/>
-    <p:sldId id="323" r:id="rId33"/>
+    <p:sldId id="440" r:id="rId32"/>
+    <p:sldId id="444" r:id="rId33"/>
     <p:sldId id="428" r:id="rId34"/>
     <p:sldId id="429" r:id="rId35"/>
     <p:sldId id="398" r:id="rId36"/>
@@ -170,7 +170,7 @@
 <file path=ppt/revisionInfo.xml><?xml version="1.0" encoding="utf-8"?>
 <p1510:revInfo xmlns:a="http://schemas.openxmlformats.org/drawingml/2006/main" xmlns:r="http://schemas.openxmlformats.org/officeDocument/2006/relationships" xmlns:p1510="http://schemas.microsoft.com/office/powerpoint/2015/10/main">
   <p1510:revLst>
-    <p1510:client id="{44F6276F-F086-480D-883F-7D83E40C8DDF}" v="1" dt="2026-09-27T20:47:43.600"/>
+    <p1510:client id="{BDC7B6A6-78E9-4AD7-8CA4-08CC690D2DAE}" v="1" dt="2026-10-01T10:36:04.469"/>
   </p1510:revLst>
 </p1510:revInfo>
 </file>
@@ -180,309 +180,10 @@
   <pc:docChgLst>
     <pc:chgData name="Daniel Cregg" userId="a4417ebc-d1f9-4266-8a6c-2c7f21bbea7f" providerId="ADAL" clId="{B41FF6A5-8EE3-453F-9467-07EDEFDD4E20}"/>
     <pc:docChg chg="custSel addSld delSld modSld sldOrd">
-      <pc:chgData name="Daniel Cregg" userId="a4417ebc-d1f9-4266-8a6c-2c7f21bbea7f" providerId="ADAL" clId="{B41FF6A5-8EE3-453F-9467-07EDEFDD4E20}" dt="2026-09-27T22:29:36.128" v="408"/>
+      <pc:chgData name="Daniel Cregg" userId="a4417ebc-d1f9-4266-8a6c-2c7f21bbea7f" providerId="ADAL" clId="{B41FF6A5-8EE3-453F-9467-07EDEFDD4E20}" dt="2026-10-01T12:04:59.192" v="424"/>
       <pc:docMkLst>
         <pc:docMk/>
       </pc:docMkLst>
-      <pc:sldChg chg="del">
-        <pc:chgData name="Daniel Cregg" userId="a4417ebc-d1f9-4266-8a6c-2c7f21bbea7f" providerId="ADAL" clId="{B41FF6A5-8EE3-453F-9467-07EDEFDD4E20}" dt="2026-09-27T21:13:40.978" v="123"/>
-        <pc:sldMkLst>
-          <pc:docMk/>
-          <pc:sldMk cId="0" sldId="256"/>
-        </pc:sldMkLst>
-      </pc:sldChg>
-      <pc:sldChg chg="modSp del mod ord">
-        <pc:chgData name="Daniel Cregg" userId="a4417ebc-d1f9-4266-8a6c-2c7f21bbea7f" providerId="ADAL" clId="{B41FF6A5-8EE3-453F-9467-07EDEFDD4E20}" dt="2026-09-27T22:15:16.415" v="248"/>
-        <pc:sldMkLst>
-          <pc:docMk/>
-          <pc:sldMk cId="0" sldId="257"/>
-        </pc:sldMkLst>
-        <pc:spChg chg="mod">
-          <ac:chgData name="Daniel Cregg" userId="a4417ebc-d1f9-4266-8a6c-2c7f21bbea7f" providerId="ADAL" clId="{B41FF6A5-8EE3-453F-9467-07EDEFDD4E20}" dt="2026-09-27T20:47:43.814" v="19" actId="27636"/>
-          <ac:spMkLst>
-            <pc:docMk/>
-            <pc:sldMk cId="0" sldId="257"/>
-            <ac:spMk id="3" creationId="{00000000-0000-0000-0000-000000000000}"/>
-          </ac:spMkLst>
-        </pc:spChg>
-      </pc:sldChg>
-      <pc:sldChg chg="modSp del mod">
-        <pc:chgData name="Daniel Cregg" userId="a4417ebc-d1f9-4266-8a6c-2c7f21bbea7f" providerId="ADAL" clId="{B41FF6A5-8EE3-453F-9467-07EDEFDD4E20}" dt="2026-09-27T20:50:37.257" v="21"/>
-        <pc:sldMkLst>
-          <pc:docMk/>
-          <pc:sldMk cId="0" sldId="258"/>
-        </pc:sldMkLst>
-        <pc:spChg chg="mod">
-          <ac:chgData name="Daniel Cregg" userId="a4417ebc-d1f9-4266-8a6c-2c7f21bbea7f" providerId="ADAL" clId="{B41FF6A5-8EE3-453F-9467-07EDEFDD4E20}" dt="2026-09-27T20:47:43.609" v="0" actId="27636"/>
-          <ac:spMkLst>
-            <pc:docMk/>
-            <pc:sldMk cId="0" sldId="258"/>
-            <ac:spMk id="3" creationId="{00000000-0000-0000-0000-000000000000}"/>
-          </ac:spMkLst>
-        </pc:spChg>
-      </pc:sldChg>
-      <pc:sldChg chg="del">
-        <pc:chgData name="Daniel Cregg" userId="a4417ebc-d1f9-4266-8a6c-2c7f21bbea7f" providerId="ADAL" clId="{B41FF6A5-8EE3-453F-9467-07EDEFDD4E20}" dt="2026-09-27T21:04:32.541" v="27"/>
-        <pc:sldMkLst>
-          <pc:docMk/>
-          <pc:sldMk cId="0" sldId="259"/>
-        </pc:sldMkLst>
-      </pc:sldChg>
-      <pc:sldChg chg="modSp del mod">
-        <pc:chgData name="Daniel Cregg" userId="a4417ebc-d1f9-4266-8a6c-2c7f21bbea7f" providerId="ADAL" clId="{B41FF6A5-8EE3-453F-9467-07EDEFDD4E20}" dt="2026-09-27T21:04:42.677" v="29"/>
-        <pc:sldMkLst>
-          <pc:docMk/>
-          <pc:sldMk cId="0" sldId="260"/>
-        </pc:sldMkLst>
-        <pc:spChg chg="mod">
-          <ac:chgData name="Daniel Cregg" userId="a4417ebc-d1f9-4266-8a6c-2c7f21bbea7f" providerId="ADAL" clId="{B41FF6A5-8EE3-453F-9467-07EDEFDD4E20}" dt="2026-09-27T20:47:43.644" v="1" actId="27636"/>
-          <ac:spMkLst>
-            <pc:docMk/>
-            <pc:sldMk cId="0" sldId="260"/>
-            <ac:spMk id="3" creationId="{00000000-0000-0000-0000-000000000000}"/>
-          </ac:spMkLst>
-        </pc:spChg>
-        <pc:spChg chg="mod">
-          <ac:chgData name="Daniel Cregg" userId="a4417ebc-d1f9-4266-8a6c-2c7f21bbea7f" providerId="ADAL" clId="{B41FF6A5-8EE3-453F-9467-07EDEFDD4E20}" dt="2026-09-27T20:47:43.644" v="2" actId="27636"/>
-          <ac:spMkLst>
-            <pc:docMk/>
-            <pc:sldMk cId="0" sldId="260"/>
-            <ac:spMk id="5" creationId="{00000000-0000-0000-0000-000000000000}"/>
-          </ac:spMkLst>
-        </pc:spChg>
-      </pc:sldChg>
-      <pc:sldChg chg="del">
-        <pc:chgData name="Daniel Cregg" userId="a4417ebc-d1f9-4266-8a6c-2c7f21bbea7f" providerId="ADAL" clId="{B41FF6A5-8EE3-453F-9467-07EDEFDD4E20}" dt="2026-09-27T20:57:04.281" v="24"/>
-        <pc:sldMkLst>
-          <pc:docMk/>
-          <pc:sldMk cId="0" sldId="261"/>
-        </pc:sldMkLst>
-      </pc:sldChg>
-      <pc:sldChg chg="del">
-        <pc:chgData name="Daniel Cregg" userId="a4417ebc-d1f9-4266-8a6c-2c7f21bbea7f" providerId="ADAL" clId="{B41FF6A5-8EE3-453F-9467-07EDEFDD4E20}" dt="2026-09-27T21:04:49.910" v="32"/>
-        <pc:sldMkLst>
-          <pc:docMk/>
-          <pc:sldMk cId="0" sldId="262"/>
-        </pc:sldMkLst>
-      </pc:sldChg>
-      <pc:sldChg chg="del">
-        <pc:chgData name="Daniel Cregg" userId="a4417ebc-d1f9-4266-8a6c-2c7f21bbea7f" providerId="ADAL" clId="{B41FF6A5-8EE3-453F-9467-07EDEFDD4E20}" dt="2026-09-27T21:05:06.326" v="35"/>
-        <pc:sldMkLst>
-          <pc:docMk/>
-          <pc:sldMk cId="0" sldId="263"/>
-        </pc:sldMkLst>
-      </pc:sldChg>
-      <pc:sldChg chg="modSp del mod">
-        <pc:chgData name="Daniel Cregg" userId="a4417ebc-d1f9-4266-8a6c-2c7f21bbea7f" providerId="ADAL" clId="{B41FF6A5-8EE3-453F-9467-07EDEFDD4E20}" dt="2026-09-27T21:05:12.561" v="37"/>
-        <pc:sldMkLst>
-          <pc:docMk/>
-          <pc:sldMk cId="0" sldId="264"/>
-        </pc:sldMkLst>
-        <pc:spChg chg="mod">
-          <ac:chgData name="Daniel Cregg" userId="a4417ebc-d1f9-4266-8a6c-2c7f21bbea7f" providerId="ADAL" clId="{B41FF6A5-8EE3-453F-9467-07EDEFDD4E20}" dt="2026-09-27T20:47:43.661" v="3" actId="27636"/>
-          <ac:spMkLst>
-            <pc:docMk/>
-            <pc:sldMk cId="0" sldId="264"/>
-            <ac:spMk id="3" creationId="{00000000-0000-0000-0000-000000000000}"/>
-          </ac:spMkLst>
-        </pc:spChg>
-      </pc:sldChg>
-      <pc:sldChg chg="modSp del mod">
-        <pc:chgData name="Daniel Cregg" userId="a4417ebc-d1f9-4266-8a6c-2c7f21bbea7f" providerId="ADAL" clId="{B41FF6A5-8EE3-453F-9467-07EDEFDD4E20}" dt="2026-09-27T21:05:31.574" v="42"/>
-        <pc:sldMkLst>
-          <pc:docMk/>
-          <pc:sldMk cId="0" sldId="265"/>
-        </pc:sldMkLst>
-        <pc:spChg chg="mod">
-          <ac:chgData name="Daniel Cregg" userId="a4417ebc-d1f9-4266-8a6c-2c7f21bbea7f" providerId="ADAL" clId="{B41FF6A5-8EE3-453F-9467-07EDEFDD4E20}" dt="2026-09-27T20:47:43.663" v="4" actId="27636"/>
-          <ac:spMkLst>
-            <pc:docMk/>
-            <pc:sldMk cId="0" sldId="265"/>
-            <ac:spMk id="7" creationId="{00000000-0000-0000-0000-000000000000}"/>
-          </ac:spMkLst>
-        </pc:spChg>
-      </pc:sldChg>
-      <pc:sldChg chg="modSp del mod">
-        <pc:chgData name="Daniel Cregg" userId="a4417ebc-d1f9-4266-8a6c-2c7f21bbea7f" providerId="ADAL" clId="{B41FF6A5-8EE3-453F-9467-07EDEFDD4E20}" dt="2026-09-27T21:44:25.492" v="197"/>
-        <pc:sldMkLst>
-          <pc:docMk/>
-          <pc:sldMk cId="0" sldId="266"/>
-        </pc:sldMkLst>
-        <pc:spChg chg="mod">
-          <ac:chgData name="Daniel Cregg" userId="a4417ebc-d1f9-4266-8a6c-2c7f21bbea7f" providerId="ADAL" clId="{B41FF6A5-8EE3-453F-9467-07EDEFDD4E20}" dt="2026-09-27T20:47:43.674" v="5" actId="27636"/>
-          <ac:spMkLst>
-            <pc:docMk/>
-            <pc:sldMk cId="0" sldId="266"/>
-            <ac:spMk id="3" creationId="{00000000-0000-0000-0000-000000000000}"/>
-          </ac:spMkLst>
-        </pc:spChg>
-      </pc:sldChg>
-      <pc:sldChg chg="modSp del mod">
-        <pc:chgData name="Daniel Cregg" userId="a4417ebc-d1f9-4266-8a6c-2c7f21bbea7f" providerId="ADAL" clId="{B41FF6A5-8EE3-453F-9467-07EDEFDD4E20}" dt="2026-09-27T21:05:37.543" v="44"/>
-        <pc:sldMkLst>
-          <pc:docMk/>
-          <pc:sldMk cId="0" sldId="267"/>
-        </pc:sldMkLst>
-        <pc:spChg chg="mod">
-          <ac:chgData name="Daniel Cregg" userId="a4417ebc-d1f9-4266-8a6c-2c7f21bbea7f" providerId="ADAL" clId="{B41FF6A5-8EE3-453F-9467-07EDEFDD4E20}" dt="2026-09-27T20:47:43.683" v="6" actId="27636"/>
-          <ac:spMkLst>
-            <pc:docMk/>
-            <pc:sldMk cId="0" sldId="267"/>
-            <ac:spMk id="3" creationId="{00000000-0000-0000-0000-000000000000}"/>
-          </ac:spMkLst>
-        </pc:spChg>
-      </pc:sldChg>
-      <pc:sldChg chg="del">
-        <pc:chgData name="Daniel Cregg" userId="a4417ebc-d1f9-4266-8a6c-2c7f21bbea7f" providerId="ADAL" clId="{B41FF6A5-8EE3-453F-9467-07EDEFDD4E20}" dt="2026-09-27T21:05:44.545" v="46"/>
-        <pc:sldMkLst>
-          <pc:docMk/>
-          <pc:sldMk cId="0" sldId="268"/>
-        </pc:sldMkLst>
-      </pc:sldChg>
-      <pc:sldChg chg="del">
-        <pc:chgData name="Daniel Cregg" userId="a4417ebc-d1f9-4266-8a6c-2c7f21bbea7f" providerId="ADAL" clId="{B41FF6A5-8EE3-453F-9467-07EDEFDD4E20}" dt="2026-09-27T21:05:50.087" v="48"/>
-        <pc:sldMkLst>
-          <pc:docMk/>
-          <pc:sldMk cId="0" sldId="269"/>
-        </pc:sldMkLst>
-      </pc:sldChg>
-      <pc:sldChg chg="modSp del mod">
-        <pc:chgData name="Daniel Cregg" userId="a4417ebc-d1f9-4266-8a6c-2c7f21bbea7f" providerId="ADAL" clId="{B41FF6A5-8EE3-453F-9467-07EDEFDD4E20}" dt="2026-09-27T21:05:56.343" v="50"/>
-        <pc:sldMkLst>
-          <pc:docMk/>
-          <pc:sldMk cId="0" sldId="270"/>
-        </pc:sldMkLst>
-        <pc:spChg chg="mod">
-          <ac:chgData name="Daniel Cregg" userId="a4417ebc-d1f9-4266-8a6c-2c7f21bbea7f" providerId="ADAL" clId="{B41FF6A5-8EE3-453F-9467-07EDEFDD4E20}" dt="2026-09-27T20:47:43.697" v="7" actId="27636"/>
-          <ac:spMkLst>
-            <pc:docMk/>
-            <pc:sldMk cId="0" sldId="270"/>
-            <ac:spMk id="3" creationId="{00000000-0000-0000-0000-000000000000}"/>
-          </ac:spMkLst>
-        </pc:spChg>
-      </pc:sldChg>
-      <pc:sldChg chg="del">
-        <pc:chgData name="Daniel Cregg" userId="a4417ebc-d1f9-4266-8a6c-2c7f21bbea7f" providerId="ADAL" clId="{B41FF6A5-8EE3-453F-9467-07EDEFDD4E20}" dt="2026-09-27T21:06:02.195" v="52"/>
-        <pc:sldMkLst>
-          <pc:docMk/>
-          <pc:sldMk cId="0" sldId="271"/>
-        </pc:sldMkLst>
-      </pc:sldChg>
-      <pc:sldChg chg="del">
-        <pc:chgData name="Daniel Cregg" userId="a4417ebc-d1f9-4266-8a6c-2c7f21bbea7f" providerId="ADAL" clId="{B41FF6A5-8EE3-453F-9467-07EDEFDD4E20}" dt="2026-09-27T22:28:44.827" v="352"/>
-        <pc:sldMkLst>
-          <pc:docMk/>
-          <pc:sldMk cId="0" sldId="272"/>
-        </pc:sldMkLst>
-      </pc:sldChg>
-      <pc:sldChg chg="del">
-        <pc:chgData name="Daniel Cregg" userId="a4417ebc-d1f9-4266-8a6c-2c7f21bbea7f" providerId="ADAL" clId="{B41FF6A5-8EE3-453F-9467-07EDEFDD4E20}" dt="2026-09-27T21:07:06.741" v="63"/>
-        <pc:sldMkLst>
-          <pc:docMk/>
-          <pc:sldMk cId="0" sldId="273"/>
-        </pc:sldMkLst>
-      </pc:sldChg>
-      <pc:sldChg chg="modSp del mod">
-        <pc:chgData name="Daniel Cregg" userId="a4417ebc-d1f9-4266-8a6c-2c7f21bbea7f" providerId="ADAL" clId="{B41FF6A5-8EE3-453F-9467-07EDEFDD4E20}" dt="2026-09-27T21:07:15.996" v="65"/>
-        <pc:sldMkLst>
-          <pc:docMk/>
-          <pc:sldMk cId="0" sldId="274"/>
-        </pc:sldMkLst>
-        <pc:spChg chg="mod">
-          <ac:chgData name="Daniel Cregg" userId="a4417ebc-d1f9-4266-8a6c-2c7f21bbea7f" providerId="ADAL" clId="{B41FF6A5-8EE3-453F-9467-07EDEFDD4E20}" dt="2026-09-27T20:47:43.708" v="8" actId="27636"/>
-          <ac:spMkLst>
-            <pc:docMk/>
-            <pc:sldMk cId="0" sldId="274"/>
-            <ac:spMk id="5" creationId="{00000000-0000-0000-0000-000000000000}"/>
-          </ac:spMkLst>
-        </pc:spChg>
-      </pc:sldChg>
-      <pc:sldChg chg="del">
-        <pc:chgData name="Daniel Cregg" userId="a4417ebc-d1f9-4266-8a6c-2c7f21bbea7f" providerId="ADAL" clId="{B41FF6A5-8EE3-453F-9467-07EDEFDD4E20}" dt="2026-09-27T22:24:25.081" v="288"/>
-        <pc:sldMkLst>
-          <pc:docMk/>
-          <pc:sldMk cId="0" sldId="275"/>
-        </pc:sldMkLst>
-      </pc:sldChg>
-      <pc:sldChg chg="del">
-        <pc:chgData name="Daniel Cregg" userId="a4417ebc-d1f9-4266-8a6c-2c7f21bbea7f" providerId="ADAL" clId="{B41FF6A5-8EE3-453F-9467-07EDEFDD4E20}" dt="2026-09-27T22:15:19.859" v="254"/>
-        <pc:sldMkLst>
-          <pc:docMk/>
-          <pc:sldMk cId="0" sldId="276"/>
-        </pc:sldMkLst>
-      </pc:sldChg>
-      <pc:sldChg chg="modSp del mod">
-        <pc:chgData name="Daniel Cregg" userId="a4417ebc-d1f9-4266-8a6c-2c7f21bbea7f" providerId="ADAL" clId="{B41FF6A5-8EE3-453F-9467-07EDEFDD4E20}" dt="2026-09-27T22:26:08.059" v="315"/>
-        <pc:sldMkLst>
-          <pc:docMk/>
-          <pc:sldMk cId="0" sldId="277"/>
-        </pc:sldMkLst>
-        <pc:spChg chg="mod">
-          <ac:chgData name="Daniel Cregg" userId="a4417ebc-d1f9-4266-8a6c-2c7f21bbea7f" providerId="ADAL" clId="{B41FF6A5-8EE3-453F-9467-07EDEFDD4E20}" dt="2026-09-27T20:47:43.708" v="9" actId="27636"/>
-          <ac:spMkLst>
-            <pc:docMk/>
-            <pc:sldMk cId="0" sldId="277"/>
-            <ac:spMk id="3" creationId="{00000000-0000-0000-0000-000000000000}"/>
-          </ac:spMkLst>
-        </pc:spChg>
-      </pc:sldChg>
-      <pc:sldChg chg="del">
-        <pc:chgData name="Daniel Cregg" userId="a4417ebc-d1f9-4266-8a6c-2c7f21bbea7f" providerId="ADAL" clId="{B41FF6A5-8EE3-453F-9467-07EDEFDD4E20}" dt="2026-09-27T21:07:23.243" v="69"/>
-        <pc:sldMkLst>
-          <pc:docMk/>
-          <pc:sldMk cId="0" sldId="278"/>
-        </pc:sldMkLst>
-      </pc:sldChg>
-      <pc:sldChg chg="del">
-        <pc:chgData name="Daniel Cregg" userId="a4417ebc-d1f9-4266-8a6c-2c7f21bbea7f" providerId="ADAL" clId="{B41FF6A5-8EE3-453F-9467-07EDEFDD4E20}" dt="2026-09-27T21:07:31.427" v="71"/>
-        <pc:sldMkLst>
-          <pc:docMk/>
-          <pc:sldMk cId="0" sldId="279"/>
-        </pc:sldMkLst>
-      </pc:sldChg>
-      <pc:sldChg chg="del">
-        <pc:chgData name="Daniel Cregg" userId="a4417ebc-d1f9-4266-8a6c-2c7f21bbea7f" providerId="ADAL" clId="{B41FF6A5-8EE3-453F-9467-07EDEFDD4E20}" dt="2026-09-27T21:13:42.978" v="129"/>
-        <pc:sldMkLst>
-          <pc:docMk/>
-          <pc:sldMk cId="0" sldId="280"/>
-        </pc:sldMkLst>
-      </pc:sldChg>
-      <pc:sldChg chg="modSp del mod">
-        <pc:chgData name="Daniel Cregg" userId="a4417ebc-d1f9-4266-8a6c-2c7f21bbea7f" providerId="ADAL" clId="{B41FF6A5-8EE3-453F-9467-07EDEFDD4E20}" dt="2026-09-27T21:07:40.277" v="73"/>
-        <pc:sldMkLst>
-          <pc:docMk/>
-          <pc:sldMk cId="0" sldId="281"/>
-        </pc:sldMkLst>
-        <pc:spChg chg="mod">
-          <ac:chgData name="Daniel Cregg" userId="a4417ebc-d1f9-4266-8a6c-2c7f21bbea7f" providerId="ADAL" clId="{B41FF6A5-8EE3-453F-9467-07EDEFDD4E20}" dt="2026-09-27T20:47:43.728" v="10" actId="27636"/>
-          <ac:spMkLst>
-            <pc:docMk/>
-            <pc:sldMk cId="0" sldId="281"/>
-            <ac:spMk id="3" creationId="{00000000-0000-0000-0000-000000000000}"/>
-          </ac:spMkLst>
-        </pc:spChg>
-      </pc:sldChg>
-      <pc:sldChg chg="del">
-        <pc:chgData name="Daniel Cregg" userId="a4417ebc-d1f9-4266-8a6c-2c7f21bbea7f" providerId="ADAL" clId="{B41FF6A5-8EE3-453F-9467-07EDEFDD4E20}" dt="2026-09-27T21:07:47.511" v="75"/>
-        <pc:sldMkLst>
-          <pc:docMk/>
-          <pc:sldMk cId="0" sldId="282"/>
-        </pc:sldMkLst>
-      </pc:sldChg>
-      <pc:sldChg chg="del">
-        <pc:chgData name="Daniel Cregg" userId="a4417ebc-d1f9-4266-8a6c-2c7f21bbea7f" providerId="ADAL" clId="{B41FF6A5-8EE3-453F-9467-07EDEFDD4E20}" dt="2026-09-27T22:28:59.438" v="379"/>
-        <pc:sldMkLst>
-          <pc:docMk/>
-          <pc:sldMk cId="0" sldId="283"/>
-        </pc:sldMkLst>
-      </pc:sldChg>
-      <pc:sldChg chg="del">
-        <pc:chgData name="Daniel Cregg" userId="a4417ebc-d1f9-4266-8a6c-2c7f21bbea7f" providerId="ADAL" clId="{B41FF6A5-8EE3-453F-9467-07EDEFDD4E20}" dt="2026-09-27T21:08:20.227" v="77"/>
-        <pc:sldMkLst>
-          <pc:docMk/>
-          <pc:sldMk cId="0" sldId="284"/>
-        </pc:sldMkLst>
-      </pc:sldChg>
       <pc:sldChg chg="modSp mod">
         <pc:chgData name="Daniel Cregg" userId="a4417ebc-d1f9-4266-8a6c-2c7f21bbea7f" providerId="ADAL" clId="{B41FF6A5-8EE3-453F-9467-07EDEFDD4E20}" dt="2026-09-27T20:47:43.738" v="11" actId="27636"/>
         <pc:sldMkLst>
@@ -495,153 +196,6 @@
             <pc:docMk/>
             <pc:sldMk cId="0" sldId="285"/>
             <ac:spMk id="3" creationId="{00000000-0000-0000-0000-000000000000}"/>
-          </ac:spMkLst>
-        </pc:spChg>
-      </pc:sldChg>
-      <pc:sldChg chg="del">
-        <pc:chgData name="Daniel Cregg" userId="a4417ebc-d1f9-4266-8a6c-2c7f21bbea7f" providerId="ADAL" clId="{B41FF6A5-8EE3-453F-9467-07EDEFDD4E20}" dt="2026-09-27T22:29:00.028" v="383"/>
-        <pc:sldMkLst>
-          <pc:docMk/>
-          <pc:sldMk cId="0" sldId="286"/>
-        </pc:sldMkLst>
-      </pc:sldChg>
-      <pc:sldChg chg="modSp del mod">
-        <pc:chgData name="Daniel Cregg" userId="a4417ebc-d1f9-4266-8a6c-2c7f21bbea7f" providerId="ADAL" clId="{B41FF6A5-8EE3-453F-9467-07EDEFDD4E20}" dt="2026-09-27T21:08:28.047" v="79"/>
-        <pc:sldMkLst>
-          <pc:docMk/>
-          <pc:sldMk cId="0" sldId="287"/>
-        </pc:sldMkLst>
-        <pc:spChg chg="mod">
-          <ac:chgData name="Daniel Cregg" userId="a4417ebc-d1f9-4266-8a6c-2c7f21bbea7f" providerId="ADAL" clId="{B41FF6A5-8EE3-453F-9467-07EDEFDD4E20}" dt="2026-09-27T20:47:43.741" v="12" actId="27636"/>
-          <ac:spMkLst>
-            <pc:docMk/>
-            <pc:sldMk cId="0" sldId="287"/>
-            <ac:spMk id="6" creationId="{00000000-0000-0000-0000-000000000000}"/>
-          </ac:spMkLst>
-        </pc:spChg>
-      </pc:sldChg>
-      <pc:sldChg chg="modSp del mod">
-        <pc:chgData name="Daniel Cregg" userId="a4417ebc-d1f9-4266-8a6c-2c7f21bbea7f" providerId="ADAL" clId="{B41FF6A5-8EE3-453F-9467-07EDEFDD4E20}" dt="2026-09-27T21:08:36.026" v="82"/>
-        <pc:sldMkLst>
-          <pc:docMk/>
-          <pc:sldMk cId="0" sldId="288"/>
-        </pc:sldMkLst>
-        <pc:spChg chg="mod">
-          <ac:chgData name="Daniel Cregg" userId="a4417ebc-d1f9-4266-8a6c-2c7f21bbea7f" providerId="ADAL" clId="{B41FF6A5-8EE3-453F-9467-07EDEFDD4E20}" dt="2026-09-27T20:47:43.753" v="13" actId="27636"/>
-          <ac:spMkLst>
-            <pc:docMk/>
-            <pc:sldMk cId="0" sldId="288"/>
-            <ac:spMk id="3" creationId="{00000000-0000-0000-0000-000000000000}"/>
-          </ac:spMkLst>
-        </pc:spChg>
-      </pc:sldChg>
-      <pc:sldChg chg="del">
-        <pc:chgData name="Daniel Cregg" userId="a4417ebc-d1f9-4266-8a6c-2c7f21bbea7f" providerId="ADAL" clId="{B41FF6A5-8EE3-453F-9467-07EDEFDD4E20}" dt="2026-09-27T21:08:40.743" v="84"/>
-        <pc:sldMkLst>
-          <pc:docMk/>
-          <pc:sldMk cId="0" sldId="289"/>
-        </pc:sldMkLst>
-      </pc:sldChg>
-      <pc:sldChg chg="modSp del mod">
-        <pc:chgData name="Daniel Cregg" userId="a4417ebc-d1f9-4266-8a6c-2c7f21bbea7f" providerId="ADAL" clId="{B41FF6A5-8EE3-453F-9467-07EDEFDD4E20}" dt="2026-09-27T21:08:45.766" v="86"/>
-        <pc:sldMkLst>
-          <pc:docMk/>
-          <pc:sldMk cId="0" sldId="290"/>
-        </pc:sldMkLst>
-        <pc:spChg chg="mod">
-          <ac:chgData name="Daniel Cregg" userId="a4417ebc-d1f9-4266-8a6c-2c7f21bbea7f" providerId="ADAL" clId="{B41FF6A5-8EE3-453F-9467-07EDEFDD4E20}" dt="2026-09-27T20:47:43.759" v="14" actId="27636"/>
-          <ac:spMkLst>
-            <pc:docMk/>
-            <pc:sldMk cId="0" sldId="290"/>
-            <ac:spMk id="3" creationId="{00000000-0000-0000-0000-000000000000}"/>
-          </ac:spMkLst>
-        </pc:spChg>
-      </pc:sldChg>
-      <pc:sldChg chg="del">
-        <pc:chgData name="Daniel Cregg" userId="a4417ebc-d1f9-4266-8a6c-2c7f21bbea7f" providerId="ADAL" clId="{B41FF6A5-8EE3-453F-9467-07EDEFDD4E20}" dt="2026-09-27T21:08:50.826" v="88"/>
-        <pc:sldMkLst>
-          <pc:docMk/>
-          <pc:sldMk cId="0" sldId="291"/>
-        </pc:sldMkLst>
-      </pc:sldChg>
-      <pc:sldChg chg="del">
-        <pc:chgData name="Daniel Cregg" userId="a4417ebc-d1f9-4266-8a6c-2c7f21bbea7f" providerId="ADAL" clId="{B41FF6A5-8EE3-453F-9467-07EDEFDD4E20}" dt="2026-09-27T21:09:05.857" v="91"/>
-        <pc:sldMkLst>
-          <pc:docMk/>
-          <pc:sldMk cId="0" sldId="292"/>
-        </pc:sldMkLst>
-      </pc:sldChg>
-      <pc:sldChg chg="del">
-        <pc:chgData name="Daniel Cregg" userId="a4417ebc-d1f9-4266-8a6c-2c7f21bbea7f" providerId="ADAL" clId="{B41FF6A5-8EE3-453F-9467-07EDEFDD4E20}" dt="2026-09-27T21:09:13.349" v="93"/>
-        <pc:sldMkLst>
-          <pc:docMk/>
-          <pc:sldMk cId="0" sldId="294"/>
-        </pc:sldMkLst>
-      </pc:sldChg>
-      <pc:sldChg chg="del">
-        <pc:chgData name="Daniel Cregg" userId="a4417ebc-d1f9-4266-8a6c-2c7f21bbea7f" providerId="ADAL" clId="{B41FF6A5-8EE3-453F-9467-07EDEFDD4E20}" dt="2026-09-27T21:09:20.695" v="96"/>
-        <pc:sldMkLst>
-          <pc:docMk/>
-          <pc:sldMk cId="0" sldId="295"/>
-        </pc:sldMkLst>
-      </pc:sldChg>
-      <pc:sldChg chg="modSp del mod">
-        <pc:chgData name="Daniel Cregg" userId="a4417ebc-d1f9-4266-8a6c-2c7f21bbea7f" providerId="ADAL" clId="{B41FF6A5-8EE3-453F-9467-07EDEFDD4E20}" dt="2026-09-27T21:09:27.394" v="98"/>
-        <pc:sldMkLst>
-          <pc:docMk/>
-          <pc:sldMk cId="0" sldId="296"/>
-        </pc:sldMkLst>
-        <pc:spChg chg="mod">
-          <ac:chgData name="Daniel Cregg" userId="a4417ebc-d1f9-4266-8a6c-2c7f21bbea7f" providerId="ADAL" clId="{B41FF6A5-8EE3-453F-9467-07EDEFDD4E20}" dt="2026-09-27T20:47:43.774" v="15" actId="27636"/>
-          <ac:spMkLst>
-            <pc:docMk/>
-            <pc:sldMk cId="0" sldId="296"/>
-            <ac:spMk id="5" creationId="{00000000-0000-0000-0000-000000000000}"/>
-          </ac:spMkLst>
-        </pc:spChg>
-      </pc:sldChg>
-      <pc:sldChg chg="del">
-        <pc:chgData name="Daniel Cregg" userId="a4417ebc-d1f9-4266-8a6c-2c7f21bbea7f" providerId="ADAL" clId="{B41FF6A5-8EE3-453F-9467-07EDEFDD4E20}" dt="2026-09-27T21:09:35.306" v="100"/>
-        <pc:sldMkLst>
-          <pc:docMk/>
-          <pc:sldMk cId="0" sldId="297"/>
-        </pc:sldMkLst>
-      </pc:sldChg>
-      <pc:sldChg chg="del">
-        <pc:chgData name="Daniel Cregg" userId="a4417ebc-d1f9-4266-8a6c-2c7f21bbea7f" providerId="ADAL" clId="{B41FF6A5-8EE3-453F-9467-07EDEFDD4E20}" dt="2026-09-27T21:09:42.608" v="102"/>
-        <pc:sldMkLst>
-          <pc:docMk/>
-          <pc:sldMk cId="0" sldId="298"/>
-        </pc:sldMkLst>
-      </pc:sldChg>
-      <pc:sldChg chg="modSp del mod">
-        <pc:chgData name="Daniel Cregg" userId="a4417ebc-d1f9-4266-8a6c-2c7f21bbea7f" providerId="ADAL" clId="{B41FF6A5-8EE3-453F-9467-07EDEFDD4E20}" dt="2026-09-27T21:09:50.958" v="104"/>
-        <pc:sldMkLst>
-          <pc:docMk/>
-          <pc:sldMk cId="0" sldId="299"/>
-        </pc:sldMkLst>
-        <pc:spChg chg="mod">
-          <ac:chgData name="Daniel Cregg" userId="a4417ebc-d1f9-4266-8a6c-2c7f21bbea7f" providerId="ADAL" clId="{B41FF6A5-8EE3-453F-9467-07EDEFDD4E20}" dt="2026-09-27T20:47:43.807" v="18" actId="27636"/>
-          <ac:spMkLst>
-            <pc:docMk/>
-            <pc:sldMk cId="0" sldId="299"/>
-            <ac:spMk id="4" creationId="{00000000-0000-0000-0000-000000000000}"/>
-          </ac:spMkLst>
-        </pc:spChg>
-        <pc:spChg chg="mod">
-          <ac:chgData name="Daniel Cregg" userId="a4417ebc-d1f9-4266-8a6c-2c7f21bbea7f" providerId="ADAL" clId="{B41FF6A5-8EE3-453F-9467-07EDEFDD4E20}" dt="2026-09-27T20:47:43.804" v="17" actId="27636"/>
-          <ac:spMkLst>
-            <pc:docMk/>
-            <pc:sldMk cId="0" sldId="299"/>
-            <ac:spMk id="6" creationId="{00000000-0000-0000-0000-000000000000}"/>
-          </ac:spMkLst>
-        </pc:spChg>
-        <pc:spChg chg="mod">
-          <ac:chgData name="Daniel Cregg" userId="a4417ebc-d1f9-4266-8a6c-2c7f21bbea7f" providerId="ADAL" clId="{B41FF6A5-8EE3-453F-9467-07EDEFDD4E20}" dt="2026-09-27T20:47:43.791" v="16" actId="27636"/>
-          <ac:spMkLst>
-            <pc:docMk/>
-            <pc:sldMk cId="0" sldId="299"/>
-            <ac:spMk id="7" creationId="{00000000-0000-0000-0000-000000000000}"/>
           </ac:spMkLst>
         </pc:spChg>
       </pc:sldChg>
@@ -660,127 +214,11 @@
           </ac:spMkLst>
         </pc:spChg>
       </pc:sldChg>
-      <pc:sldChg chg="modSp add del mod">
-        <pc:chgData name="Daniel Cregg" userId="a4417ebc-d1f9-4266-8a6c-2c7f21bbea7f" providerId="ADAL" clId="{B41FF6A5-8EE3-453F-9467-07EDEFDD4E20}" dt="2026-09-27T21:34:07.570" v="178"/>
-        <pc:sldMkLst>
-          <pc:docMk/>
-          <pc:sldMk cId="3606774265" sldId="301"/>
-        </pc:sldMkLst>
-        <pc:spChg chg="mod">
-          <ac:chgData name="Daniel Cregg" userId="a4417ebc-d1f9-4266-8a6c-2c7f21bbea7f" providerId="ADAL" clId="{B41FF6A5-8EE3-453F-9467-07EDEFDD4E20}" dt="2026-09-27T20:57:04.326" v="25" actId="27636"/>
-          <ac:spMkLst>
-            <pc:docMk/>
-            <pc:sldMk cId="3606774265" sldId="301"/>
-            <ac:spMk id="3" creationId="{00000000-0000-0000-0000-000000000000}"/>
-          </ac:spMkLst>
-        </pc:spChg>
-      </pc:sldChg>
-      <pc:sldChg chg="add del">
-        <pc:chgData name="Daniel Cregg" userId="a4417ebc-d1f9-4266-8a6c-2c7f21bbea7f" providerId="ADAL" clId="{B41FF6A5-8EE3-453F-9467-07EDEFDD4E20}" dt="2026-09-27T21:13:41.876" v="125"/>
-        <pc:sldMkLst>
-          <pc:docMk/>
-          <pc:sldMk cId="395067283" sldId="302"/>
-        </pc:sldMkLst>
-      </pc:sldChg>
-      <pc:sldChg chg="modSp add del mod">
-        <pc:chgData name="Daniel Cregg" userId="a4417ebc-d1f9-4266-8a6c-2c7f21bbea7f" providerId="ADAL" clId="{B41FF6A5-8EE3-453F-9467-07EDEFDD4E20}" dt="2026-09-27T22:28:43.035" v="333"/>
-        <pc:sldMkLst>
-          <pc:docMk/>
-          <pc:sldMk cId="3411667612" sldId="303"/>
-        </pc:sldMkLst>
-        <pc:spChg chg="mod">
-          <ac:chgData name="Daniel Cregg" userId="a4417ebc-d1f9-4266-8a6c-2c7f21bbea7f" providerId="ADAL" clId="{B41FF6A5-8EE3-453F-9467-07EDEFDD4E20}" dt="2026-09-27T21:04:42.693" v="30" actId="27636"/>
-          <ac:spMkLst>
-            <pc:docMk/>
-            <pc:sldMk cId="3411667612" sldId="303"/>
-            <ac:spMk id="5" creationId="{00000000-0000-0000-0000-000000000000}"/>
-          </ac:spMkLst>
-        </pc:spChg>
-      </pc:sldChg>
-      <pc:sldChg chg="modSp add del mod">
-        <pc:chgData name="Daniel Cregg" userId="a4417ebc-d1f9-4266-8a6c-2c7f21bbea7f" providerId="ADAL" clId="{B41FF6A5-8EE3-453F-9467-07EDEFDD4E20}" dt="2026-09-27T21:37:34.975" v="186"/>
-        <pc:sldMkLst>
-          <pc:docMk/>
-          <pc:sldMk cId="3602241186" sldId="304"/>
-        </pc:sldMkLst>
-        <pc:spChg chg="mod">
-          <ac:chgData name="Daniel Cregg" userId="a4417ebc-d1f9-4266-8a6c-2c7f21bbea7f" providerId="ADAL" clId="{B41FF6A5-8EE3-453F-9467-07EDEFDD4E20}" dt="2026-09-27T21:04:49.927" v="33" actId="27636"/>
-          <ac:spMkLst>
-            <pc:docMk/>
-            <pc:sldMk cId="3602241186" sldId="304"/>
-            <ac:spMk id="3" creationId="{00000000-0000-0000-0000-000000000000}"/>
-          </ac:spMkLst>
-        </pc:spChg>
-      </pc:sldChg>
       <pc:sldChg chg="add">
         <pc:chgData name="Daniel Cregg" userId="a4417ebc-d1f9-4266-8a6c-2c7f21bbea7f" providerId="ADAL" clId="{B41FF6A5-8EE3-453F-9467-07EDEFDD4E20}" dt="2026-09-27T21:05:06.310" v="34"/>
         <pc:sldMkLst>
           <pc:docMk/>
           <pc:sldMk cId="1175187479" sldId="305"/>
-        </pc:sldMkLst>
-      </pc:sldChg>
-      <pc:sldChg chg="modSp add del mod">
-        <pc:chgData name="Daniel Cregg" userId="a4417ebc-d1f9-4266-8a6c-2c7f21bbea7f" providerId="ADAL" clId="{B41FF6A5-8EE3-453F-9467-07EDEFDD4E20}" dt="2026-09-27T21:05:20.094" v="40"/>
-        <pc:sldMkLst>
-          <pc:docMk/>
-          <pc:sldMk cId="4185401303" sldId="306"/>
-        </pc:sldMkLst>
-        <pc:spChg chg="mod">
-          <ac:chgData name="Daniel Cregg" userId="a4417ebc-d1f9-4266-8a6c-2c7f21bbea7f" providerId="ADAL" clId="{B41FF6A5-8EE3-453F-9467-07EDEFDD4E20}" dt="2026-09-27T21:05:12.655" v="38" actId="27636"/>
-          <ac:spMkLst>
-            <pc:docMk/>
-            <pc:sldMk cId="4185401303" sldId="306"/>
-            <ac:spMk id="6" creationId="{00000000-0000-0000-0000-000000000000}"/>
-          </ac:spMkLst>
-        </pc:spChg>
-      </pc:sldChg>
-      <pc:sldChg chg="add del">
-        <pc:chgData name="Daniel Cregg" userId="a4417ebc-d1f9-4266-8a6c-2c7f21bbea7f" providerId="ADAL" clId="{B41FF6A5-8EE3-453F-9467-07EDEFDD4E20}" dt="2026-09-27T21:10:28.148" v="108"/>
-        <pc:sldMkLst>
-          <pc:docMk/>
-          <pc:sldMk cId="95182174" sldId="307"/>
-        </pc:sldMkLst>
-      </pc:sldChg>
-      <pc:sldChg chg="add del">
-        <pc:chgData name="Daniel Cregg" userId="a4417ebc-d1f9-4266-8a6c-2c7f21bbea7f" providerId="ADAL" clId="{B41FF6A5-8EE3-453F-9467-07EDEFDD4E20}" dt="2026-09-27T21:06:32.243" v="58"/>
-        <pc:sldMkLst>
-          <pc:docMk/>
-          <pc:sldMk cId="1751326192" sldId="308"/>
-        </pc:sldMkLst>
-      </pc:sldChg>
-      <pc:sldChg chg="add del">
-        <pc:chgData name="Daniel Cregg" userId="a4417ebc-d1f9-4266-8a6c-2c7f21bbea7f" providerId="ADAL" clId="{B41FF6A5-8EE3-453F-9467-07EDEFDD4E20}" dt="2026-09-27T21:47:25.329" v="209"/>
-        <pc:sldMkLst>
-          <pc:docMk/>
-          <pc:sldMk cId="1548386846" sldId="309"/>
-        </pc:sldMkLst>
-      </pc:sldChg>
-      <pc:sldChg chg="add del">
-        <pc:chgData name="Daniel Cregg" userId="a4417ebc-d1f9-4266-8a6c-2c7f21bbea7f" providerId="ADAL" clId="{B41FF6A5-8EE3-453F-9467-07EDEFDD4E20}" dt="2026-09-27T21:06:16.567" v="54"/>
-        <pc:sldMkLst>
-          <pc:docMk/>
-          <pc:sldMk cId="2045721925" sldId="310"/>
-        </pc:sldMkLst>
-      </pc:sldChg>
-      <pc:sldChg chg="add del">
-        <pc:chgData name="Daniel Cregg" userId="a4417ebc-d1f9-4266-8a6c-2c7f21bbea7f" providerId="ADAL" clId="{B41FF6A5-8EE3-453F-9467-07EDEFDD4E20}" dt="2026-09-27T21:54:12.195" v="211"/>
-        <pc:sldMkLst>
-          <pc:docMk/>
-          <pc:sldMk cId="2352324547" sldId="311"/>
-        </pc:sldMkLst>
-      </pc:sldChg>
-      <pc:sldChg chg="add del">
-        <pc:chgData name="Daniel Cregg" userId="a4417ebc-d1f9-4266-8a6c-2c7f21bbea7f" providerId="ADAL" clId="{B41FF6A5-8EE3-453F-9467-07EDEFDD4E20}" dt="2026-09-27T21:06:20.916" v="56"/>
-        <pc:sldMkLst>
-          <pc:docMk/>
-          <pc:sldMk cId="2895272474" sldId="312"/>
-        </pc:sldMkLst>
-      </pc:sldChg>
-      <pc:sldChg chg="add del">
-        <pc:chgData name="Daniel Cregg" userId="a4417ebc-d1f9-4266-8a6c-2c7f21bbea7f" providerId="ADAL" clId="{B41FF6A5-8EE3-453F-9467-07EDEFDD4E20}" dt="2026-09-27T21:06:36.226" v="60"/>
-        <pc:sldMkLst>
-          <pc:docMk/>
-          <pc:sldMk cId="132672439" sldId="313"/>
         </pc:sldMkLst>
       </pc:sldChg>
       <pc:sldChg chg="add">
@@ -790,43 +228,6 @@
           <pc:sldMk cId="2915418998" sldId="314"/>
         </pc:sldMkLst>
       </pc:sldChg>
-      <pc:sldChg chg="modSp add del mod">
-        <pc:chgData name="Daniel Cregg" userId="a4417ebc-d1f9-4266-8a6c-2c7f21bbea7f" providerId="ADAL" clId="{B41FF6A5-8EE3-453F-9467-07EDEFDD4E20}" dt="2026-09-27T22:28:44.244" v="348"/>
-        <pc:sldMkLst>
-          <pc:docMk/>
-          <pc:sldMk cId="3075178613" sldId="315"/>
-        </pc:sldMkLst>
-        <pc:spChg chg="mod">
-          <ac:chgData name="Daniel Cregg" userId="a4417ebc-d1f9-4266-8a6c-2c7f21bbea7f" providerId="ADAL" clId="{B41FF6A5-8EE3-453F-9467-07EDEFDD4E20}" dt="2026-09-27T21:10:28.799" v="109"/>
-          <ac:spMkLst>
-            <pc:docMk/>
-            <pc:sldMk cId="3075178613" sldId="315"/>
-            <ac:spMk id="4" creationId="{00000000-0000-0000-0000-000000000000}"/>
-          </ac:spMkLst>
-        </pc:spChg>
-      </pc:sldChg>
-      <pc:sldChg chg="add del">
-        <pc:chgData name="Daniel Cregg" userId="a4417ebc-d1f9-4266-8a6c-2c7f21bbea7f" providerId="ADAL" clId="{B41FF6A5-8EE3-453F-9467-07EDEFDD4E20}" dt="2026-09-27T22:28:43.545" v="338"/>
-        <pc:sldMkLst>
-          <pc:docMk/>
-          <pc:sldMk cId="3839539645" sldId="316"/>
-        </pc:sldMkLst>
-      </pc:sldChg>
-      <pc:sldChg chg="modSp add del mod">
-        <pc:chgData name="Daniel Cregg" userId="a4417ebc-d1f9-4266-8a6c-2c7f21bbea7f" providerId="ADAL" clId="{B41FF6A5-8EE3-453F-9467-07EDEFDD4E20}" dt="2026-09-27T21:56:33.041" v="231"/>
-        <pc:sldMkLst>
-          <pc:docMk/>
-          <pc:sldMk cId="1552237765" sldId="317"/>
-        </pc:sldMkLst>
-        <pc:spChg chg="mod">
-          <ac:chgData name="Daniel Cregg" userId="a4417ebc-d1f9-4266-8a6c-2c7f21bbea7f" providerId="ADAL" clId="{B41FF6A5-8EE3-453F-9467-07EDEFDD4E20}" dt="2026-09-27T21:06:36.263" v="61" actId="27636"/>
-          <ac:spMkLst>
-            <pc:docMk/>
-            <pc:sldMk cId="1552237765" sldId="317"/>
-            <ac:spMk id="3" creationId="{00000000-0000-0000-0000-000000000000}"/>
-          </ac:spMkLst>
-        </pc:spChg>
-      </pc:sldChg>
       <pc:sldChg chg="add">
         <pc:chgData name="Daniel Cregg" userId="a4417ebc-d1f9-4266-8a6c-2c7f21bbea7f" providerId="ADAL" clId="{B41FF6A5-8EE3-453F-9467-07EDEFDD4E20}" dt="2026-09-27T21:07:06.728" v="62"/>
         <pc:sldMkLst>
@@ -834,62 +235,11 @@
           <pc:sldMk cId="2276283136" sldId="318"/>
         </pc:sldMkLst>
       </pc:sldChg>
-      <pc:sldChg chg="modSp add del mod">
-        <pc:chgData name="Daniel Cregg" userId="a4417ebc-d1f9-4266-8a6c-2c7f21bbea7f" providerId="ADAL" clId="{B41FF6A5-8EE3-453F-9467-07EDEFDD4E20}" dt="2026-09-27T22:01:53.442" v="240"/>
-        <pc:sldMkLst>
-          <pc:docMk/>
-          <pc:sldMk cId="477700888" sldId="319"/>
-        </pc:sldMkLst>
-        <pc:spChg chg="mod">
-          <ac:chgData name="Daniel Cregg" userId="a4417ebc-d1f9-4266-8a6c-2c7f21bbea7f" providerId="ADAL" clId="{B41FF6A5-8EE3-453F-9467-07EDEFDD4E20}" dt="2026-09-27T21:07:16.013" v="66" actId="27636"/>
-          <ac:spMkLst>
-            <pc:docMk/>
-            <pc:sldMk cId="477700888" sldId="319"/>
-            <ac:spMk id="3" creationId="{00000000-0000-0000-0000-000000000000}"/>
-          </ac:spMkLst>
-        </pc:spChg>
-        <pc:spChg chg="mod">
-          <ac:chgData name="Daniel Cregg" userId="a4417ebc-d1f9-4266-8a6c-2c7f21bbea7f" providerId="ADAL" clId="{B41FF6A5-8EE3-453F-9467-07EDEFDD4E20}" dt="2026-09-27T21:07:16.013" v="67" actId="27636"/>
-          <ac:spMkLst>
-            <pc:docMk/>
-            <pc:sldMk cId="477700888" sldId="319"/>
-            <ac:spMk id="5" creationId="{00000000-0000-0000-0000-000000000000}"/>
-          </ac:spMkLst>
-        </pc:spChg>
-      </pc:sldChg>
       <pc:sldChg chg="add del">
-        <pc:chgData name="Daniel Cregg" userId="a4417ebc-d1f9-4266-8a6c-2c7f21bbea7f" providerId="ADAL" clId="{B41FF6A5-8EE3-453F-9467-07EDEFDD4E20}" dt="2026-09-27T21:10:48.560" v="113"/>
-        <pc:sldMkLst>
-          <pc:docMk/>
-          <pc:sldMk cId="3789680869" sldId="320"/>
-        </pc:sldMkLst>
-      </pc:sldChg>
-      <pc:sldChg chg="add del">
-        <pc:chgData name="Daniel Cregg" userId="a4417ebc-d1f9-4266-8a6c-2c7f21bbea7f" providerId="ADAL" clId="{B41FF6A5-8EE3-453F-9467-07EDEFDD4E20}" dt="2026-09-27T21:21:04.060" v="158"/>
-        <pc:sldMkLst>
-          <pc:docMk/>
-          <pc:sldMk cId="1022806176" sldId="321"/>
-        </pc:sldMkLst>
-      </pc:sldChg>
-      <pc:sldChg chg="add del">
-        <pc:chgData name="Daniel Cregg" userId="a4417ebc-d1f9-4266-8a6c-2c7f21bbea7f" providerId="ADAL" clId="{B41FF6A5-8EE3-453F-9467-07EDEFDD4E20}" dt="2026-09-27T21:10:50.052" v="115"/>
-        <pc:sldMkLst>
-          <pc:docMk/>
-          <pc:sldMk cId="3984571151" sldId="322"/>
-        </pc:sldMkLst>
-      </pc:sldChg>
-      <pc:sldChg chg="add">
-        <pc:chgData name="Daniel Cregg" userId="a4417ebc-d1f9-4266-8a6c-2c7f21bbea7f" providerId="ADAL" clId="{B41FF6A5-8EE3-453F-9467-07EDEFDD4E20}" dt="2026-09-27T21:07:47.494" v="74"/>
+        <pc:chgData name="Daniel Cregg" userId="a4417ebc-d1f9-4266-8a6c-2c7f21bbea7f" providerId="ADAL" clId="{B41FF6A5-8EE3-453F-9467-07EDEFDD4E20}" dt="2026-10-01T12:02:10.527" v="417"/>
         <pc:sldMkLst>
           <pc:docMk/>
           <pc:sldMk cId="4036636308" sldId="323"/>
-        </pc:sldMkLst>
-      </pc:sldChg>
-      <pc:sldChg chg="add del">
-        <pc:chgData name="Daniel Cregg" userId="a4417ebc-d1f9-4266-8a6c-2c7f21bbea7f" providerId="ADAL" clId="{B41FF6A5-8EE3-453F-9467-07EDEFDD4E20}" dt="2026-09-27T21:11:02.910" v="117"/>
-        <pc:sldMkLst>
-          <pc:docMk/>
-          <pc:sldMk cId="3759568000" sldId="324"/>
         </pc:sldMkLst>
       </pc:sldChg>
       <pc:sldChg chg="modSp add mod">
@@ -906,20 +256,6 @@
             <ac:spMk id="3" creationId="{00000000-0000-0000-0000-000000000000}"/>
           </ac:spMkLst>
         </pc:spChg>
-      </pc:sldChg>
-      <pc:sldChg chg="add del">
-        <pc:chgData name="Daniel Cregg" userId="a4417ebc-d1f9-4266-8a6c-2c7f21bbea7f" providerId="ADAL" clId="{B41FF6A5-8EE3-453F-9467-07EDEFDD4E20}" dt="2026-09-27T22:29:09.586" v="387"/>
-        <pc:sldMkLst>
-          <pc:docMk/>
-          <pc:sldMk cId="2815615919" sldId="326"/>
-        </pc:sldMkLst>
-      </pc:sldChg>
-      <pc:sldChg chg="add del">
-        <pc:chgData name="Daniel Cregg" userId="a4417ebc-d1f9-4266-8a6c-2c7f21bbea7f" providerId="ADAL" clId="{B41FF6A5-8EE3-453F-9467-07EDEFDD4E20}" dt="2026-09-27T22:29:09.798" v="389"/>
-        <pc:sldMkLst>
-          <pc:docMk/>
-          <pc:sldMk cId="873445335" sldId="327"/>
-        </pc:sldMkLst>
       </pc:sldChg>
       <pc:sldChg chg="add">
         <pc:chgData name="Daniel Cregg" userId="a4417ebc-d1f9-4266-8a6c-2c7f21bbea7f" providerId="ADAL" clId="{B41FF6A5-8EE3-453F-9467-07EDEFDD4E20}" dt="2026-09-27T21:08:45.760" v="85"/>
@@ -943,163 +279,11 @@
           </ac:spMkLst>
         </pc:spChg>
       </pc:sldChg>
-      <pc:sldChg chg="add del">
-        <pc:chgData name="Daniel Cregg" userId="a4417ebc-d1f9-4266-8a6c-2c7f21bbea7f" providerId="ADAL" clId="{B41FF6A5-8EE3-453F-9467-07EDEFDD4E20}" dt="2026-09-27T22:29:10.195" v="396"/>
-        <pc:sldMkLst>
-          <pc:docMk/>
-          <pc:sldMk cId="334710665" sldId="330"/>
-        </pc:sldMkLst>
-      </pc:sldChg>
-      <pc:sldChg chg="modSp add del mod ord">
-        <pc:chgData name="Daniel Cregg" userId="a4417ebc-d1f9-4266-8a6c-2c7f21bbea7f" providerId="ADAL" clId="{B41FF6A5-8EE3-453F-9467-07EDEFDD4E20}" dt="2026-09-27T22:29:10.445" v="398"/>
-        <pc:sldMkLst>
-          <pc:docMk/>
-          <pc:sldMk cId="2542261670" sldId="331"/>
-        </pc:sldMkLst>
-        <pc:spChg chg="mod">
-          <ac:chgData name="Daniel Cregg" userId="a4417ebc-d1f9-4266-8a6c-2c7f21bbea7f" providerId="ADAL" clId="{B41FF6A5-8EE3-453F-9467-07EDEFDD4E20}" dt="2026-09-27T21:09:13.360" v="94" actId="27636"/>
-          <ac:spMkLst>
-            <pc:docMk/>
-            <pc:sldMk cId="2542261670" sldId="331"/>
-            <ac:spMk id="3" creationId="{00000000-0000-0000-0000-000000000000}"/>
-          </ac:spMkLst>
-        </pc:spChg>
-      </pc:sldChg>
-      <pc:sldChg chg="add del ord">
-        <pc:chgData name="Daniel Cregg" userId="a4417ebc-d1f9-4266-8a6c-2c7f21bbea7f" providerId="ADAL" clId="{B41FF6A5-8EE3-453F-9467-07EDEFDD4E20}" dt="2026-09-27T22:29:10.701" v="400"/>
-        <pc:sldMkLst>
-          <pc:docMk/>
-          <pc:sldMk cId="1560804052" sldId="332"/>
-        </pc:sldMkLst>
-      </pc:sldChg>
-      <pc:sldChg chg="add del">
-        <pc:chgData name="Daniel Cregg" userId="a4417ebc-d1f9-4266-8a6c-2c7f21bbea7f" providerId="ADAL" clId="{B41FF6A5-8EE3-453F-9467-07EDEFDD4E20}" dt="2026-09-27T21:13:54.110" v="132"/>
-        <pc:sldMkLst>
-          <pc:docMk/>
-          <pc:sldMk cId="1251762509" sldId="333"/>
-        </pc:sldMkLst>
-      </pc:sldChg>
-      <pc:sldChg chg="add del">
-        <pc:chgData name="Daniel Cregg" userId="a4417ebc-d1f9-4266-8a6c-2c7f21bbea7f" providerId="ADAL" clId="{B41FF6A5-8EE3-453F-9467-07EDEFDD4E20}" dt="2026-09-27T21:13:43.965" v="131"/>
-        <pc:sldMkLst>
-          <pc:docMk/>
-          <pc:sldMk cId="2027573933" sldId="334"/>
-        </pc:sldMkLst>
-      </pc:sldChg>
-      <pc:sldChg chg="add del ord">
-        <pc:chgData name="Daniel Cregg" userId="a4417ebc-d1f9-4266-8a6c-2c7f21bbea7f" providerId="ADAL" clId="{B41FF6A5-8EE3-453F-9467-07EDEFDD4E20}" dt="2026-09-27T22:29:11.023" v="402"/>
-        <pc:sldMkLst>
-          <pc:docMk/>
-          <pc:sldMk cId="3748457456" sldId="335"/>
-        </pc:sldMkLst>
-      </pc:sldChg>
-      <pc:sldChg chg="modSp add del mod">
-        <pc:chgData name="Daniel Cregg" userId="a4417ebc-d1f9-4266-8a6c-2c7f21bbea7f" providerId="ADAL" clId="{B41FF6A5-8EE3-453F-9467-07EDEFDD4E20}" dt="2026-09-27T21:11:15.952" v="119"/>
-        <pc:sldMkLst>
-          <pc:docMk/>
-          <pc:sldMk cId="2626676703" sldId="336"/>
-        </pc:sldMkLst>
-        <pc:spChg chg="mod">
-          <ac:chgData name="Daniel Cregg" userId="a4417ebc-d1f9-4266-8a6c-2c7f21bbea7f" providerId="ADAL" clId="{B41FF6A5-8EE3-453F-9467-07EDEFDD4E20}" dt="2026-09-27T21:09:50.974" v="106" actId="27636"/>
-          <ac:spMkLst>
-            <pc:docMk/>
-            <pc:sldMk cId="2626676703" sldId="336"/>
-            <ac:spMk id="4" creationId="{00000000-0000-0000-0000-000000000000}"/>
-          </ac:spMkLst>
-        </pc:spChg>
-        <pc:spChg chg="mod">
-          <ac:chgData name="Daniel Cregg" userId="a4417ebc-d1f9-4266-8a6c-2c7f21bbea7f" providerId="ADAL" clId="{B41FF6A5-8EE3-453F-9467-07EDEFDD4E20}" dt="2026-09-27T21:09:50.974" v="105" actId="27636"/>
-          <ac:spMkLst>
-            <pc:docMk/>
-            <pc:sldMk cId="2626676703" sldId="336"/>
-            <ac:spMk id="6" creationId="{00000000-0000-0000-0000-000000000000}"/>
-          </ac:spMkLst>
-        </pc:spChg>
-      </pc:sldChg>
-      <pc:sldChg chg="add del">
-        <pc:chgData name="Daniel Cregg" userId="a4417ebc-d1f9-4266-8a6c-2c7f21bbea7f" providerId="ADAL" clId="{B41FF6A5-8EE3-453F-9467-07EDEFDD4E20}" dt="2026-09-27T21:10:45.494" v="111"/>
-        <pc:sldMkLst>
-          <pc:docMk/>
-          <pc:sldMk cId="2432946745" sldId="337"/>
-        </pc:sldMkLst>
-      </pc:sldChg>
       <pc:sldChg chg="add">
         <pc:chgData name="Daniel Cregg" userId="a4417ebc-d1f9-4266-8a6c-2c7f21bbea7f" providerId="ADAL" clId="{B41FF6A5-8EE3-453F-9467-07EDEFDD4E20}" dt="2026-09-27T21:10:45.477" v="110"/>
         <pc:sldMkLst>
           <pc:docMk/>
           <pc:sldMk cId="2353754212" sldId="338"/>
-        </pc:sldMkLst>
-      </pc:sldChg>
-      <pc:sldChg chg="add del">
-        <pc:chgData name="Daniel Cregg" userId="a4417ebc-d1f9-4266-8a6c-2c7f21bbea7f" providerId="ADAL" clId="{B41FF6A5-8EE3-453F-9467-07EDEFDD4E20}" dt="2026-09-27T21:13:42.834" v="127"/>
-        <pc:sldMkLst>
-          <pc:docMk/>
-          <pc:sldMk cId="3521621968" sldId="339"/>
-        </pc:sldMkLst>
-      </pc:sldChg>
-      <pc:sldChg chg="add del">
-        <pc:chgData name="Daniel Cregg" userId="a4417ebc-d1f9-4266-8a6c-2c7f21bbea7f" providerId="ADAL" clId="{B41FF6A5-8EE3-453F-9467-07EDEFDD4E20}" dt="2026-09-27T22:28:59.133" v="377"/>
-        <pc:sldMkLst>
-          <pc:docMk/>
-          <pc:sldMk cId="945933716" sldId="340"/>
-        </pc:sldMkLst>
-      </pc:sldChg>
-      <pc:sldChg chg="add del">
-        <pc:chgData name="Daniel Cregg" userId="a4417ebc-d1f9-4266-8a6c-2c7f21bbea7f" providerId="ADAL" clId="{B41FF6A5-8EE3-453F-9467-07EDEFDD4E20}" dt="2026-09-27T22:28:59.678" v="381"/>
-        <pc:sldMkLst>
-          <pc:docMk/>
-          <pc:sldMk cId="566730614" sldId="341"/>
-        </pc:sldMkLst>
-      </pc:sldChg>
-      <pc:sldChg chg="modSp add del mod ord">
-        <pc:chgData name="Daniel Cregg" userId="a4417ebc-d1f9-4266-8a6c-2c7f21bbea7f" providerId="ADAL" clId="{B41FF6A5-8EE3-453F-9467-07EDEFDD4E20}" dt="2026-09-27T22:15:22.218" v="258"/>
-        <pc:sldMkLst>
-          <pc:docMk/>
-          <pc:sldMk cId="1752669596" sldId="342"/>
-        </pc:sldMkLst>
-        <pc:spChg chg="mod">
-          <ac:chgData name="Daniel Cregg" userId="a4417ebc-d1f9-4266-8a6c-2c7f21bbea7f" providerId="ADAL" clId="{B41FF6A5-8EE3-453F-9467-07EDEFDD4E20}" dt="2026-09-27T21:11:15.978" v="121" actId="27636"/>
-          <ac:spMkLst>
-            <pc:docMk/>
-            <pc:sldMk cId="1752669596" sldId="342"/>
-            <ac:spMk id="4" creationId="{00000000-0000-0000-0000-000000000000}"/>
-          </ac:spMkLst>
-        </pc:spChg>
-        <pc:spChg chg="mod">
-          <ac:chgData name="Daniel Cregg" userId="a4417ebc-d1f9-4266-8a6c-2c7f21bbea7f" providerId="ADAL" clId="{B41FF6A5-8EE3-453F-9467-07EDEFDD4E20}" dt="2026-09-27T21:11:15.977" v="120" actId="27636"/>
-          <ac:spMkLst>
-            <pc:docMk/>
-            <pc:sldMk cId="1752669596" sldId="342"/>
-            <ac:spMk id="6" creationId="{00000000-0000-0000-0000-000000000000}"/>
-          </ac:spMkLst>
-        </pc:spChg>
-      </pc:sldChg>
-      <pc:sldChg chg="add del">
-        <pc:chgData name="Daniel Cregg" userId="a4417ebc-d1f9-4266-8a6c-2c7f21bbea7f" providerId="ADAL" clId="{B41FF6A5-8EE3-453F-9467-07EDEFDD4E20}" dt="2026-09-27T22:15:15.496" v="246"/>
-        <pc:sldMkLst>
-          <pc:docMk/>
-          <pc:sldMk cId="2407024758" sldId="343"/>
-        </pc:sldMkLst>
-      </pc:sldChg>
-      <pc:sldChg chg="add del ord">
-        <pc:chgData name="Daniel Cregg" userId="a4417ebc-d1f9-4266-8a6c-2c7f21bbea7f" providerId="ADAL" clId="{B41FF6A5-8EE3-453F-9467-07EDEFDD4E20}" dt="2026-09-27T21:23:29.611" v="174"/>
-        <pc:sldMkLst>
-          <pc:docMk/>
-          <pc:sldMk cId="16210618" sldId="344"/>
-        </pc:sldMkLst>
-      </pc:sldChg>
-      <pc:sldChg chg="add del">
-        <pc:chgData name="Daniel Cregg" userId="a4417ebc-d1f9-4266-8a6c-2c7f21bbea7f" providerId="ADAL" clId="{B41FF6A5-8EE3-453F-9467-07EDEFDD4E20}" dt="2026-09-27T22:28:34.830" v="326"/>
-        <pc:sldMkLst>
-          <pc:docMk/>
-          <pc:sldMk cId="2895342830" sldId="345"/>
-        </pc:sldMkLst>
-      </pc:sldChg>
-      <pc:sldChg chg="add del">
-        <pc:chgData name="Daniel Cregg" userId="a4417ebc-d1f9-4266-8a6c-2c7f21bbea7f" providerId="ADAL" clId="{B41FF6A5-8EE3-453F-9467-07EDEFDD4E20}" dt="2026-09-27T22:15:05.109" v="244"/>
-        <pc:sldMkLst>
-          <pc:docMk/>
-          <pc:sldMk cId="3259741811" sldId="346"/>
         </pc:sldMkLst>
       </pc:sldChg>
       <pc:sldChg chg="add ord">
@@ -1108,94 +292,6 @@
           <pc:docMk/>
           <pc:sldMk cId="1030647531" sldId="347"/>
         </pc:sldMkLst>
-      </pc:sldChg>
-      <pc:sldChg chg="add del ord">
-        <pc:chgData name="Daniel Cregg" userId="a4417ebc-d1f9-4266-8a6c-2c7f21bbea7f" providerId="ADAL" clId="{B41FF6A5-8EE3-453F-9467-07EDEFDD4E20}" dt="2026-09-27T21:17:38.858" v="145"/>
-        <pc:sldMkLst>
-          <pc:docMk/>
-          <pc:sldMk cId="1023231717" sldId="348"/>
-        </pc:sldMkLst>
-      </pc:sldChg>
-      <pc:sldChg chg="add del ord">
-        <pc:chgData name="Daniel Cregg" userId="a4417ebc-d1f9-4266-8a6c-2c7f21bbea7f" providerId="ADAL" clId="{B41FF6A5-8EE3-453F-9467-07EDEFDD4E20}" dt="2026-09-27T21:17:01.744" v="140"/>
-        <pc:sldMkLst>
-          <pc:docMk/>
-          <pc:sldMk cId="482449054" sldId="349"/>
-        </pc:sldMkLst>
-      </pc:sldChg>
-      <pc:sldChg chg="add del ord">
-        <pc:chgData name="Daniel Cregg" userId="a4417ebc-d1f9-4266-8a6c-2c7f21bbea7f" providerId="ADAL" clId="{B41FF6A5-8EE3-453F-9467-07EDEFDD4E20}" dt="2026-09-27T21:17:25.658" v="142"/>
-        <pc:sldMkLst>
-          <pc:docMk/>
-          <pc:sldMk cId="2490342310" sldId="350"/>
-        </pc:sldMkLst>
-      </pc:sldChg>
-      <pc:sldChg chg="add del">
-        <pc:chgData name="Daniel Cregg" userId="a4417ebc-d1f9-4266-8a6c-2c7f21bbea7f" providerId="ADAL" clId="{B41FF6A5-8EE3-453F-9467-07EDEFDD4E20}" dt="2026-09-27T21:20:59.649" v="156"/>
-        <pc:sldMkLst>
-          <pc:docMk/>
-          <pc:sldMk cId="1787954653" sldId="351"/>
-        </pc:sldMkLst>
-      </pc:sldChg>
-      <pc:sldChg chg="modSp add del mod">
-        <pc:chgData name="Daniel Cregg" userId="a4417ebc-d1f9-4266-8a6c-2c7f21bbea7f" providerId="ADAL" clId="{B41FF6A5-8EE3-453F-9467-07EDEFDD4E20}" dt="2026-09-27T21:17:52.611" v="148"/>
-        <pc:sldMkLst>
-          <pc:docMk/>
-          <pc:sldMk cId="4134763121" sldId="352"/>
-        </pc:sldMkLst>
-        <pc:spChg chg="mod">
-          <ac:chgData name="Daniel Cregg" userId="a4417ebc-d1f9-4266-8a6c-2c7f21bbea7f" providerId="ADAL" clId="{B41FF6A5-8EE3-453F-9467-07EDEFDD4E20}" dt="2026-09-27T21:17:25.658" v="143" actId="27636"/>
-          <ac:spMkLst>
-            <pc:docMk/>
-            <pc:sldMk cId="4134763121" sldId="352"/>
-            <ac:spMk id="3" creationId="{00000000-0000-0000-0000-000000000000}"/>
-          </ac:spMkLst>
-        </pc:spChg>
-        <pc:spChg chg="mod">
-          <ac:chgData name="Daniel Cregg" userId="a4417ebc-d1f9-4266-8a6c-2c7f21bbea7f" providerId="ADAL" clId="{B41FF6A5-8EE3-453F-9467-07EDEFDD4E20}" dt="2026-09-27T21:17:52.063" v="146"/>
-          <ac:spMkLst>
-            <pc:docMk/>
-            <pc:sldMk cId="4134763121" sldId="352"/>
-            <ac:spMk id="12" creationId="{00000000-0000-0000-0000-000000000000}"/>
-          </ac:spMkLst>
-        </pc:spChg>
-      </pc:sldChg>
-      <pc:sldChg chg="add del ord">
-        <pc:chgData name="Daniel Cregg" userId="a4417ebc-d1f9-4266-8a6c-2c7f21bbea7f" providerId="ADAL" clId="{B41FF6A5-8EE3-453F-9467-07EDEFDD4E20}" dt="2026-09-27T21:23:36.023" v="176"/>
-        <pc:sldMkLst>
-          <pc:docMk/>
-          <pc:sldMk cId="1891236273" sldId="353"/>
-        </pc:sldMkLst>
-      </pc:sldChg>
-      <pc:sldChg chg="add del">
-        <pc:chgData name="Daniel Cregg" userId="a4417ebc-d1f9-4266-8a6c-2c7f21bbea7f" providerId="ADAL" clId="{B41FF6A5-8EE3-453F-9467-07EDEFDD4E20}" dt="2026-09-27T21:18:21.577" v="150"/>
-        <pc:sldMkLst>
-          <pc:docMk/>
-          <pc:sldMk cId="3886044775" sldId="354"/>
-        </pc:sldMkLst>
-      </pc:sldChg>
-      <pc:sldChg chg="modSp add del mod">
-        <pc:chgData name="Daniel Cregg" userId="a4417ebc-d1f9-4266-8a6c-2c7f21bbea7f" providerId="ADAL" clId="{B41FF6A5-8EE3-453F-9467-07EDEFDD4E20}" dt="2026-09-27T21:18:39.877" v="154"/>
-        <pc:sldMkLst>
-          <pc:docMk/>
-          <pc:sldMk cId="481293268" sldId="355"/>
-        </pc:sldMkLst>
-        <pc:spChg chg="mod">
-          <ac:chgData name="Daniel Cregg" userId="a4417ebc-d1f9-4266-8a6c-2c7f21bbea7f" providerId="ADAL" clId="{B41FF6A5-8EE3-453F-9467-07EDEFDD4E20}" dt="2026-09-27T21:18:39.342" v="151"/>
-          <ac:spMkLst>
-            <pc:docMk/>
-            <pc:sldMk cId="481293268" sldId="355"/>
-            <ac:spMk id="3" creationId="{00000000-0000-0000-0000-000000000000}"/>
-          </ac:spMkLst>
-        </pc:spChg>
-        <pc:spChg chg="mod">
-          <ac:chgData name="Daniel Cregg" userId="a4417ebc-d1f9-4266-8a6c-2c7f21bbea7f" providerId="ADAL" clId="{B41FF6A5-8EE3-453F-9467-07EDEFDD4E20}" dt="2026-09-27T21:18:39.342" v="152"/>
-          <ac:spMkLst>
-            <pc:docMk/>
-            <pc:sldMk cId="481293268" sldId="355"/>
-            <ac:spMk id="12" creationId="{00000000-0000-0000-0000-000000000000}"/>
-          </ac:spMkLst>
-        </pc:spChg>
       </pc:sldChg>
       <pc:sldChg chg="add ord">
         <pc:chgData name="Daniel Cregg" userId="a4417ebc-d1f9-4266-8a6c-2c7f21bbea7f" providerId="ADAL" clId="{B41FF6A5-8EE3-453F-9467-07EDEFDD4E20}" dt="2026-09-27T21:23:19.958" v="170"/>
@@ -1211,48 +307,12 @@
           <pc:sldMk cId="4214576990" sldId="357"/>
         </pc:sldMkLst>
       </pc:sldChg>
-      <pc:sldChg chg="add del">
-        <pc:chgData name="Daniel Cregg" userId="a4417ebc-d1f9-4266-8a6c-2c7f21bbea7f" providerId="ADAL" clId="{B41FF6A5-8EE3-453F-9467-07EDEFDD4E20}" dt="2026-09-27T22:15:20.692" v="256"/>
-        <pc:sldMkLst>
-          <pc:docMk/>
-          <pc:sldMk cId="1441280595" sldId="358"/>
-        </pc:sldMkLst>
-      </pc:sldChg>
-      <pc:sldChg chg="add del">
-        <pc:chgData name="Daniel Cregg" userId="a4417ebc-d1f9-4266-8a6c-2c7f21bbea7f" providerId="ADAL" clId="{B41FF6A5-8EE3-453F-9467-07EDEFDD4E20}" dt="2026-09-27T22:15:17.382" v="250"/>
-        <pc:sldMkLst>
-          <pc:docMk/>
-          <pc:sldMk cId="4233424156" sldId="359"/>
-        </pc:sldMkLst>
-      </pc:sldChg>
       <pc:sldChg chg="add">
         <pc:chgData name="Daniel Cregg" userId="a4417ebc-d1f9-4266-8a6c-2c7f21bbea7f" providerId="ADAL" clId="{B41FF6A5-8EE3-453F-9467-07EDEFDD4E20}" dt="2026-09-27T21:23:36.008" v="175"/>
         <pc:sldMkLst>
           <pc:docMk/>
           <pc:sldMk cId="261603931" sldId="360"/>
         </pc:sldMkLst>
-      </pc:sldChg>
-      <pc:sldChg chg="add del">
-        <pc:chgData name="Daniel Cregg" userId="a4417ebc-d1f9-4266-8a6c-2c7f21bbea7f" providerId="ADAL" clId="{B41FF6A5-8EE3-453F-9467-07EDEFDD4E20}" dt="2026-09-27T21:34:24.777" v="180"/>
-        <pc:sldMkLst>
-          <pc:docMk/>
-          <pc:sldMk cId="4286237623" sldId="361"/>
-        </pc:sldMkLst>
-      </pc:sldChg>
-      <pc:sldChg chg="modSp add del mod">
-        <pc:chgData name="Daniel Cregg" userId="a4417ebc-d1f9-4266-8a6c-2c7f21bbea7f" providerId="ADAL" clId="{B41FF6A5-8EE3-453F-9467-07EDEFDD4E20}" dt="2026-09-27T21:34:44.460" v="183"/>
-        <pc:sldMkLst>
-          <pc:docMk/>
-          <pc:sldMk cId="2739358918" sldId="362"/>
-        </pc:sldMkLst>
-        <pc:spChg chg="mod">
-          <ac:chgData name="Daniel Cregg" userId="a4417ebc-d1f9-4266-8a6c-2c7f21bbea7f" providerId="ADAL" clId="{B41FF6A5-8EE3-453F-9467-07EDEFDD4E20}" dt="2026-09-27T21:34:24.811" v="181" actId="27636"/>
-          <ac:spMkLst>
-            <pc:docMk/>
-            <pc:sldMk cId="2739358918" sldId="362"/>
-            <ac:spMk id="3" creationId="{00000000-0000-0000-0000-000000000000}"/>
-          </ac:spMkLst>
-        </pc:spChg>
       </pc:sldChg>
       <pc:sldChg chg="modSp add mod">
         <pc:chgData name="Daniel Cregg" userId="a4417ebc-d1f9-4266-8a6c-2c7f21bbea7f" providerId="ADAL" clId="{B41FF6A5-8EE3-453F-9467-07EDEFDD4E20}" dt="2026-09-27T21:34:44.494" v="184" actId="27636"/>
@@ -1266,88 +326,6 @@
             <pc:docMk/>
             <pc:sldMk cId="2120631221" sldId="363"/>
             <ac:spMk id="3" creationId="{00000000-0000-0000-0000-000000000000}"/>
-          </ac:spMkLst>
-        </pc:spChg>
-      </pc:sldChg>
-      <pc:sldChg chg="modSp add del mod">
-        <pc:chgData name="Daniel Cregg" userId="a4417ebc-d1f9-4266-8a6c-2c7f21bbea7f" providerId="ADAL" clId="{B41FF6A5-8EE3-453F-9467-07EDEFDD4E20}" dt="2026-09-27T21:37:52.790" v="189"/>
-        <pc:sldMkLst>
-          <pc:docMk/>
-          <pc:sldMk cId="617382090" sldId="364"/>
-        </pc:sldMkLst>
-        <pc:spChg chg="mod">
-          <ac:chgData name="Daniel Cregg" userId="a4417ebc-d1f9-4266-8a6c-2c7f21bbea7f" providerId="ADAL" clId="{B41FF6A5-8EE3-453F-9467-07EDEFDD4E20}" dt="2026-09-27T21:37:34.992" v="187" actId="27636"/>
-          <ac:spMkLst>
-            <pc:docMk/>
-            <pc:sldMk cId="617382090" sldId="364"/>
-            <ac:spMk id="3" creationId="{00000000-0000-0000-0000-000000000000}"/>
-          </ac:spMkLst>
-        </pc:spChg>
-      </pc:sldChg>
-      <pc:sldChg chg="add del">
-        <pc:chgData name="Daniel Cregg" userId="a4417ebc-d1f9-4266-8a6c-2c7f21bbea7f" providerId="ADAL" clId="{B41FF6A5-8EE3-453F-9467-07EDEFDD4E20}" dt="2026-09-27T21:39:28.460" v="191"/>
-        <pc:sldMkLst>
-          <pc:docMk/>
-          <pc:sldMk cId="1204924262" sldId="365"/>
-        </pc:sldMkLst>
-      </pc:sldChg>
-      <pc:sldChg chg="add del">
-        <pc:chgData name="Daniel Cregg" userId="a4417ebc-d1f9-4266-8a6c-2c7f21bbea7f" providerId="ADAL" clId="{B41FF6A5-8EE3-453F-9467-07EDEFDD4E20}" dt="2026-09-27T21:39:36.774" v="193"/>
-        <pc:sldMkLst>
-          <pc:docMk/>
-          <pc:sldMk cId="141648918" sldId="366"/>
-        </pc:sldMkLst>
-      </pc:sldChg>
-      <pc:sldChg chg="add del">
-        <pc:chgData name="Daniel Cregg" userId="a4417ebc-d1f9-4266-8a6c-2c7f21bbea7f" providerId="ADAL" clId="{B41FF6A5-8EE3-453F-9467-07EDEFDD4E20}" dt="2026-09-27T21:41:19.567" v="195"/>
-        <pc:sldMkLst>
-          <pc:docMk/>
-          <pc:sldMk cId="2457444691" sldId="367"/>
-        </pc:sldMkLst>
-      </pc:sldChg>
-      <pc:sldChg chg="add del">
-        <pc:chgData name="Daniel Cregg" userId="a4417ebc-d1f9-4266-8a6c-2c7f21bbea7f" providerId="ADAL" clId="{B41FF6A5-8EE3-453F-9467-07EDEFDD4E20}" dt="2026-09-27T22:28:43.244" v="336"/>
-        <pc:sldMkLst>
-          <pc:docMk/>
-          <pc:sldMk cId="811731720" sldId="368"/>
-        </pc:sldMkLst>
-      </pc:sldChg>
-      <pc:sldChg chg="modSp add del mod">
-        <pc:chgData name="Daniel Cregg" userId="a4417ebc-d1f9-4266-8a6c-2c7f21bbea7f" providerId="ADAL" clId="{B41FF6A5-8EE3-453F-9467-07EDEFDD4E20}" dt="2026-09-27T21:45:12.808" v="207"/>
-        <pc:sldMkLst>
-          <pc:docMk/>
-          <pc:sldMk cId="2383258267" sldId="369"/>
-        </pc:sldMkLst>
-        <pc:spChg chg="mod">
-          <ac:chgData name="Daniel Cregg" userId="a4417ebc-d1f9-4266-8a6c-2c7f21bbea7f" providerId="ADAL" clId="{B41FF6A5-8EE3-453F-9467-07EDEFDD4E20}" dt="2026-09-27T21:44:48.059" v="199"/>
-          <ac:spMkLst>
-            <pc:docMk/>
-            <pc:sldMk cId="2383258267" sldId="369"/>
-            <ac:spMk id="20" creationId="{00000000-0000-0000-0000-000000000000}"/>
-          </ac:spMkLst>
-        </pc:spChg>
-        <pc:spChg chg="mod">
-          <ac:chgData name="Daniel Cregg" userId="a4417ebc-d1f9-4266-8a6c-2c7f21bbea7f" providerId="ADAL" clId="{B41FF6A5-8EE3-453F-9467-07EDEFDD4E20}" dt="2026-09-27T21:44:48.060" v="201"/>
-          <ac:spMkLst>
-            <pc:docMk/>
-            <pc:sldMk cId="2383258267" sldId="369"/>
-            <ac:spMk id="21" creationId="{00000000-0000-0000-0000-000000000000}"/>
-          </ac:spMkLst>
-        </pc:spChg>
-        <pc:spChg chg="mod">
-          <ac:chgData name="Daniel Cregg" userId="a4417ebc-d1f9-4266-8a6c-2c7f21bbea7f" providerId="ADAL" clId="{B41FF6A5-8EE3-453F-9467-07EDEFDD4E20}" dt="2026-09-27T21:44:48.060" v="203"/>
-          <ac:spMkLst>
-            <pc:docMk/>
-            <pc:sldMk cId="2383258267" sldId="369"/>
-            <ac:spMk id="22" creationId="{00000000-0000-0000-0000-000000000000}"/>
-          </ac:spMkLst>
-        </pc:spChg>
-        <pc:spChg chg="mod">
-          <ac:chgData name="Daniel Cregg" userId="a4417ebc-d1f9-4266-8a6c-2c7f21bbea7f" providerId="ADAL" clId="{B41FF6A5-8EE3-453F-9467-07EDEFDD4E20}" dt="2026-09-27T21:44:48.061" v="205"/>
-          <ac:spMkLst>
-            <pc:docMk/>
-            <pc:sldMk cId="2383258267" sldId="369"/>
-            <ac:spMk id="30" creationId="{00000000-0000-0000-0000-000000000000}"/>
           </ac:spMkLst>
         </pc:spChg>
       </pc:sldChg>
@@ -1365,103 +343,6 @@
           <pc:sldMk cId="25835409" sldId="371"/>
         </pc:sldMkLst>
       </pc:sldChg>
-      <pc:sldChg chg="modSp add del mod">
-        <pc:chgData name="Daniel Cregg" userId="a4417ebc-d1f9-4266-8a6c-2c7f21bbea7f" providerId="ADAL" clId="{B41FF6A5-8EE3-453F-9467-07EDEFDD4E20}" dt="2026-09-27T21:54:26.484" v="221"/>
-        <pc:sldMkLst>
-          <pc:docMk/>
-          <pc:sldMk cId="2795973531" sldId="372"/>
-        </pc:sldMkLst>
-        <pc:spChg chg="mod">
-          <ac:chgData name="Daniel Cregg" userId="a4417ebc-d1f9-4266-8a6c-2c7f21bbea7f" providerId="ADAL" clId="{B41FF6A5-8EE3-453F-9467-07EDEFDD4E20}" dt="2026-09-27T21:54:16.462" v="219" actId="27636"/>
-          <ac:spMkLst>
-            <pc:docMk/>
-            <pc:sldMk cId="2795973531" sldId="372"/>
-            <ac:spMk id="3" creationId="{00000000-0000-0000-0000-000000000000}"/>
-          </ac:spMkLst>
-        </pc:spChg>
-        <pc:graphicFrameChg chg="modGraphic">
-          <ac:chgData name="Daniel Cregg" userId="a4417ebc-d1f9-4266-8a6c-2c7f21bbea7f" providerId="ADAL" clId="{B41FF6A5-8EE3-453F-9467-07EDEFDD4E20}" dt="2026-09-27T21:54:12.750" v="216"/>
-          <ac:graphicFrameMkLst>
-            <pc:docMk/>
-            <pc:sldMk cId="2795973531" sldId="372"/>
-            <ac:graphicFrameMk id="4" creationId="{00000000-0000-0000-0000-000000000000}"/>
-          </ac:graphicFrameMkLst>
-        </pc:graphicFrameChg>
-      </pc:sldChg>
-      <pc:sldChg chg="add del">
-        <pc:chgData name="Daniel Cregg" userId="a4417ebc-d1f9-4266-8a6c-2c7f21bbea7f" providerId="ADAL" clId="{B41FF6A5-8EE3-453F-9467-07EDEFDD4E20}" dt="2026-09-27T21:54:55.103" v="223"/>
-        <pc:sldMkLst>
-          <pc:docMk/>
-          <pc:sldMk cId="3186848909" sldId="373"/>
-        </pc:sldMkLst>
-      </pc:sldChg>
-      <pc:sldChg chg="modSp add del mod">
-        <pc:chgData name="Daniel Cregg" userId="a4417ebc-d1f9-4266-8a6c-2c7f21bbea7f" providerId="ADAL" clId="{B41FF6A5-8EE3-453F-9467-07EDEFDD4E20}" dt="2026-09-27T21:58:50.128" v="233"/>
-        <pc:sldMkLst>
-          <pc:docMk/>
-          <pc:sldMk cId="332932053" sldId="374"/>
-        </pc:sldMkLst>
-        <pc:spChg chg="mod">
-          <ac:chgData name="Daniel Cregg" userId="a4417ebc-d1f9-4266-8a6c-2c7f21bbea7f" providerId="ADAL" clId="{B41FF6A5-8EE3-453F-9467-07EDEFDD4E20}" dt="2026-09-27T21:54:59.241" v="229"/>
-          <ac:spMkLst>
-            <pc:docMk/>
-            <pc:sldMk cId="332932053" sldId="374"/>
-            <ac:spMk id="3" creationId="{00000000-0000-0000-0000-000000000000}"/>
-          </ac:spMkLst>
-        </pc:spChg>
-        <pc:graphicFrameChg chg="modGraphic">
-          <ac:chgData name="Daniel Cregg" userId="a4417ebc-d1f9-4266-8a6c-2c7f21bbea7f" providerId="ADAL" clId="{B41FF6A5-8EE3-453F-9467-07EDEFDD4E20}" dt="2026-09-27T21:54:55.647" v="227"/>
-          <ac:graphicFrameMkLst>
-            <pc:docMk/>
-            <pc:sldMk cId="332932053" sldId="374"/>
-            <ac:graphicFrameMk id="4" creationId="{00000000-0000-0000-0000-000000000000}"/>
-          </ac:graphicFrameMkLst>
-        </pc:graphicFrameChg>
-      </pc:sldChg>
-      <pc:sldChg chg="add del">
-        <pc:chgData name="Daniel Cregg" userId="a4417ebc-d1f9-4266-8a6c-2c7f21bbea7f" providerId="ADAL" clId="{B41FF6A5-8EE3-453F-9467-07EDEFDD4E20}" dt="2026-09-27T22:28:44.595" v="350"/>
-        <pc:sldMkLst>
-          <pc:docMk/>
-          <pc:sldMk cId="2468233537" sldId="375"/>
-        </pc:sldMkLst>
-      </pc:sldChg>
-      <pc:sldChg chg="modSp add del mod">
-        <pc:chgData name="Daniel Cregg" userId="a4417ebc-d1f9-4266-8a6c-2c7f21bbea7f" providerId="ADAL" clId="{B41FF6A5-8EE3-453F-9467-07EDEFDD4E20}" dt="2026-09-27T22:28:43.947" v="342"/>
-        <pc:sldMkLst>
-          <pc:docMk/>
-          <pc:sldMk cId="1609081789" sldId="376"/>
-        </pc:sldMkLst>
-        <pc:spChg chg="mod">
-          <ac:chgData name="Daniel Cregg" userId="a4417ebc-d1f9-4266-8a6c-2c7f21bbea7f" providerId="ADAL" clId="{B41FF6A5-8EE3-453F-9467-07EDEFDD4E20}" dt="2026-09-27T21:58:54.832" v="238"/>
-          <ac:spMkLst>
-            <pc:docMk/>
-            <pc:sldMk cId="1609081789" sldId="376"/>
-            <ac:spMk id="3" creationId="{00000000-0000-0000-0000-000000000000}"/>
-          </ac:spMkLst>
-        </pc:spChg>
-        <pc:graphicFrameChg chg="modGraphic">
-          <ac:chgData name="Daniel Cregg" userId="a4417ebc-d1f9-4266-8a6c-2c7f21bbea7f" providerId="ADAL" clId="{B41FF6A5-8EE3-453F-9467-07EDEFDD4E20}" dt="2026-09-27T21:58:50.859" v="237"/>
-          <ac:graphicFrameMkLst>
-            <pc:docMk/>
-            <pc:sldMk cId="1609081789" sldId="376"/>
-            <ac:graphicFrameMk id="4" creationId="{00000000-0000-0000-0000-000000000000}"/>
-          </ac:graphicFrameMkLst>
-        </pc:graphicFrameChg>
-      </pc:sldChg>
-      <pc:sldChg chg="add del">
-        <pc:chgData name="Daniel Cregg" userId="a4417ebc-d1f9-4266-8a6c-2c7f21bbea7f" providerId="ADAL" clId="{B41FF6A5-8EE3-453F-9467-07EDEFDD4E20}" dt="2026-09-27T22:02:14.580" v="242"/>
-        <pc:sldMkLst>
-          <pc:docMk/>
-          <pc:sldMk cId="3124975245" sldId="377"/>
-        </pc:sldMkLst>
-      </pc:sldChg>
-      <pc:sldChg chg="add del">
-        <pc:chgData name="Daniel Cregg" userId="a4417ebc-d1f9-4266-8a6c-2c7f21bbea7f" providerId="ADAL" clId="{B41FF6A5-8EE3-453F-9467-07EDEFDD4E20}" dt="2026-09-27T22:15:19.061" v="252"/>
-        <pc:sldMkLst>
-          <pc:docMk/>
-          <pc:sldMk cId="2215568703" sldId="378"/>
-        </pc:sldMkLst>
-      </pc:sldChg>
       <pc:sldChg chg="add">
         <pc:chgData name="Daniel Cregg" userId="a4417ebc-d1f9-4266-8a6c-2c7f21bbea7f" providerId="ADAL" clId="{B41FF6A5-8EE3-453F-9467-07EDEFDD4E20}" dt="2026-09-27T22:15:05.096" v="243"/>
         <pc:sldMkLst>
@@ -1469,102 +350,11 @@
           <pc:sldMk cId="1596600023" sldId="379"/>
         </pc:sldMkLst>
       </pc:sldChg>
-      <pc:sldChg chg="add del">
-        <pc:chgData name="Daniel Cregg" userId="a4417ebc-d1f9-4266-8a6c-2c7f21bbea7f" providerId="ADAL" clId="{B41FF6A5-8EE3-453F-9467-07EDEFDD4E20}" dt="2026-09-27T22:28:42.551" v="329"/>
-        <pc:sldMkLst>
-          <pc:docMk/>
-          <pc:sldMk cId="1587029600" sldId="380"/>
-        </pc:sldMkLst>
-      </pc:sldChg>
       <pc:sldChg chg="add">
         <pc:chgData name="Daniel Cregg" userId="a4417ebc-d1f9-4266-8a6c-2c7f21bbea7f" providerId="ADAL" clId="{B41FF6A5-8EE3-453F-9467-07EDEFDD4E20}" dt="2026-09-27T22:15:16.410" v="247"/>
         <pc:sldMkLst>
           <pc:docMk/>
           <pc:sldMk cId="928621051" sldId="381"/>
-        </pc:sldMkLst>
-      </pc:sldChg>
-      <pc:sldChg chg="add del">
-        <pc:chgData name="Daniel Cregg" userId="a4417ebc-d1f9-4266-8a6c-2c7f21bbea7f" providerId="ADAL" clId="{B41FF6A5-8EE3-453F-9467-07EDEFDD4E20}" dt="2026-09-27T22:28:42.761" v="331"/>
-        <pc:sldMkLst>
-          <pc:docMk/>
-          <pc:sldMk cId="3887902934" sldId="382"/>
-        </pc:sldMkLst>
-      </pc:sldChg>
-      <pc:sldChg chg="add del">
-        <pc:chgData name="Daniel Cregg" userId="a4417ebc-d1f9-4266-8a6c-2c7f21bbea7f" providerId="ADAL" clId="{B41FF6A5-8EE3-453F-9467-07EDEFDD4E20}" dt="2026-09-27T22:28:45.378" v="356"/>
-        <pc:sldMkLst>
-          <pc:docMk/>
-          <pc:sldMk cId="1148483046" sldId="383"/>
-        </pc:sldMkLst>
-      </pc:sldChg>
-      <pc:sldChg chg="add del">
-        <pc:chgData name="Daniel Cregg" userId="a4417ebc-d1f9-4266-8a6c-2c7f21bbea7f" providerId="ADAL" clId="{B41FF6A5-8EE3-453F-9467-07EDEFDD4E20}" dt="2026-09-27T22:25:17.559" v="303"/>
-        <pc:sldMkLst>
-          <pc:docMk/>
-          <pc:sldMk cId="2169585708" sldId="384"/>
-        </pc:sldMkLst>
-      </pc:sldChg>
-      <pc:sldChg chg="add del">
-        <pc:chgData name="Daniel Cregg" userId="a4417ebc-d1f9-4266-8a6c-2c7f21bbea7f" providerId="ADAL" clId="{B41FF6A5-8EE3-453F-9467-07EDEFDD4E20}" dt="2026-09-27T22:28:58.611" v="373"/>
-        <pc:sldMkLst>
-          <pc:docMk/>
-          <pc:sldMk cId="71569857" sldId="385"/>
-        </pc:sldMkLst>
-      </pc:sldChg>
-      <pc:sldChg chg="add del">
-        <pc:chgData name="Daniel Cregg" userId="a4417ebc-d1f9-4266-8a6c-2c7f21bbea7f" providerId="ADAL" clId="{B41FF6A5-8EE3-453F-9467-07EDEFDD4E20}" dt="2026-09-27T22:28:47.694" v="369"/>
-        <pc:sldMkLst>
-          <pc:docMk/>
-          <pc:sldMk cId="2969214463" sldId="386"/>
-        </pc:sldMkLst>
-      </pc:sldChg>
-      <pc:sldChg chg="add del ord">
-        <pc:chgData name="Daniel Cregg" userId="a4417ebc-d1f9-4266-8a6c-2c7f21bbea7f" providerId="ADAL" clId="{B41FF6A5-8EE3-453F-9467-07EDEFDD4E20}" dt="2026-09-27T22:19:00.260" v="286"/>
-        <pc:sldMkLst>
-          <pc:docMk/>
-          <pc:sldMk cId="3993336649" sldId="387"/>
-        </pc:sldMkLst>
-      </pc:sldChg>
-      <pc:sldChg chg="add del ord">
-        <pc:chgData name="Daniel Cregg" userId="a4417ebc-d1f9-4266-8a6c-2c7f21bbea7f" providerId="ADAL" clId="{B41FF6A5-8EE3-453F-9467-07EDEFDD4E20}" dt="2026-09-27T22:18:52.181" v="284"/>
-        <pc:sldMkLst>
-          <pc:docMk/>
-          <pc:sldMk cId="3596460570" sldId="388"/>
-        </pc:sldMkLst>
-      </pc:sldChg>
-      <pc:sldChg chg="add del ord">
-        <pc:chgData name="Daniel Cregg" userId="a4417ebc-d1f9-4266-8a6c-2c7f21bbea7f" providerId="ADAL" clId="{B41FF6A5-8EE3-453F-9467-07EDEFDD4E20}" dt="2026-09-27T22:18:41.864" v="282"/>
-        <pc:sldMkLst>
-          <pc:docMk/>
-          <pc:sldMk cId="3807345657" sldId="389"/>
-        </pc:sldMkLst>
-      </pc:sldChg>
-      <pc:sldChg chg="add del ord">
-        <pc:chgData name="Daniel Cregg" userId="a4417ebc-d1f9-4266-8a6c-2c7f21bbea7f" providerId="ADAL" clId="{B41FF6A5-8EE3-453F-9467-07EDEFDD4E20}" dt="2026-09-27T22:18:32.679" v="280"/>
-        <pc:sldMkLst>
-          <pc:docMk/>
-          <pc:sldMk cId="3485919305" sldId="390"/>
-        </pc:sldMkLst>
-      </pc:sldChg>
-      <pc:sldChg chg="add del ord">
-        <pc:chgData name="Daniel Cregg" userId="a4417ebc-d1f9-4266-8a6c-2c7f21bbea7f" providerId="ADAL" clId="{B41FF6A5-8EE3-453F-9467-07EDEFDD4E20}" dt="2026-09-27T22:18:24.301" v="278"/>
-        <pc:sldMkLst>
-          <pc:docMk/>
-          <pc:sldMk cId="3461744305" sldId="391"/>
-        </pc:sldMkLst>
-      </pc:sldChg>
-      <pc:sldChg chg="add del ord">
-        <pc:chgData name="Daniel Cregg" userId="a4417ebc-d1f9-4266-8a6c-2c7f21bbea7f" providerId="ADAL" clId="{B41FF6A5-8EE3-453F-9467-07EDEFDD4E20}" dt="2026-09-27T22:18:14.928" v="276"/>
-        <pc:sldMkLst>
-          <pc:docMk/>
-          <pc:sldMk cId="2825975184" sldId="392"/>
-        </pc:sldMkLst>
-      </pc:sldChg>
-      <pc:sldChg chg="add del ord">
-        <pc:chgData name="Daniel Cregg" userId="a4417ebc-d1f9-4266-8a6c-2c7f21bbea7f" providerId="ADAL" clId="{B41FF6A5-8EE3-453F-9467-07EDEFDD4E20}" dt="2026-09-27T22:18:00.096" v="274"/>
-        <pc:sldMkLst>
-          <pc:docMk/>
-          <pc:sldMk cId="1698947940" sldId="393"/>
         </pc:sldMkLst>
       </pc:sldChg>
       <pc:sldChg chg="add">
@@ -1579,20 +369,6 @@
         <pc:sldMkLst>
           <pc:docMk/>
           <pc:sldMk cId="1254451184" sldId="395"/>
-        </pc:sldMkLst>
-      </pc:sldChg>
-      <pc:sldChg chg="add del">
-        <pc:chgData name="Daniel Cregg" userId="a4417ebc-d1f9-4266-8a6c-2c7f21bbea7f" providerId="ADAL" clId="{B41FF6A5-8EE3-453F-9467-07EDEFDD4E20}" dt="2026-09-27T22:28:45.178" v="354"/>
-        <pc:sldMkLst>
-          <pc:docMk/>
-          <pc:sldMk cId="891239707" sldId="396"/>
-        </pc:sldMkLst>
-      </pc:sldChg>
-      <pc:sldChg chg="add del">
-        <pc:chgData name="Daniel Cregg" userId="a4417ebc-d1f9-4266-8a6c-2c7f21bbea7f" providerId="ADAL" clId="{B41FF6A5-8EE3-453F-9467-07EDEFDD4E20}" dt="2026-09-27T22:28:58.847" v="375"/>
-        <pc:sldMkLst>
-          <pc:docMk/>
-          <pc:sldMk cId="1656956654" sldId="397"/>
         </pc:sldMkLst>
       </pc:sldChg>
       <pc:sldChg chg="add">
@@ -1614,159 +390,6 @@
         <pc:sldMkLst>
           <pc:docMk/>
           <pc:sldMk cId="2475995927" sldId="400"/>
-        </pc:sldMkLst>
-      </pc:sldChg>
-      <pc:sldChg chg="modSp add del mod">
-        <pc:chgData name="Daniel Cregg" userId="a4417ebc-d1f9-4266-8a6c-2c7f21bbea7f" providerId="ADAL" clId="{B41FF6A5-8EE3-453F-9467-07EDEFDD4E20}" dt="2026-09-27T22:24:37.477" v="291"/>
-        <pc:sldMkLst>
-          <pc:docMk/>
-          <pc:sldMk cId="901174959" sldId="401"/>
-        </pc:sldMkLst>
-        <pc:spChg chg="mod">
-          <ac:chgData name="Daniel Cregg" userId="a4417ebc-d1f9-4266-8a6c-2c7f21bbea7f" providerId="ADAL" clId="{B41FF6A5-8EE3-453F-9467-07EDEFDD4E20}" dt="2026-09-27T22:24:25.095" v="289" actId="27636"/>
-          <ac:spMkLst>
-            <pc:docMk/>
-            <pc:sldMk cId="901174959" sldId="401"/>
-            <ac:spMk id="3" creationId="{00000000-0000-0000-0000-000000000000}"/>
-          </ac:spMkLst>
-        </pc:spChg>
-      </pc:sldChg>
-      <pc:sldChg chg="modSp add del mod">
-        <pc:chgData name="Daniel Cregg" userId="a4417ebc-d1f9-4266-8a6c-2c7f21bbea7f" providerId="ADAL" clId="{B41FF6A5-8EE3-453F-9467-07EDEFDD4E20}" dt="2026-09-27T22:24:49.411" v="300"/>
-        <pc:sldMkLst>
-          <pc:docMk/>
-          <pc:sldMk cId="1479460897" sldId="402"/>
-        </pc:sldMkLst>
-        <pc:spChg chg="mod">
-          <ac:chgData name="Daniel Cregg" userId="a4417ebc-d1f9-4266-8a6c-2c7f21bbea7f" providerId="ADAL" clId="{B41FF6A5-8EE3-453F-9467-07EDEFDD4E20}" dt="2026-09-27T22:24:41.029" v="298"/>
-          <ac:spMkLst>
-            <pc:docMk/>
-            <pc:sldMk cId="1479460897" sldId="402"/>
-            <ac:spMk id="3" creationId="{00000000-0000-0000-0000-000000000000}"/>
-          </ac:spMkLst>
-        </pc:spChg>
-        <pc:graphicFrameChg chg="modGraphic">
-          <ac:chgData name="Daniel Cregg" userId="a4417ebc-d1f9-4266-8a6c-2c7f21bbea7f" providerId="ADAL" clId="{B41FF6A5-8EE3-453F-9467-07EDEFDD4E20}" dt="2026-09-27T22:24:37.494" v="296"/>
-          <ac:graphicFrameMkLst>
-            <pc:docMk/>
-            <pc:sldMk cId="1479460897" sldId="402"/>
-            <ac:graphicFrameMk id="4" creationId="{00000000-0000-0000-0000-000000000000}"/>
-          </ac:graphicFrameMkLst>
-        </pc:graphicFrameChg>
-      </pc:sldChg>
-      <pc:sldChg chg="modSp add del mod">
-        <pc:chgData name="Daniel Cregg" userId="a4417ebc-d1f9-4266-8a6c-2c7f21bbea7f" providerId="ADAL" clId="{B41FF6A5-8EE3-453F-9467-07EDEFDD4E20}" dt="2026-09-27T22:28:45.677" v="358"/>
-        <pc:sldMkLst>
-          <pc:docMk/>
-          <pc:sldMk cId="165372959" sldId="403"/>
-        </pc:sldMkLst>
-        <pc:spChg chg="mod">
-          <ac:chgData name="Daniel Cregg" userId="a4417ebc-d1f9-4266-8a6c-2c7f21bbea7f" providerId="ADAL" clId="{B41FF6A5-8EE3-453F-9467-07EDEFDD4E20}" dt="2026-09-27T22:24:49.427" v="301" actId="27636"/>
-          <ac:spMkLst>
-            <pc:docMk/>
-            <pc:sldMk cId="165372959" sldId="403"/>
-            <ac:spMk id="3" creationId="{00000000-0000-0000-0000-000000000000}"/>
-          </ac:spMkLst>
-        </pc:spChg>
-      </pc:sldChg>
-      <pc:sldChg chg="modSp add del mod">
-        <pc:chgData name="Daniel Cregg" userId="a4417ebc-d1f9-4266-8a6c-2c7f21bbea7f" providerId="ADAL" clId="{B41FF6A5-8EE3-453F-9467-07EDEFDD4E20}" dt="2026-09-27T22:28:45.962" v="365"/>
-        <pc:sldMkLst>
-          <pc:docMk/>
-          <pc:sldMk cId="2778165835" sldId="404"/>
-        </pc:sldMkLst>
-        <pc:spChg chg="mod">
-          <ac:chgData name="Daniel Cregg" userId="a4417ebc-d1f9-4266-8a6c-2c7f21bbea7f" providerId="ADAL" clId="{B41FF6A5-8EE3-453F-9467-07EDEFDD4E20}" dt="2026-09-27T22:25:47.559" v="304"/>
-          <ac:spMkLst>
-            <pc:docMk/>
-            <pc:sldMk cId="2778165835" sldId="404"/>
-            <ac:spMk id="20" creationId="{00000000-0000-0000-0000-000000000000}"/>
-          </ac:spMkLst>
-        </pc:spChg>
-        <pc:spChg chg="mod">
-          <ac:chgData name="Daniel Cregg" userId="a4417ebc-d1f9-4266-8a6c-2c7f21bbea7f" providerId="ADAL" clId="{B41FF6A5-8EE3-453F-9467-07EDEFDD4E20}" dt="2026-09-27T22:25:47.559" v="306"/>
-          <ac:spMkLst>
-            <pc:docMk/>
-            <pc:sldMk cId="2778165835" sldId="404"/>
-            <ac:spMk id="21" creationId="{00000000-0000-0000-0000-000000000000}"/>
-          </ac:spMkLst>
-        </pc:spChg>
-        <pc:spChg chg="mod">
-          <ac:chgData name="Daniel Cregg" userId="a4417ebc-d1f9-4266-8a6c-2c7f21bbea7f" providerId="ADAL" clId="{B41FF6A5-8EE3-453F-9467-07EDEFDD4E20}" dt="2026-09-27T22:25:47.559" v="308"/>
-          <ac:spMkLst>
-            <pc:docMk/>
-            <pc:sldMk cId="2778165835" sldId="404"/>
-            <ac:spMk id="22" creationId="{00000000-0000-0000-0000-000000000000}"/>
-          </ac:spMkLst>
-        </pc:spChg>
-        <pc:spChg chg="mod">
-          <ac:chgData name="Daniel Cregg" userId="a4417ebc-d1f9-4266-8a6c-2c7f21bbea7f" providerId="ADAL" clId="{B41FF6A5-8EE3-453F-9467-07EDEFDD4E20}" dt="2026-09-27T22:25:47.559" v="310"/>
-          <ac:spMkLst>
-            <pc:docMk/>
-            <pc:sldMk cId="2778165835" sldId="404"/>
-            <ac:spMk id="23" creationId="{00000000-0000-0000-0000-000000000000}"/>
-          </ac:spMkLst>
-        </pc:spChg>
-        <pc:spChg chg="mod">
-          <ac:chgData name="Daniel Cregg" userId="a4417ebc-d1f9-4266-8a6c-2c7f21bbea7f" providerId="ADAL" clId="{B41FF6A5-8EE3-453F-9467-07EDEFDD4E20}" dt="2026-09-27T22:25:47.559" v="312"/>
-          <ac:spMkLst>
-            <pc:docMk/>
-            <pc:sldMk cId="2778165835" sldId="404"/>
-            <ac:spMk id="24" creationId="{00000000-0000-0000-0000-000000000000}"/>
-          </ac:spMkLst>
-        </pc:spChg>
-        <pc:spChg chg="mod">
-          <ac:chgData name="Daniel Cregg" userId="a4417ebc-d1f9-4266-8a6c-2c7f21bbea7f" providerId="ADAL" clId="{B41FF6A5-8EE3-453F-9467-07EDEFDD4E20}" dt="2026-09-27T22:25:47.559" v="313"/>
-          <ac:spMkLst>
-            <pc:docMk/>
-            <pc:sldMk cId="2778165835" sldId="404"/>
-            <ac:spMk id="30" creationId="{00000000-0000-0000-0000-000000000000}"/>
-          </ac:spMkLst>
-        </pc:spChg>
-      </pc:sldChg>
-      <pc:sldChg chg="add del">
-        <pc:chgData name="Daniel Cregg" userId="a4417ebc-d1f9-4266-8a6c-2c7f21bbea7f" providerId="ADAL" clId="{B41FF6A5-8EE3-453F-9467-07EDEFDD4E20}" dt="2026-09-27T22:26:23.976" v="317"/>
-        <pc:sldMkLst>
-          <pc:docMk/>
-          <pc:sldMk cId="2582848629" sldId="405"/>
-        </pc:sldMkLst>
-      </pc:sldChg>
-      <pc:sldChg chg="modSp add del mod">
-        <pc:chgData name="Daniel Cregg" userId="a4417ebc-d1f9-4266-8a6c-2c7f21bbea7f" providerId="ADAL" clId="{B41FF6A5-8EE3-453F-9467-07EDEFDD4E20}" dt="2026-09-27T22:26:42.997" v="324"/>
-        <pc:sldMkLst>
-          <pc:docMk/>
-          <pc:sldMk cId="3817257035" sldId="406"/>
-        </pc:sldMkLst>
-        <pc:spChg chg="mod">
-          <ac:chgData name="Daniel Cregg" userId="a4417ebc-d1f9-4266-8a6c-2c7f21bbea7f" providerId="ADAL" clId="{B41FF6A5-8EE3-453F-9467-07EDEFDD4E20}" dt="2026-09-27T22:26:41.842" v="319"/>
-          <ac:spMkLst>
-            <pc:docMk/>
-            <pc:sldMk cId="3817257035" sldId="406"/>
-            <ac:spMk id="20" creationId="{00000000-0000-0000-0000-000000000000}"/>
-          </ac:spMkLst>
-        </pc:spChg>
-        <pc:spChg chg="mod">
-          <ac:chgData name="Daniel Cregg" userId="a4417ebc-d1f9-4266-8a6c-2c7f21bbea7f" providerId="ADAL" clId="{B41FF6A5-8EE3-453F-9467-07EDEFDD4E20}" dt="2026-09-27T22:26:41.842" v="321"/>
-          <ac:spMkLst>
-            <pc:docMk/>
-            <pc:sldMk cId="3817257035" sldId="406"/>
-            <ac:spMk id="21" creationId="{00000000-0000-0000-0000-000000000000}"/>
-          </ac:spMkLst>
-        </pc:spChg>
-        <pc:spChg chg="mod">
-          <ac:chgData name="Daniel Cregg" userId="a4417ebc-d1f9-4266-8a6c-2c7f21bbea7f" providerId="ADAL" clId="{B41FF6A5-8EE3-453F-9467-07EDEFDD4E20}" dt="2026-09-27T22:26:41.842" v="322"/>
-          <ac:spMkLst>
-            <pc:docMk/>
-            <pc:sldMk cId="3817257035" sldId="406"/>
-            <ac:spMk id="22" creationId="{00000000-0000-0000-0000-000000000000}"/>
-          </ac:spMkLst>
-        </pc:spChg>
-      </pc:sldChg>
-      <pc:sldChg chg="add del">
-        <pc:chgData name="Daniel Cregg" userId="a4417ebc-d1f9-4266-8a6c-2c7f21bbea7f" providerId="ADAL" clId="{B41FF6A5-8EE3-453F-9467-07EDEFDD4E20}" dt="2026-09-27T22:28:46.277" v="367"/>
-        <pc:sldMkLst>
-          <pc:docMk/>
-          <pc:sldMk cId="3040464854" sldId="407"/>
         </pc:sldMkLst>
       </pc:sldChg>
       <pc:sldChg chg="modSp add mod">
@@ -1915,27 +538,6 @@
           <pc:sldMk cId="55257993" sldId="421"/>
         </pc:sldMkLst>
       </pc:sldChg>
-      <pc:sldChg chg="add del">
-        <pc:chgData name="Daniel Cregg" userId="a4417ebc-d1f9-4266-8a6c-2c7f21bbea7f" providerId="ADAL" clId="{B41FF6A5-8EE3-453F-9467-07EDEFDD4E20}" dt="2026-09-27T22:28:58.445" v="371"/>
-        <pc:sldMkLst>
-          <pc:docMk/>
-          <pc:sldMk cId="80132178" sldId="422"/>
-        </pc:sldMkLst>
-      </pc:sldChg>
-      <pc:sldChg chg="add del">
-        <pc:chgData name="Daniel Cregg" userId="a4417ebc-d1f9-4266-8a6c-2c7f21bbea7f" providerId="ADAL" clId="{B41FF6A5-8EE3-453F-9467-07EDEFDD4E20}" dt="2026-09-27T22:29:11.454" v="404"/>
-        <pc:sldMkLst>
-          <pc:docMk/>
-          <pc:sldMk cId="2602896841" sldId="423"/>
-        </pc:sldMkLst>
-      </pc:sldChg>
-      <pc:sldChg chg="add del">
-        <pc:chgData name="Daniel Cregg" userId="a4417ebc-d1f9-4266-8a6c-2c7f21bbea7f" providerId="ADAL" clId="{B41FF6A5-8EE3-453F-9467-07EDEFDD4E20}" dt="2026-09-27T22:29:36.128" v="408"/>
-        <pc:sldMkLst>
-          <pc:docMk/>
-          <pc:sldMk cId="455886663" sldId="424"/>
-        </pc:sldMkLst>
-      </pc:sldChg>
       <pc:sldChg chg="add">
         <pc:chgData name="Daniel Cregg" userId="a4417ebc-d1f9-4266-8a6c-2c7f21bbea7f" providerId="ADAL" clId="{B41FF6A5-8EE3-453F-9467-07EDEFDD4E20}" dt="2026-09-27T22:28:58.611" v="372"/>
         <pc:sldMkLst>
@@ -1950,12 +552,20 @@
           <pc:sldMk cId="103475406" sldId="426"/>
         </pc:sldMkLst>
       </pc:sldChg>
-      <pc:sldChg chg="add">
-        <pc:chgData name="Daniel Cregg" userId="a4417ebc-d1f9-4266-8a6c-2c7f21bbea7f" providerId="ADAL" clId="{B41FF6A5-8EE3-453F-9467-07EDEFDD4E20}" dt="2026-09-27T22:28:59.127" v="376"/>
+      <pc:sldChg chg="modSp add del mod">
+        <pc:chgData name="Daniel Cregg" userId="a4417ebc-d1f9-4266-8a6c-2c7f21bbea7f" providerId="ADAL" clId="{B41FF6A5-8EE3-453F-9467-07EDEFDD4E20}" dt="2026-10-01T12:02:02.934" v="415"/>
         <pc:sldMkLst>
           <pc:docMk/>
           <pc:sldMk cId="2301890488" sldId="427"/>
         </pc:sldMkLst>
+        <pc:spChg chg="mod">
+          <ac:chgData name="Daniel Cregg" userId="a4417ebc-d1f9-4266-8a6c-2c7f21bbea7f" providerId="ADAL" clId="{B41FF6A5-8EE3-453F-9467-07EDEFDD4E20}" dt="2026-10-01T12:00:09.932" v="413" actId="20577"/>
+          <ac:spMkLst>
+            <pc:docMk/>
+            <pc:sldMk cId="2301890488" sldId="427"/>
+            <ac:spMk id="6" creationId="{00000000-0000-0000-0000-000000000000}"/>
+          </ac:spMkLst>
+        </pc:spChg>
       </pc:sldChg>
       <pc:sldChg chg="add">
         <pc:chgData name="Daniel Cregg" userId="a4417ebc-d1f9-4266-8a6c-2c7f21bbea7f" providerId="ADAL" clId="{B41FF6A5-8EE3-453F-9467-07EDEFDD4E20}" dt="2026-09-27T22:28:59.429" v="378"/>
@@ -1969,13 +579,6 @@
         <pc:sldMkLst>
           <pc:docMk/>
           <pc:sldMk cId="4111627653" sldId="429"/>
-        </pc:sldMkLst>
-      </pc:sldChg>
-      <pc:sldChg chg="add del">
-        <pc:chgData name="Daniel Cregg" userId="a4417ebc-d1f9-4266-8a6c-2c7f21bbea7f" providerId="ADAL" clId="{B41FF6A5-8EE3-453F-9467-07EDEFDD4E20}" dt="2026-09-27T22:29:09.444" v="385"/>
-        <pc:sldMkLst>
-          <pc:docMk/>
-          <pc:sldMk cId="436564950" sldId="430"/>
         </pc:sldMkLst>
       </pc:sldChg>
       <pc:sldChg chg="add">
@@ -2063,6 +666,49 @@
         <pc:sldMkLst>
           <pc:docMk/>
           <pc:sldMk cId="3385643009" sldId="439"/>
+        </pc:sldMkLst>
+      </pc:sldChg>
+      <pc:sldChg chg="add">
+        <pc:chgData name="Daniel Cregg" userId="a4417ebc-d1f9-4266-8a6c-2c7f21bbea7f" providerId="ADAL" clId="{B41FF6A5-8EE3-453F-9467-07EDEFDD4E20}" dt="2026-10-01T12:02:02.922" v="414"/>
+        <pc:sldMkLst>
+          <pc:docMk/>
+          <pc:sldMk cId="1613322525" sldId="440"/>
+        </pc:sldMkLst>
+      </pc:sldChg>
+      <pc:sldChg chg="modSp add del mod">
+        <pc:chgData name="Daniel Cregg" userId="a4417ebc-d1f9-4266-8a6c-2c7f21bbea7f" providerId="ADAL" clId="{B41FF6A5-8EE3-453F-9467-07EDEFDD4E20}" dt="2026-10-01T12:04:02.954" v="420"/>
+        <pc:sldMkLst>
+          <pc:docMk/>
+          <pc:sldMk cId="389852624" sldId="441"/>
+        </pc:sldMkLst>
+        <pc:spChg chg="mod">
+          <ac:chgData name="Daniel Cregg" userId="a4417ebc-d1f9-4266-8a6c-2c7f21bbea7f" providerId="ADAL" clId="{B41FF6A5-8EE3-453F-9467-07EDEFDD4E20}" dt="2026-10-01T12:02:10.556" v="418" actId="27636"/>
+          <ac:spMkLst>
+            <pc:docMk/>
+            <pc:sldMk cId="389852624" sldId="441"/>
+            <ac:spMk id="3" creationId="{00000000-0000-0000-0000-000000000000}"/>
+          </ac:spMkLst>
+        </pc:spChg>
+      </pc:sldChg>
+      <pc:sldChg chg="add del">
+        <pc:chgData name="Daniel Cregg" userId="a4417ebc-d1f9-4266-8a6c-2c7f21bbea7f" providerId="ADAL" clId="{B41FF6A5-8EE3-453F-9467-07EDEFDD4E20}" dt="2026-10-01T12:04:33.369" v="422"/>
+        <pc:sldMkLst>
+          <pc:docMk/>
+          <pc:sldMk cId="3281664765" sldId="442"/>
+        </pc:sldMkLst>
+      </pc:sldChg>
+      <pc:sldChg chg="add del">
+        <pc:chgData name="Daniel Cregg" userId="a4417ebc-d1f9-4266-8a6c-2c7f21bbea7f" providerId="ADAL" clId="{B41FF6A5-8EE3-453F-9467-07EDEFDD4E20}" dt="2026-10-01T12:04:59.192" v="424"/>
+        <pc:sldMkLst>
+          <pc:docMk/>
+          <pc:sldMk cId="2514844320" sldId="443"/>
+        </pc:sldMkLst>
+      </pc:sldChg>
+      <pc:sldChg chg="add">
+        <pc:chgData name="Daniel Cregg" userId="a4417ebc-d1f9-4266-8a6c-2c7f21bbea7f" providerId="ADAL" clId="{B41FF6A5-8EE3-453F-9467-07EDEFDD4E20}" dt="2026-10-01T12:04:59.181" v="423"/>
+        <pc:sldMkLst>
+          <pc:docMk/>
+          <pc:sldMk cId="1001327257" sldId="444"/>
         </pc:sldMkLst>
       </pc:sldChg>
     </pc:docChg>
@@ -3720,7 +2366,7 @@
           <a:p>
             <a:fld id="{44A5CEE2-6E65-48D0-90B9-EB2BBC28F974}" type="datetimeFigureOut">
               <a:rPr lang="en-IE" smtClean="0"/>
-              <a:t>27/09/2026</a:t>
+              <a:t>01/10/2026</a:t>
             </a:fld>
             <a:endParaRPr lang="en-IE"/>
           </a:p>
@@ -4235,7 +2881,7 @@
           <a:p>
             <a:fld id="{44A5CEE2-6E65-48D0-90B9-EB2BBC28F974}" type="datetimeFigureOut">
               <a:rPr lang="en-IE" smtClean="0"/>
-              <a:t>27/09/2026</a:t>
+              <a:t>01/10/2026</a:t>
             </a:fld>
             <a:endParaRPr lang="en-IE"/>
           </a:p>
@@ -4445,7 +3091,7 @@
           <a:p>
             <a:fld id="{44A5CEE2-6E65-48D0-90B9-EB2BBC28F974}" type="datetimeFigureOut">
               <a:rPr lang="en-IE" smtClean="0"/>
-              <a:t>27/09/2026</a:t>
+              <a:t>01/10/2026</a:t>
             </a:fld>
             <a:endParaRPr lang="en-IE"/>
           </a:p>
@@ -4655,7 +3301,7 @@
           <a:p>
             <a:fld id="{44A5CEE2-6E65-48D0-90B9-EB2BBC28F974}" type="datetimeFigureOut">
               <a:rPr lang="en-IE" smtClean="0"/>
-              <a:t>27/09/2026</a:t>
+              <a:t>01/10/2026</a:t>
             </a:fld>
             <a:endParaRPr lang="en-IE"/>
           </a:p>
@@ -4930,7 +3576,7 @@
           <a:p>
             <a:fld id="{44A5CEE2-6E65-48D0-90B9-EB2BBC28F974}" type="datetimeFigureOut">
               <a:rPr lang="en-IE" smtClean="0"/>
-              <a:t>27/09/2026</a:t>
+              <a:t>01/10/2026</a:t>
             </a:fld>
             <a:endParaRPr lang="en-IE"/>
           </a:p>
@@ -5483,7 +4129,7 @@
           <a:p>
             <a:fld id="{44A5CEE2-6E65-48D0-90B9-EB2BBC28F974}" type="datetimeFigureOut">
               <a:rPr lang="en-IE" smtClean="0"/>
-              <a:t>27/09/2026</a:t>
+              <a:t>01/10/2026</a:t>
             </a:fld>
             <a:endParaRPr lang="en-IE"/>
           </a:p>
@@ -5908,7 +4554,7 @@
           <a:p>
             <a:fld id="{44A5CEE2-6E65-48D0-90B9-EB2BBC28F974}" type="datetimeFigureOut">
               <a:rPr lang="en-IE" smtClean="0"/>
-              <a:t>27/09/2026</a:t>
+              <a:t>01/10/2026</a:t>
             </a:fld>
             <a:endParaRPr lang="en-IE"/>
           </a:p>
@@ -6050,7 +4696,7 @@
           <a:p>
             <a:fld id="{44A5CEE2-6E65-48D0-90B9-EB2BBC28F974}" type="datetimeFigureOut">
               <a:rPr lang="en-IE" smtClean="0"/>
-              <a:t>27/09/2026</a:t>
+              <a:t>01/10/2026</a:t>
             </a:fld>
             <a:endParaRPr lang="en-IE"/>
           </a:p>
@@ -6163,7 +4809,7 @@
           <a:p>
             <a:fld id="{44A5CEE2-6E65-48D0-90B9-EB2BBC28F974}" type="datetimeFigureOut">
               <a:rPr lang="en-IE" smtClean="0"/>
-              <a:t>27/09/2026</a:t>
+              <a:t>01/10/2026</a:t>
             </a:fld>
             <a:endParaRPr lang="en-IE"/>
           </a:p>
@@ -6476,7 +5122,7 @@
           <a:p>
             <a:fld id="{44A5CEE2-6E65-48D0-90B9-EB2BBC28F974}" type="datetimeFigureOut">
               <a:rPr lang="en-IE" smtClean="0"/>
-              <a:t>27/09/2026</a:t>
+              <a:t>01/10/2026</a:t>
             </a:fld>
             <a:endParaRPr lang="en-IE"/>
           </a:p>
@@ -6765,7 +5411,7 @@
           <a:p>
             <a:fld id="{44A5CEE2-6E65-48D0-90B9-EB2BBC28F974}" type="datetimeFigureOut">
               <a:rPr lang="en-IE" smtClean="0"/>
-              <a:t>27/09/2026</a:t>
+              <a:t>01/10/2026</a:t>
             </a:fld>
             <a:endParaRPr lang="en-IE"/>
           </a:p>
@@ -7008,7 +5654,7 @@
           <a:p>
             <a:fld id="{44A5CEE2-6E65-48D0-90B9-EB2BBC28F974}" type="datetimeFigureOut">
               <a:rPr lang="en-IE" smtClean="0"/>
-              <a:t>27/09/2026</a:t>
+              <a:t>01/10/2026</a:t>
             </a:fld>
             <a:endParaRPr lang="en-IE"/>
           </a:p>
@@ -10156,7 +8802,7 @@
         </p:xfrm>
         <a:graphic>
           <a:graphicData uri="http://schemas.openxmlformats.org/drawingml/2006/chart">
-            <c:chart xmlns:c="http://schemas.openxmlformats.org/drawingml/2006/chart" xmlns:r="http://schemas.openxmlformats.org/officeDocument/2006/relationships" r:id="rId3"/>
+            <c:chart xmlns:c="http://schemas.openxmlformats.org/drawingml/2006/chart" xmlns:r="http://schemas.openxmlformats.org/officeDocument/2006/relationships" r:id="rId2"/>
           </a:graphicData>
         </a:graphic>
       </p:graphicFrame>
@@ -11788,7 +10434,7 @@
         </p:xfrm>
         <a:graphic>
           <a:graphicData uri="http://schemas.openxmlformats.org/drawingml/2006/chart">
-            <c:chart xmlns:c="http://schemas.openxmlformats.org/drawingml/2006/chart" xmlns:r="http://schemas.openxmlformats.org/officeDocument/2006/relationships" r:id="rId3"/>
+            <c:chart xmlns:c="http://schemas.openxmlformats.org/drawingml/2006/chart" xmlns:r="http://schemas.openxmlformats.org/officeDocument/2006/relationships" r:id="rId2"/>
           </a:graphicData>
         </a:graphic>
       </p:graphicFrame>
@@ -16612,7 +15258,7 @@
             <a:p>
               <a:pPr algn="l"/>
               <a:r>
-                <a:rPr sz="1400" b="1">
+                <a:rPr sz="1400" b="1" dirty="0">
                   <a:solidFill>
                     <a:schemeClr val="accent1"/>
                   </a:solidFill>
@@ -16623,12 +15269,28 @@
             <a:p>
               <a:pPr algn="l"/>
               <a:r>
-                <a:rPr sz="2000">
+                <a:rPr sz="2000" dirty="0">
                   <a:solidFill>
                     <a:schemeClr val="tx1"/>
                   </a:solidFill>
                 </a:rPr>
-                <a:t>Both orders appear often in the model's training data</a:t>
+                <a:t>Both </a:t>
+              </a:r>
+              <a:r>
+                <a:rPr lang="en-US" sz="2000" dirty="0">
+                  <a:solidFill>
+                    <a:schemeClr val="tx1"/>
+                  </a:solidFill>
+                </a:rPr>
+                <a:t>date </a:t>
+              </a:r>
+              <a:r>
+                <a:rPr sz="2000" dirty="0">
+                  <a:solidFill>
+                    <a:schemeClr val="tx1"/>
+                  </a:solidFill>
+                </a:rPr>
+                <a:t>orders appear often in the model's training data</a:t>
               </a:r>
             </a:p>
           </p:txBody>
@@ -16679,7 +15341,7 @@
             <a:p>
               <a:pPr algn="l"/>
               <a:r>
-                <a:rPr sz="1400" b="1">
+                <a:rPr sz="1400" b="1" dirty="0">
                   <a:solidFill>
                     <a:schemeClr val="accent1"/>
                   </a:solidFill>
@@ -16690,7 +15352,7 @@
             <a:p>
               <a:pPr algn="l"/>
               <a:r>
-                <a:rPr sz="2000">
+                <a:rPr sz="2000" dirty="0">
                   <a:solidFill>
                     <a:schemeClr val="tx1"/>
                   </a:solidFill>
@@ -16983,12 +15645,12 @@
               </a:lnSpc>
             </a:pPr>
             <a:r>
-              <a:rPr sz="2000">
+              <a:rPr lang="en-US" sz="2000" dirty="0">
                 <a:solidFill>
                   <a:schemeClr val="tx1"/>
                 </a:solidFill>
               </a:rPr>
-              <a:t>So a vague prompt's guesses always look reasonable, which makes the wrong ones hard to spot.</a:t>
+              <a:t>A vague prompt's guesses look reasonable, so the wrong ones are hard to spot. The fix: write the answer down once.</a:t>
             </a:r>
           </a:p>
         </p:txBody>
@@ -16996,7 +15658,7 @@
     </p:spTree>
     <p:extLst>
       <p:ext uri="{BB962C8B-B14F-4D97-AF65-F5344CB8AC3E}">
-        <p14:creationId xmlns:p14="http://schemas.microsoft.com/office/powerpoint/2010/main" val="2301890488"/>
+        <p14:creationId xmlns:p14="http://schemas.microsoft.com/office/powerpoint/2010/main" val="1613322525"/>
       </p:ext>
     </p:extLst>
   </p:cSld>
@@ -17172,7 +15834,7 @@
           <a:lstStyle/>
           <a:p>
             <a:r>
-              <a:t>Context you write once</a:t>
+              <a:t>Write the rule once, in a project file</a:t>
             </a:r>
           </a:p>
         </p:txBody>
@@ -17186,7 +15848,7 @@
         <p:spPr>
           <a:xfrm>
             <a:off x="1143000" y="1508760"/>
-            <a:ext cx="8077200" cy="2011680"/>
+            <a:ext cx="10414000" cy="1778000"/>
           </a:xfrm>
           <a:prstGeom prst="roundRect">
             <a:avLst>
@@ -17230,7 +15892,7 @@
               </a:spcBef>
             </a:pPr>
             <a:r>
-              <a:rPr sz="2400">
+              <a:rPr sz="2000">
                 <a:solidFill>
                   <a:srgbClr val="E8ECF1"/>
                 </a:solidFill>
@@ -17249,7 +15911,7 @@
               </a:spcBef>
             </a:pPr>
             <a:r>
-              <a:rPr sz="2400">
+              <a:rPr sz="2000">
                 <a:solidFill>
                   <a:srgbClr val="7FB4D8"/>
                 </a:solidFill>
@@ -17258,7 +15920,7 @@
               <a:t>-</a:t>
             </a:r>
             <a:r>
-              <a:rPr sz="2400">
+              <a:rPr sz="2000">
                 <a:solidFill>
                   <a:srgbClr val="E8ECF1"/>
                 </a:solidFill>
@@ -17267,7 +15929,7 @@
               <a:t> Python 3.12; run the tests with </a:t>
             </a:r>
             <a:r>
-              <a:rPr sz="2400">
+              <a:rPr sz="2000">
                 <a:solidFill>
                   <a:srgbClr val="F0B26B"/>
                 </a:solidFill>
@@ -17286,7 +15948,7 @@
               </a:spcBef>
             </a:pPr>
             <a:r>
-              <a:rPr sz="2400">
+              <a:rPr sz="2000">
                 <a:solidFill>
                   <a:srgbClr val="7FB4D8"/>
                 </a:solidFill>
@@ -17295,7 +15957,7 @@
               <a:t>-</a:t>
             </a:r>
             <a:r>
-              <a:rPr sz="2400">
+              <a:rPr sz="2000">
                 <a:solidFill>
                   <a:srgbClr val="E8ECF1"/>
                 </a:solidFill>
@@ -17314,7 +15976,7 @@
               </a:spcBef>
             </a:pPr>
             <a:r>
-              <a:rPr sz="2400">
+              <a:rPr sz="2000">
                 <a:solidFill>
                   <a:srgbClr val="7FB4D8"/>
                 </a:solidFill>
@@ -17323,7 +15985,7 @@
               <a:t>-</a:t>
             </a:r>
             <a:r>
-              <a:rPr sz="2400">
+              <a:rPr sz="2000">
                 <a:solidFill>
                   <a:srgbClr val="E8ECF1"/>
                 </a:solidFill>
@@ -17342,7 +16004,7 @@
               </a:spcBef>
             </a:pPr>
             <a:r>
-              <a:rPr sz="2400">
+              <a:rPr sz="2000">
                 <a:solidFill>
                   <a:srgbClr val="7FB4D8"/>
                 </a:solidFill>
@@ -17351,7 +16013,7 @@
               <a:t>-</a:t>
             </a:r>
             <a:r>
-              <a:rPr sz="2400">
+              <a:rPr sz="2000">
                 <a:solidFill>
                   <a:srgbClr val="E8ECF1"/>
                 </a:solidFill>
@@ -17364,66 +16026,327 @@
       </p:sp>
       <p:sp>
         <p:nvSpPr>
-          <p:cNvPr id="3" name="Content Placeholder 2"/>
-          <p:cNvSpPr>
-            <a:spLocks noGrp="1"/>
-          </p:cNvSpPr>
-          <p:nvPr>
-            <p:ph idx="1"/>
-          </p:nvPr>
+          <p:cNvPr id="5" name="Card What it is"/>
+          <p:cNvSpPr/>
+          <p:nvPr/>
         </p:nvSpPr>
         <p:spPr>
           <a:xfrm>
-            <a:off x="1051560" y="3703320"/>
-            <a:ext cx="10591800" cy="1905000"/>
+            <a:off x="1143000" y="3543300"/>
+            <a:ext cx="2870200" cy="1752600"/>
           </a:xfrm>
+          <a:prstGeom prst="roundRect">
+            <a:avLst>
+              <a:gd name="adj" fmla="val 7720"/>
+            </a:avLst>
+          </a:prstGeom>
+          <a:noFill/>
+          <a:ln w="19050">
+            <a:solidFill>
+              <a:schemeClr val="accent1"/>
+            </a:solidFill>
+          </a:ln>
+          <a:effectLst/>
         </p:spPr>
+        <p:style>
+          <a:lnRef idx="1">
+            <a:schemeClr val="accent1"/>
+          </a:lnRef>
+          <a:fillRef idx="0">
+            <a:schemeClr val="accent1"/>
+          </a:fillRef>
+          <a:effectRef idx="0">
+            <a:schemeClr val="accent1"/>
+          </a:effectRef>
+          <a:fontRef idx="minor">
+            <a:schemeClr val="tx1"/>
+          </a:fontRef>
+        </p:style>
         <p:txBody>
-          <a:bodyPr>
-            <a:normAutofit/>
+          <a:bodyPr wrap="square" lIns="152400" tIns="109728" rIns="152400" bIns="91440" rtlCol="0" anchor="t">
+            <a:noAutofit/>
           </a:bodyPr>
           <a:lstStyle/>
           <a:p>
-            <a:r>
-              <a:rPr lang="en-US"/>
-              <a:t>Most coding assistants add one of these files to </a:t>
-            </a:r>
-            <a:r>
-              <a:rPr b="1"/>
-              <a:t>every</a:t>
-            </a:r>
-            <a:r>
-              <a:rPr lang="en-US"/>
-              <a:t> request: AGENTS.md, CLAUDE.md, .github/copilot-instructions.md</a:t>
-            </a:r>
-          </a:p>
-          <a:p>
-            <a:r>
-              <a:rPr lang="en-US"/>
-              <a:t>Keep it short and up to date: the model follows an outdated rule just as strictly as a correct one</a:t>
-            </a:r>
-          </a:p>
-          <a:p>
-            <a:pPr marL="0" indent="0">
-              <a:buNone/>
+            <a:pPr algn="l">
+              <a:spcAft>
+                <a:spcPts val="400"/>
+              </a:spcAft>
             </a:pPr>
             <a:r>
-              <a:rPr sz="1400" b="1">
-                <a:solidFill>
-                  <a:schemeClr val="accent2"/>
+              <a:rPr lang="en-US" sz="2000" b="1" dirty="0">
+                <a:solidFill>
+                  <a:schemeClr val="accent1"/>
+                </a:solidFill>
+              </a:rPr>
+              <a:t>What it is</a:t>
+            </a:r>
+          </a:p>
+          <a:p>
+            <a:pPr algn="l"/>
+            <a:r>
+              <a:rPr lang="en-US" sz="1800" dirty="0">
+                <a:solidFill>
+                  <a:schemeClr val="tx1"/>
+                </a:solidFill>
+              </a:rPr>
+              <a:t>Plain text in your project. The assistant reads it with every request.</a:t>
+            </a:r>
+          </a:p>
+        </p:txBody>
+      </p:sp>
+      <p:sp>
+        <p:nvSpPr>
+          <p:cNvPr id="6" name="Card What goes in it"/>
+          <p:cNvSpPr/>
+          <p:nvPr/>
+        </p:nvSpPr>
+        <p:spPr>
+          <a:xfrm>
+            <a:off x="4318000" y="3543300"/>
+            <a:ext cx="2870200" cy="1752600"/>
+          </a:xfrm>
+          <a:prstGeom prst="roundRect">
+            <a:avLst>
+              <a:gd name="adj" fmla="val 7720"/>
+            </a:avLst>
+          </a:prstGeom>
+          <a:noFill/>
+          <a:ln w="19050">
+            <a:solidFill>
+              <a:schemeClr val="accent1"/>
+            </a:solidFill>
+          </a:ln>
+          <a:effectLst/>
+        </p:spPr>
+        <p:style>
+          <a:lnRef idx="1">
+            <a:schemeClr val="accent1"/>
+          </a:lnRef>
+          <a:fillRef idx="0">
+            <a:schemeClr val="accent1"/>
+          </a:fillRef>
+          <a:effectRef idx="0">
+            <a:schemeClr val="accent1"/>
+          </a:effectRef>
+          <a:fontRef idx="minor">
+            <a:schemeClr val="tx1"/>
+          </a:fontRef>
+        </p:style>
+        <p:txBody>
+          <a:bodyPr wrap="square" lIns="152400" tIns="109728" rIns="152400" bIns="91440" rtlCol="0" anchor="t">
+            <a:noAutofit/>
+          </a:bodyPr>
+          <a:lstStyle/>
+          <a:p>
+            <a:pPr algn="l">
+              <a:spcAft>
+                <a:spcPts val="400"/>
+              </a:spcAft>
+            </a:pPr>
+            <a:r>
+              <a:rPr lang="en-US" sz="2000" b="1" dirty="0">
+                <a:solidFill>
+                  <a:schemeClr val="accent1"/>
+                </a:solidFill>
+              </a:rPr>
+              <a:t>What goes in it</a:t>
+            </a:r>
+          </a:p>
+          <a:p>
+            <a:pPr algn="l"/>
+            <a:r>
+              <a:rPr lang="en-US" sz="1800" dirty="0">
+                <a:solidFill>
+                  <a:schemeClr val="tx1"/>
+                </a:solidFill>
+              </a:rPr>
+              <a:t>Rules you keep retyping: commands, formats, limits, things to avoid.</a:t>
+            </a:r>
+          </a:p>
+        </p:txBody>
+      </p:sp>
+      <p:sp>
+        <p:nvSpPr>
+          <p:cNvPr id="7" name="Card What it is called"/>
+          <p:cNvSpPr/>
+          <p:nvPr/>
+        </p:nvSpPr>
+        <p:spPr>
+          <a:xfrm>
+            <a:off x="7493000" y="3543300"/>
+            <a:ext cx="4064000" cy="1752600"/>
+          </a:xfrm>
+          <a:prstGeom prst="roundRect">
+            <a:avLst>
+              <a:gd name="adj" fmla="val 7720"/>
+            </a:avLst>
+          </a:prstGeom>
+          <a:noFill/>
+          <a:ln w="19050">
+            <a:solidFill>
+              <a:schemeClr val="accent1"/>
+            </a:solidFill>
+          </a:ln>
+          <a:effectLst/>
+        </p:spPr>
+        <p:style>
+          <a:lnRef idx="1">
+            <a:schemeClr val="accent1"/>
+          </a:lnRef>
+          <a:fillRef idx="0">
+            <a:schemeClr val="accent1"/>
+          </a:fillRef>
+          <a:effectRef idx="0">
+            <a:schemeClr val="accent1"/>
+          </a:effectRef>
+          <a:fontRef idx="minor">
+            <a:schemeClr val="tx1"/>
+          </a:fontRef>
+        </p:style>
+        <p:txBody>
+          <a:bodyPr wrap="square" lIns="152400" tIns="109728" rIns="152400" bIns="91440" rtlCol="0" anchor="t">
+            <a:noAutofit/>
+          </a:bodyPr>
+          <a:lstStyle/>
+          <a:p>
+            <a:pPr algn="l">
+              <a:spcAft>
+                <a:spcPts val="400"/>
+              </a:spcAft>
+            </a:pPr>
+            <a:r>
+              <a:rPr lang="en-US" sz="2000" b="1" dirty="0">
+                <a:solidFill>
+                  <a:schemeClr val="accent1"/>
+                </a:solidFill>
+              </a:rPr>
+              <a:t>What it is called</a:t>
+            </a:r>
+          </a:p>
+          <a:p>
+            <a:pPr algn="l"/>
+            <a:r>
+              <a:rPr lang="en-US" sz="1800" dirty="0">
+                <a:solidFill>
+                  <a:schemeClr val="tx1"/>
+                </a:solidFill>
+              </a:rPr>
+              <a:t>It depends on the tool:</a:t>
+            </a:r>
+          </a:p>
+          <a:p>
+            <a:pPr algn="l"/>
+            <a:r>
+              <a:rPr lang="en-US" sz="1600" dirty="0">
+                <a:solidFill>
+                  <a:schemeClr val="tx1"/>
                 </a:solidFill>
                 <a:latin typeface="Consolas"/>
               </a:rPr>
-              <a:t>//</a:t>
-            </a:r>
-            <a:r>
-              <a:rPr sz="1400">
-                <a:solidFill>
-                  <a:schemeClr val="tx2"/>
+              <a:t>AGENTS.md</a:t>
+            </a:r>
+          </a:p>
+          <a:p>
+            <a:pPr algn="l"/>
+            <a:r>
+              <a:rPr lang="en-US" sz="1600" dirty="0">
+                <a:solidFill>
+                  <a:schemeClr val="tx1"/>
                 </a:solidFill>
                 <a:latin typeface="Consolas"/>
               </a:rPr>
-              <a:t> anything you keep typing into every prompt belongs in this file</a:t>
+              <a:t>CLAUDE.md</a:t>
+            </a:r>
+          </a:p>
+          <a:p>
+            <a:pPr algn="l"/>
+            <a:r>
+              <a:rPr lang="en-US" sz="1600" dirty="0">
+                <a:solidFill>
+                  <a:schemeClr val="tx1"/>
+                </a:solidFill>
+                <a:latin typeface="Consolas"/>
+              </a:rPr>
+              <a:t>.github/copilot-instructions.md</a:t>
+            </a:r>
+          </a:p>
+        </p:txBody>
+      </p:sp>
+      <p:sp>
+        <p:nvSpPr>
+          <p:cNvPr id="8" name="Callout 8" descr="Callout"/>
+          <p:cNvSpPr/>
+          <p:nvPr/>
+        </p:nvSpPr>
+        <p:spPr>
+          <a:xfrm>
+            <a:off x="1143000" y="5549900"/>
+            <a:ext cx="10414000" cy="838200"/>
+          </a:xfrm>
+          <a:prstGeom prst="roundRect">
+            <a:avLst>
+              <a:gd name="adj" fmla="val 7720"/>
+            </a:avLst>
+          </a:prstGeom>
+          <a:solidFill>
+            <a:schemeClr val="accent2">
+              <a:lumMod val="10000"/>
+              <a:lumOff val="90000"/>
+            </a:schemeClr>
+          </a:solidFill>
+          <a:ln>
+            <a:noFill/>
+          </a:ln>
+          <a:effectLst/>
+        </p:spPr>
+        <p:style>
+          <a:lnRef idx="1">
+            <a:schemeClr val="accent1"/>
+          </a:lnRef>
+          <a:fillRef idx="3">
+            <a:schemeClr val="accent1"/>
+          </a:fillRef>
+          <a:effectRef idx="2">
+            <a:schemeClr val="accent1"/>
+          </a:effectRef>
+          <a:fontRef idx="minor">
+            <a:schemeClr val="lt1"/>
+          </a:fontRef>
+        </p:style>
+        <p:txBody>
+          <a:bodyPr wrap="square" lIns="164592" tIns="109728" rIns="164592" bIns="109728" rtlCol="0" anchor="ctr">
+            <a:noAutofit/>
+          </a:bodyPr>
+          <a:lstStyle/>
+          <a:p>
+            <a:pPr algn="l">
+              <a:lnSpc>
+                <a:spcPct val="100000"/>
+              </a:lnSpc>
+            </a:pPr>
+            <a:r>
+              <a:rPr lang="en-US" sz="2000" b="1" dirty="0">
+                <a:solidFill>
+                  <a:schemeClr val="tx1"/>
+                </a:solidFill>
+              </a:rPr>
+              <a:t>Keep it short and current.</a:t>
+            </a:r>
+          </a:p>
+          <a:p>
+            <a:pPr algn="l">
+              <a:lnSpc>
+                <a:spcPct val="100000"/>
+              </a:lnSpc>
+            </a:pPr>
+            <a:r>
+              <a:rPr lang="en-US" sz="2000" dirty="0">
+                <a:solidFill>
+                  <a:schemeClr val="tx1"/>
+                </a:solidFill>
+              </a:rPr>
+              <a:t>The model follows an outdated rule just as strictly as a correct one.</a:t>
             </a:r>
           </a:p>
         </p:txBody>
@@ -17431,144 +16354,13 @@
     </p:spTree>
     <p:extLst>
       <p:ext uri="{BB962C8B-B14F-4D97-AF65-F5344CB8AC3E}">
-        <p14:creationId xmlns:p14="http://schemas.microsoft.com/office/powerpoint/2010/main" val="4036636308"/>
+        <p14:creationId xmlns:p14="http://schemas.microsoft.com/office/powerpoint/2010/main" val="1001327257"/>
       </p:ext>
     </p:extLst>
   </p:cSld>
   <p:clrMapOvr>
     <a:masterClrMapping/>
   </p:clrMapOvr>
-  <p:timing>
-    <p:tnLst>
-      <p:par>
-        <p:cTn id="1" dur="indefinite" restart="never" nodeType="tmRoot">
-          <p:childTnLst>
-            <p:seq concurrent="1" nextAc="seek">
-              <p:cTn id="2" dur="indefinite" nodeType="mainSeq">
-                <p:childTnLst>
-                  <p:par>
-                    <p:cTn id="3" fill="hold">
-                      <p:stCondLst>
-                        <p:cond delay="indefinite"/>
-                      </p:stCondLst>
-                      <p:childTnLst>
-                        <p:par>
-                          <p:cTn id="4" fill="hold">
-                            <p:stCondLst>
-                              <p:cond delay="0"/>
-                            </p:stCondLst>
-                            <p:childTnLst>
-                              <p:par>
-                                <p:cTn id="5" presetID="1" presetClass="entr" presetSubtype="0" fill="hold" grpId="0" nodeType="clickEffect">
-                                  <p:stCondLst>
-                                    <p:cond delay="0"/>
-                                  </p:stCondLst>
-                                  <p:childTnLst>
-                                    <p:set>
-                                      <p:cBhvr>
-                                        <p:cTn id="6" dur="1" fill="hold">
-                                          <p:stCondLst>
-                                            <p:cond delay="0"/>
-                                          </p:stCondLst>
-                                        </p:cTn>
-                                        <p:tgtEl>
-                                          <p:spTgt spid="3">
-                                            <p:txEl>
-                                              <p:pRg st="0" end="0"/>
-                                            </p:txEl>
-                                          </p:spTgt>
-                                        </p:tgtEl>
-                                        <p:attrNameLst>
-                                          <p:attrName>style.visibility</p:attrName>
-                                        </p:attrNameLst>
-                                      </p:cBhvr>
-                                      <p:to>
-                                        <p:strVal val="visible"/>
-                                      </p:to>
-                                    </p:set>
-                                  </p:childTnLst>
-                                </p:cTn>
-                              </p:par>
-                            </p:childTnLst>
-                          </p:cTn>
-                        </p:par>
-                      </p:childTnLst>
-                    </p:cTn>
-                  </p:par>
-                  <p:par>
-                    <p:cTn id="7" fill="hold">
-                      <p:stCondLst>
-                        <p:cond delay="indefinite"/>
-                      </p:stCondLst>
-                      <p:childTnLst>
-                        <p:par>
-                          <p:cTn id="8" fill="hold">
-                            <p:stCondLst>
-                              <p:cond delay="0"/>
-                            </p:stCondLst>
-                            <p:childTnLst>
-                              <p:par>
-                                <p:cTn id="9" presetID="1" presetClass="entr" presetSubtype="0" fill="hold" grpId="0" nodeType="clickEffect">
-                                  <p:stCondLst>
-                                    <p:cond delay="0"/>
-                                  </p:stCondLst>
-                                  <p:childTnLst>
-                                    <p:set>
-                                      <p:cBhvr>
-                                        <p:cTn id="10" dur="1" fill="hold">
-                                          <p:stCondLst>
-                                            <p:cond delay="0"/>
-                                          </p:stCondLst>
-                                        </p:cTn>
-                                        <p:tgtEl>
-                                          <p:spTgt spid="3">
-                                            <p:txEl>
-                                              <p:pRg st="1" end="1"/>
-                                            </p:txEl>
-                                          </p:spTgt>
-                                        </p:tgtEl>
-                                        <p:attrNameLst>
-                                          <p:attrName>style.visibility</p:attrName>
-                                        </p:attrNameLst>
-                                      </p:cBhvr>
-                                      <p:to>
-                                        <p:strVal val="visible"/>
-                                      </p:to>
-                                    </p:set>
-                                  </p:childTnLst>
-                                </p:cTn>
-                              </p:par>
-                            </p:childTnLst>
-                          </p:cTn>
-                        </p:par>
-                      </p:childTnLst>
-                    </p:cTn>
-                  </p:par>
-                </p:childTnLst>
-              </p:cTn>
-              <p:prevCondLst>
-                <p:cond evt="onPrev" delay="0">
-                  <p:tgtEl>
-                    <p:sldTgt/>
-                  </p:tgtEl>
-                </p:cond>
-              </p:prevCondLst>
-              <p:nextCondLst>
-                <p:cond evt="onNext" delay="0">
-                  <p:tgtEl>
-                    <p:sldTgt/>
-                  </p:tgtEl>
-                </p:cond>
-              </p:nextCondLst>
-            </p:seq>
-          </p:childTnLst>
-        </p:cTn>
-      </p:par>
-    </p:tnLst>
-    <p:bldLst>
-      <p:bldP spid="3" grpId="0" build="p"/>
-    </p:bldLst>
-  </p:timing>
 </p:sld>
 </file>
 
@@ -17607,6 +16399,7 @@
           <a:lstStyle/>
           <a:p>
             <a:r>
+              <a:rPr dirty="0"/>
               <a:t>Predict: what does the assistant see?</a:t>
             </a:r>
           </a:p>
@@ -17638,33 +16431,39 @@
               <a:buNone/>
             </a:pPr>
             <a:r>
+              <a:rPr dirty="0"/>
               <a:t>Your editor's assistant. A project of forty files. You ask about a function in a file you have </a:t>
             </a:r>
             <a:r>
-              <a:rPr b="1"/>
+              <a:rPr b="1" dirty="0"/>
               <a:t>not</a:t>
             </a:r>
             <a:r>
+              <a:rPr dirty="0"/>
               <a:t> opened.</a:t>
             </a:r>
           </a:p>
           <a:p>
             <a:r>
+              <a:rPr dirty="0"/>
               <a:t>The whole project: it is open in the editor</a:t>
             </a:r>
           </a:p>
           <a:p>
             <a:r>
+              <a:rPr dirty="0"/>
               <a:t>Everything you have opened since you started the editor</a:t>
             </a:r>
           </a:p>
           <a:p>
             <a:r>
+              <a:rPr dirty="0"/>
               <a:t>The file you are in, plus whatever the assistant decided to read first</a:t>
             </a:r>
           </a:p>
           <a:p>
             <a:r>
+              <a:rPr dirty="0"/>
               <a:t>Nothing but your question</a:t>
             </a:r>
           </a:p>
@@ -18428,20 +17227,23 @@
           <a:lstStyle/>
           <a:p>
             <a:r>
+              <a:rPr dirty="0"/>
               <a:t>The opening pair was </a:t>
             </a:r>
             <a:r>
-              <a:rPr b="1"/>
+              <a:rPr b="1" dirty="0"/>
               <a:t>generation</a:t>
             </a:r>
             <a:r>
+              <a:rPr dirty="0"/>
               <a:t>: write me a function. This is </a:t>
             </a:r>
             <a:r>
-              <a:rPr b="1"/>
+              <a:rPr b="1" dirty="0"/>
               <a:t>diagnosis</a:t>
             </a:r>
             <a:r>
+              <a:rPr dirty="0"/>
               <a:t>: why is this broken?</a:t>
             </a:r>
           </a:p>
@@ -22353,7 +21155,7 @@
         </p:xfrm>
         <a:graphic>
           <a:graphicData uri="http://schemas.openxmlformats.org/drawingml/2006/chart">
-            <c:chart xmlns:c="http://schemas.openxmlformats.org/drawingml/2006/chart" xmlns:r="http://schemas.openxmlformats.org/officeDocument/2006/relationships" r:id="rId3"/>
+            <c:chart xmlns:c="http://schemas.openxmlformats.org/drawingml/2006/chart" xmlns:r="http://schemas.openxmlformats.org/officeDocument/2006/relationships" r:id="rId2"/>
           </a:graphicData>
         </a:graphic>
       </p:graphicFrame>
@@ -23866,23 +22668,27 @@
           <a:lstStyle/>
           <a:p>
             <a:r>
+              <a:rPr dirty="0"/>
               <a:t>These two lines give an </a:t>
             </a:r>
             <a:r>
-              <a:rPr b="1"/>
+              <a:rPr b="1" dirty="0"/>
               <a:t>example</a:t>
             </a:r>
             <a:r>
+              <a:rPr dirty="0"/>
               <a:t>, a rule, and a fact the model could not know: dates here are day first</a:t>
             </a:r>
           </a:p>
           <a:p>
             <a:r>
+              <a:rPr dirty="0"/>
               <a:t>Prose can be read two ways. A test can only pass or fail</a:t>
             </a:r>
           </a:p>
           <a:p>
             <a:r>
+              <a:rPr dirty="0"/>
               <a:t>Write the test first, then ask for code that passes it. You stop judging code by how it looks and check whether it passes</a:t>
             </a:r>
           </a:p>
@@ -23891,7 +22697,7 @@
               <a:buNone/>
             </a:pPr>
             <a:r>
-              <a:rPr sz="1400" b="1">
+              <a:rPr sz="1400" b="1" dirty="0">
                 <a:solidFill>
                   <a:schemeClr val="accent2"/>
                 </a:solidFill>
@@ -23900,7 +22706,7 @@
               <a:t>//</a:t>
             </a:r>
             <a:r>
-              <a:rPr sz="1400">
+              <a:rPr sz="1400" dirty="0">
                 <a:solidFill>
                   <a:schemeClr val="tx2"/>
                 </a:solidFill>
@@ -27640,7 +26446,7 @@
           <p:nvPr/>
         </p:nvPicPr>
         <p:blipFill>
-          <a:blip r:embed="rId3"/>
+          <a:blip r:embed="rId2"/>
           <a:stretch>
             <a:fillRect/>
           </a:stretch>
@@ -28049,7 +26855,7 @@
         </p:xfrm>
         <a:graphic>
           <a:graphicData uri="http://schemas.openxmlformats.org/drawingml/2006/chart">
-            <c:chart xmlns:c="http://schemas.openxmlformats.org/drawingml/2006/chart" xmlns:r="http://schemas.openxmlformats.org/officeDocument/2006/relationships" r:id="rId3"/>
+            <c:chart xmlns:c="http://schemas.openxmlformats.org/drawingml/2006/chart" xmlns:r="http://schemas.openxmlformats.org/officeDocument/2006/relationships" r:id="rId2"/>
           </a:graphicData>
         </a:graphic>
       </p:graphicFrame>
@@ -29693,7 +28499,7 @@
 
 <file path=ppt/webextensions/taskpanes.xml><?xml version="1.0" encoding="utf-8"?>
 <wetp:taskpanes xmlns:wetp="http://schemas.microsoft.com/office/webextensions/taskpanes/2010/11">
-  <wetp:taskpane dockstate="right" visibility="0" width="553" row="0">
+  <wetp:taskpane dockstate="right" visibility="0" width="350" row="0">
     <wetp:webextensionref xmlns:r="http://schemas.openxmlformats.org/officeDocument/2006/relationships" r:id="rId1"/>
   </wetp:taskpane>
 </wetp:taskpanes>
